--- a/content/blog/probabilidades-quina/Imagem_capa.pptx
+++ b/content/blog/probabilidades-quina/Imagem_capa.pptx
@@ -5,13 +5,15 @@
     <p:sldMasterId id="2147483648" r:id="rId1"/>
   </p:sldMasterIdLst>
   <p:notesMasterIdLst>
-    <p:notesMasterId r:id="rId6"/>
+    <p:notesMasterId r:id="rId8"/>
   </p:notesMasterIdLst>
   <p:sldIdLst>
     <p:sldId id="256" r:id="rId2"/>
-    <p:sldId id="259" r:id="rId3"/>
-    <p:sldId id="257" r:id="rId4"/>
-    <p:sldId id="258" r:id="rId5"/>
+    <p:sldId id="260" r:id="rId3"/>
+    <p:sldId id="261" r:id="rId4"/>
+    <p:sldId id="259" r:id="rId5"/>
+    <p:sldId id="257" r:id="rId6"/>
+    <p:sldId id="258" r:id="rId7"/>
   </p:sldIdLst>
   <p:sldSz cx="12192000" cy="6858000"/>
   <p:notesSz cx="6858000" cy="9144000"/>
@@ -200,7 +202,7 @@
           <a:p>
             <a:fld id="{4B43F5D4-8CA3-9E46-9E72-F180E59A1460}" type="datetimeFigureOut">
               <a:rPr lang="pt-BR" smtClean="0"/>
-              <a:t>24/06/2026</a:t>
+              <a:t>25/06/2026</a:t>
             </a:fld>
             <a:endParaRPr lang="pt-BR"/>
           </a:p>
@@ -640,7 +642,7 @@
           <a:p>
             <a:fld id="{6F5E88BC-58B6-DC43-9504-F90881ED6CB8}" type="slidenum">
               <a:rPr lang="pt-BR" smtClean="0"/>
-              <a:t>3</a:t>
+              <a:t>5</a:t>
             </a:fld>
             <a:endParaRPr lang="pt-BR"/>
           </a:p>
@@ -806,7 +808,7 @@
           <a:p>
             <a:fld id="{60AC8E82-B1F5-B841-A24C-24EDCCE8D796}" type="datetimeFigureOut">
               <a:rPr lang="pt-BR" smtClean="0"/>
-              <a:t>24/06/2026</a:t>
+              <a:t>25/06/2026</a:t>
             </a:fld>
             <a:endParaRPr lang="pt-BR"/>
           </a:p>
@@ -1004,7 +1006,7 @@
           <a:p>
             <a:fld id="{60AC8E82-B1F5-B841-A24C-24EDCCE8D796}" type="datetimeFigureOut">
               <a:rPr lang="pt-BR" smtClean="0"/>
-              <a:t>24/06/2026</a:t>
+              <a:t>25/06/2026</a:t>
             </a:fld>
             <a:endParaRPr lang="pt-BR"/>
           </a:p>
@@ -1212,7 +1214,7 @@
           <a:p>
             <a:fld id="{60AC8E82-B1F5-B841-A24C-24EDCCE8D796}" type="datetimeFigureOut">
               <a:rPr lang="pt-BR" smtClean="0"/>
-              <a:t>24/06/2026</a:t>
+              <a:t>25/06/2026</a:t>
             </a:fld>
             <a:endParaRPr lang="pt-BR"/>
           </a:p>
@@ -1410,7 +1412,7 @@
           <a:p>
             <a:fld id="{60AC8E82-B1F5-B841-A24C-24EDCCE8D796}" type="datetimeFigureOut">
               <a:rPr lang="pt-BR" smtClean="0"/>
-              <a:t>24/06/2026</a:t>
+              <a:t>25/06/2026</a:t>
             </a:fld>
             <a:endParaRPr lang="pt-BR"/>
           </a:p>
@@ -1685,7 +1687,7 @@
           <a:p>
             <a:fld id="{60AC8E82-B1F5-B841-A24C-24EDCCE8D796}" type="datetimeFigureOut">
               <a:rPr lang="pt-BR" smtClean="0"/>
-              <a:t>24/06/2026</a:t>
+              <a:t>25/06/2026</a:t>
             </a:fld>
             <a:endParaRPr lang="pt-BR"/>
           </a:p>
@@ -1950,7 +1952,7 @@
           <a:p>
             <a:fld id="{60AC8E82-B1F5-B841-A24C-24EDCCE8D796}" type="datetimeFigureOut">
               <a:rPr lang="pt-BR" smtClean="0"/>
-              <a:t>24/06/2026</a:t>
+              <a:t>25/06/2026</a:t>
             </a:fld>
             <a:endParaRPr lang="pt-BR"/>
           </a:p>
@@ -2362,7 +2364,7 @@
           <a:p>
             <a:fld id="{60AC8E82-B1F5-B841-A24C-24EDCCE8D796}" type="datetimeFigureOut">
               <a:rPr lang="pt-BR" smtClean="0"/>
-              <a:t>24/06/2026</a:t>
+              <a:t>25/06/2026</a:t>
             </a:fld>
             <a:endParaRPr lang="pt-BR"/>
           </a:p>
@@ -2503,7 +2505,7 @@
           <a:p>
             <a:fld id="{60AC8E82-B1F5-B841-A24C-24EDCCE8D796}" type="datetimeFigureOut">
               <a:rPr lang="pt-BR" smtClean="0"/>
-              <a:t>24/06/2026</a:t>
+              <a:t>25/06/2026</a:t>
             </a:fld>
             <a:endParaRPr lang="pt-BR"/>
           </a:p>
@@ -2616,7 +2618,7 @@
           <a:p>
             <a:fld id="{60AC8E82-B1F5-B841-A24C-24EDCCE8D796}" type="datetimeFigureOut">
               <a:rPr lang="pt-BR" smtClean="0"/>
-              <a:t>24/06/2026</a:t>
+              <a:t>25/06/2026</a:t>
             </a:fld>
             <a:endParaRPr lang="pt-BR"/>
           </a:p>
@@ -2927,7 +2929,7 @@
           <a:p>
             <a:fld id="{60AC8E82-B1F5-B841-A24C-24EDCCE8D796}" type="datetimeFigureOut">
               <a:rPr lang="pt-BR" smtClean="0"/>
-              <a:t>24/06/2026</a:t>
+              <a:t>25/06/2026</a:t>
             </a:fld>
             <a:endParaRPr lang="pt-BR"/>
           </a:p>
@@ -3215,7 +3217,7 @@
           <a:p>
             <a:fld id="{60AC8E82-B1F5-B841-A24C-24EDCCE8D796}" type="datetimeFigureOut">
               <a:rPr lang="pt-BR" smtClean="0"/>
-              <a:t>24/06/2026</a:t>
+              <a:t>25/06/2026</a:t>
             </a:fld>
             <a:endParaRPr lang="pt-BR"/>
           </a:p>
@@ -3456,7 +3458,7 @@
           <a:p>
             <a:fld id="{60AC8E82-B1F5-B841-A24C-24EDCCE8D796}" type="datetimeFigureOut">
               <a:rPr lang="pt-BR" smtClean="0"/>
-              <a:t>24/06/2026</a:t>
+              <a:t>25/06/2026</a:t>
             </a:fld>
             <a:endParaRPr lang="pt-BR"/>
           </a:p>
@@ -3944,6 +3946,37 @@
           </a:p>
         </p:txBody>
       </p:sp>
+      <p:pic>
+        <p:nvPicPr>
+          <p:cNvPr id="2" name="Imagem 1">
+            <a:extLst>
+              <a:ext uri="{FF2B5EF4-FFF2-40B4-BE49-F238E27FC236}">
+                <a16:creationId xmlns:a16="http://schemas.microsoft.com/office/drawing/2014/main" id="{5E981A45-0D0B-3BC1-56BC-2BA33278E1F8}"/>
+              </a:ext>
+            </a:extLst>
+          </p:cNvPr>
+          <p:cNvPicPr>
+            <a:picLocks noChangeAspect="1"/>
+          </p:cNvPicPr>
+          <p:nvPr/>
+        </p:nvPicPr>
+        <p:blipFill>
+          <a:blip r:embed="rId3"/>
+          <a:srcRect l="15438" t="26036" r="15444" b="46310"/>
+          <a:stretch>
+            <a:fillRect/>
+          </a:stretch>
+        </p:blipFill>
+        <p:spPr>
+          <a:xfrm>
+            <a:off x="3879748" y="891384"/>
+            <a:ext cx="4661109" cy="1313481"/>
+          </a:xfrm>
+          <a:prstGeom prst="rect">
+            <a:avLst/>
+          </a:prstGeom>
+        </p:spPr>
+      </p:pic>
       <p:sp>
         <p:nvSpPr>
           <p:cNvPr id="1178" name="Retângulo 1177">
@@ -4084,6 +4117,13 @@
                 <a:solidFill>
                   <a:schemeClr val="bg1"/>
                 </a:solidFill>
+                <a:effectLst>
+                  <a:outerShdw blurRad="50800" dist="38100" algn="l" rotWithShape="0">
+                    <a:prstClr val="black">
+                      <a:alpha val="40000"/>
+                    </a:prstClr>
+                  </a:outerShdw>
+                </a:effectLst>
                 <a:latin typeface="Aharoni" panose="02010803020104030203" pitchFamily="2" charset="-79"/>
                 <a:cs typeface="Aharoni" panose="02010803020104030203" pitchFamily="2" charset="-79"/>
               </a:rPr>
@@ -9223,6 +9263,4469 @@
           </p:sp>
         </p:grpSp>
       </p:grpSp>
+      <p:sp>
+        <p:nvSpPr>
+          <p:cNvPr id="3" name="Retângulo 2">
+            <a:extLst>
+              <a:ext uri="{FF2B5EF4-FFF2-40B4-BE49-F238E27FC236}">
+                <a16:creationId xmlns:a16="http://schemas.microsoft.com/office/drawing/2014/main" id="{0E258F42-1597-0A47-9549-DF672A32D01E}"/>
+              </a:ext>
+            </a:extLst>
+          </p:cNvPr>
+          <p:cNvSpPr/>
+          <p:nvPr/>
+        </p:nvSpPr>
+        <p:spPr>
+          <a:xfrm>
+            <a:off x="3832985" y="2195721"/>
+            <a:ext cx="4707872" cy="45719"/>
+          </a:xfrm>
+          <a:prstGeom prst="rect">
+            <a:avLst/>
+          </a:prstGeom>
+          <a:solidFill>
+            <a:schemeClr val="bg1"/>
+          </a:solidFill>
+          <a:ln>
+            <a:noFill/>
+          </a:ln>
+        </p:spPr>
+        <p:style>
+          <a:lnRef idx="2">
+            <a:schemeClr val="accent1">
+              <a:shade val="15000"/>
+            </a:schemeClr>
+          </a:lnRef>
+          <a:fillRef idx="1">
+            <a:schemeClr val="accent1"/>
+          </a:fillRef>
+          <a:effectRef idx="0">
+            <a:schemeClr val="accent1"/>
+          </a:effectRef>
+          <a:fontRef idx="minor">
+            <a:schemeClr val="lt1"/>
+          </a:fontRef>
+        </p:style>
+        <p:txBody>
+          <a:bodyPr rtlCol="0" anchor="ctr"/>
+          <a:lstStyle/>
+          <a:p>
+            <a:pPr algn="ctr"/>
+            <a:endParaRPr lang="pt-BR"/>
+          </a:p>
+        </p:txBody>
+      </p:sp>
+      <p:sp>
+        <p:nvSpPr>
+          <p:cNvPr id="6" name="Retângulo 5">
+            <a:extLst>
+              <a:ext uri="{FF2B5EF4-FFF2-40B4-BE49-F238E27FC236}">
+                <a16:creationId xmlns:a16="http://schemas.microsoft.com/office/drawing/2014/main" id="{2A013817-62E3-0187-87AC-2952313CDE12}"/>
+              </a:ext>
+            </a:extLst>
+          </p:cNvPr>
+          <p:cNvSpPr/>
+          <p:nvPr/>
+        </p:nvSpPr>
+        <p:spPr>
+          <a:xfrm>
+            <a:off x="3838078" y="871959"/>
+            <a:ext cx="4707872" cy="45719"/>
+          </a:xfrm>
+          <a:prstGeom prst="rect">
+            <a:avLst/>
+          </a:prstGeom>
+          <a:solidFill>
+            <a:schemeClr val="bg1"/>
+          </a:solidFill>
+          <a:ln>
+            <a:noFill/>
+          </a:ln>
+        </p:spPr>
+        <p:style>
+          <a:lnRef idx="2">
+            <a:schemeClr val="accent1">
+              <a:shade val="15000"/>
+            </a:schemeClr>
+          </a:lnRef>
+          <a:fillRef idx="1">
+            <a:schemeClr val="accent1"/>
+          </a:fillRef>
+          <a:effectRef idx="0">
+            <a:schemeClr val="accent1"/>
+          </a:effectRef>
+          <a:fontRef idx="minor">
+            <a:schemeClr val="lt1"/>
+          </a:fontRef>
+        </p:style>
+        <p:txBody>
+          <a:bodyPr rtlCol="0" anchor="ctr"/>
+          <a:lstStyle/>
+          <a:p>
+            <a:pPr algn="ctr"/>
+            <a:endParaRPr lang="pt-BR"/>
+          </a:p>
+        </p:txBody>
+      </p:sp>
+      <p:sp>
+        <p:nvSpPr>
+          <p:cNvPr id="8" name="Retângulo 7">
+            <a:extLst>
+              <a:ext uri="{FF2B5EF4-FFF2-40B4-BE49-F238E27FC236}">
+                <a16:creationId xmlns:a16="http://schemas.microsoft.com/office/drawing/2014/main" id="{3A2B80C7-CC49-66CD-0177-D59B51EBF586}"/>
+              </a:ext>
+            </a:extLst>
+          </p:cNvPr>
+          <p:cNvSpPr/>
+          <p:nvPr/>
+        </p:nvSpPr>
+        <p:spPr>
+          <a:xfrm>
+            <a:off x="3922603" y="5520209"/>
+            <a:ext cx="4608254" cy="2312864"/>
+          </a:xfrm>
+          <a:prstGeom prst="rect">
+            <a:avLst/>
+          </a:prstGeom>
+          <a:solidFill>
+            <a:srgbClr val="FFFBF0"/>
+          </a:solidFill>
+          <a:ln>
+            <a:noFill/>
+          </a:ln>
+        </p:spPr>
+        <p:style>
+          <a:lnRef idx="2">
+            <a:schemeClr val="accent1">
+              <a:shade val="15000"/>
+            </a:schemeClr>
+          </a:lnRef>
+          <a:fillRef idx="1">
+            <a:schemeClr val="accent1"/>
+          </a:fillRef>
+          <a:effectRef idx="0">
+            <a:schemeClr val="accent1"/>
+          </a:effectRef>
+          <a:fontRef idx="minor">
+            <a:schemeClr val="lt1"/>
+          </a:fontRef>
+        </p:style>
+        <p:txBody>
+          <a:bodyPr rtlCol="0" anchor="ctr"/>
+          <a:lstStyle/>
+          <a:p>
+            <a:pPr algn="ctr"/>
+            <a:endParaRPr lang="pt-BR"/>
+          </a:p>
+        </p:txBody>
+      </p:sp>
+      <p:grpSp>
+        <p:nvGrpSpPr>
+          <p:cNvPr id="10" name="Agrupar 9">
+            <a:extLst>
+              <a:ext uri="{FF2B5EF4-FFF2-40B4-BE49-F238E27FC236}">
+                <a16:creationId xmlns:a16="http://schemas.microsoft.com/office/drawing/2014/main" id="{781E8FE1-2BE4-FE9B-90EC-074E3768F1A3}"/>
+              </a:ext>
+            </a:extLst>
+          </p:cNvPr>
+          <p:cNvGrpSpPr/>
+          <p:nvPr/>
+        </p:nvGrpSpPr>
+        <p:grpSpPr>
+          <a:xfrm>
+            <a:off x="4012845" y="5540697"/>
+            <a:ext cx="4416114" cy="307777"/>
+            <a:chOff x="7289572" y="2889564"/>
+            <a:chExt cx="4416114" cy="307777"/>
+          </a:xfrm>
+        </p:grpSpPr>
+        <p:sp>
+          <p:nvSpPr>
+            <p:cNvPr id="11" name="CaixaDeTexto 10">
+              <a:extLst>
+                <a:ext uri="{FF2B5EF4-FFF2-40B4-BE49-F238E27FC236}">
+                  <a16:creationId xmlns:a16="http://schemas.microsoft.com/office/drawing/2014/main" id="{2FF674F2-55E2-1562-DF44-18CE47C7210C}"/>
+                </a:ext>
+              </a:extLst>
+            </p:cNvPr>
+            <p:cNvSpPr txBox="1"/>
+            <p:nvPr/>
+          </p:nvSpPr>
+          <p:spPr>
+            <a:xfrm>
+              <a:off x="7289572" y="2889564"/>
+              <a:ext cx="494323" cy="307777"/>
+            </a:xfrm>
+            <a:prstGeom prst="rect">
+              <a:avLst/>
+            </a:prstGeom>
+            <a:noFill/>
+          </p:spPr>
+          <p:txBody>
+            <a:bodyPr wrap="square" rtlCol="0">
+              <a:spAutoFit/>
+            </a:bodyPr>
+            <a:lstStyle/>
+            <a:p>
+              <a:pPr algn="ctr"/>
+              <a:r>
+                <a:rPr lang="pt-BR" sz="1400" dirty="0">
+                  <a:solidFill>
+                    <a:srgbClr val="C00000"/>
+                  </a:solidFill>
+                  <a:latin typeface="Arial" panose="020B0604020202020204" pitchFamily="34" charset="0"/>
+                  <a:cs typeface="Arial" panose="020B0604020202020204" pitchFamily="34" charset="0"/>
+                </a:rPr>
+                <a:t>[01]</a:t>
+              </a:r>
+            </a:p>
+          </p:txBody>
+        </p:sp>
+        <p:sp>
+          <p:nvSpPr>
+            <p:cNvPr id="12" name="CaixaDeTexto 11">
+              <a:extLst>
+                <a:ext uri="{FF2B5EF4-FFF2-40B4-BE49-F238E27FC236}">
+                  <a16:creationId xmlns:a16="http://schemas.microsoft.com/office/drawing/2014/main" id="{1E758966-657E-9B4D-1E5F-368685BFF2C7}"/>
+                </a:ext>
+              </a:extLst>
+            </p:cNvPr>
+            <p:cNvSpPr txBox="1"/>
+            <p:nvPr/>
+          </p:nvSpPr>
+          <p:spPr>
+            <a:xfrm>
+              <a:off x="7725327" y="2889564"/>
+              <a:ext cx="494323" cy="307777"/>
+            </a:xfrm>
+            <a:prstGeom prst="rect">
+              <a:avLst/>
+            </a:prstGeom>
+            <a:noFill/>
+          </p:spPr>
+          <p:txBody>
+            <a:bodyPr wrap="square" rtlCol="0">
+              <a:spAutoFit/>
+            </a:bodyPr>
+            <a:lstStyle/>
+            <a:p>
+              <a:pPr algn="ctr"/>
+              <a:r>
+                <a:rPr lang="pt-BR" sz="1400" dirty="0">
+                  <a:solidFill>
+                    <a:srgbClr val="C00000"/>
+                  </a:solidFill>
+                  <a:latin typeface="Arial" panose="020B0604020202020204" pitchFamily="34" charset="0"/>
+                  <a:cs typeface="Arial" panose="020B0604020202020204" pitchFamily="34" charset="0"/>
+                </a:rPr>
+                <a:t>[02]</a:t>
+              </a:r>
+            </a:p>
+          </p:txBody>
+        </p:sp>
+        <p:sp>
+          <p:nvSpPr>
+            <p:cNvPr id="13" name="CaixaDeTexto 12">
+              <a:extLst>
+                <a:ext uri="{FF2B5EF4-FFF2-40B4-BE49-F238E27FC236}">
+                  <a16:creationId xmlns:a16="http://schemas.microsoft.com/office/drawing/2014/main" id="{B84A0507-86ED-DFF2-43B2-9D858325296D}"/>
+                </a:ext>
+              </a:extLst>
+            </p:cNvPr>
+            <p:cNvSpPr txBox="1"/>
+            <p:nvPr/>
+          </p:nvSpPr>
+          <p:spPr>
+            <a:xfrm>
+              <a:off x="8161082" y="2889564"/>
+              <a:ext cx="494323" cy="307777"/>
+            </a:xfrm>
+            <a:prstGeom prst="rect">
+              <a:avLst/>
+            </a:prstGeom>
+            <a:noFill/>
+          </p:spPr>
+          <p:txBody>
+            <a:bodyPr wrap="square" rtlCol="0">
+              <a:spAutoFit/>
+            </a:bodyPr>
+            <a:lstStyle/>
+            <a:p>
+              <a:pPr algn="ctr"/>
+              <a:r>
+                <a:rPr lang="pt-BR" sz="1400" dirty="0">
+                  <a:solidFill>
+                    <a:srgbClr val="C00000"/>
+                  </a:solidFill>
+                  <a:latin typeface="Arial" panose="020B0604020202020204" pitchFamily="34" charset="0"/>
+                  <a:cs typeface="Arial" panose="020B0604020202020204" pitchFamily="34" charset="0"/>
+                </a:rPr>
+                <a:t>[03]</a:t>
+              </a:r>
+            </a:p>
+          </p:txBody>
+        </p:sp>
+        <p:sp>
+          <p:nvSpPr>
+            <p:cNvPr id="14" name="CaixaDeTexto 13">
+              <a:extLst>
+                <a:ext uri="{FF2B5EF4-FFF2-40B4-BE49-F238E27FC236}">
+                  <a16:creationId xmlns:a16="http://schemas.microsoft.com/office/drawing/2014/main" id="{A231DA53-BF80-8C2B-7D98-460190BE06DB}"/>
+                </a:ext>
+              </a:extLst>
+            </p:cNvPr>
+            <p:cNvSpPr txBox="1"/>
+            <p:nvPr/>
+          </p:nvSpPr>
+          <p:spPr>
+            <a:xfrm>
+              <a:off x="8596837" y="2889564"/>
+              <a:ext cx="494323" cy="307777"/>
+            </a:xfrm>
+            <a:prstGeom prst="rect">
+              <a:avLst/>
+            </a:prstGeom>
+            <a:noFill/>
+          </p:spPr>
+          <p:txBody>
+            <a:bodyPr wrap="square" rtlCol="0">
+              <a:spAutoFit/>
+            </a:bodyPr>
+            <a:lstStyle/>
+            <a:p>
+              <a:pPr algn="ctr"/>
+              <a:r>
+                <a:rPr lang="pt-BR" sz="1400" dirty="0">
+                  <a:solidFill>
+                    <a:srgbClr val="C00000"/>
+                  </a:solidFill>
+                  <a:latin typeface="Arial" panose="020B0604020202020204" pitchFamily="34" charset="0"/>
+                  <a:cs typeface="Arial" panose="020B0604020202020204" pitchFamily="34" charset="0"/>
+                </a:rPr>
+                <a:t>[04]</a:t>
+              </a:r>
+            </a:p>
+          </p:txBody>
+        </p:sp>
+        <p:sp>
+          <p:nvSpPr>
+            <p:cNvPr id="15" name="CaixaDeTexto 14">
+              <a:extLst>
+                <a:ext uri="{FF2B5EF4-FFF2-40B4-BE49-F238E27FC236}">
+                  <a16:creationId xmlns:a16="http://schemas.microsoft.com/office/drawing/2014/main" id="{2DAD2D97-88B2-32C4-F2A3-0F2CFB5480A2}"/>
+                </a:ext>
+              </a:extLst>
+            </p:cNvPr>
+            <p:cNvSpPr txBox="1"/>
+            <p:nvPr/>
+          </p:nvSpPr>
+          <p:spPr>
+            <a:xfrm>
+              <a:off x="9032592" y="2889564"/>
+              <a:ext cx="494323" cy="307777"/>
+            </a:xfrm>
+            <a:prstGeom prst="rect">
+              <a:avLst/>
+            </a:prstGeom>
+            <a:noFill/>
+          </p:spPr>
+          <p:txBody>
+            <a:bodyPr wrap="square" rtlCol="0">
+              <a:spAutoFit/>
+            </a:bodyPr>
+            <a:lstStyle/>
+            <a:p>
+              <a:pPr algn="ctr"/>
+              <a:r>
+                <a:rPr lang="pt-BR" sz="1400" dirty="0">
+                  <a:solidFill>
+                    <a:srgbClr val="C00000"/>
+                  </a:solidFill>
+                  <a:latin typeface="Arial" panose="020B0604020202020204" pitchFamily="34" charset="0"/>
+                  <a:cs typeface="Arial" panose="020B0604020202020204" pitchFamily="34" charset="0"/>
+                </a:rPr>
+                <a:t>[05]</a:t>
+              </a:r>
+            </a:p>
+          </p:txBody>
+        </p:sp>
+        <p:sp>
+          <p:nvSpPr>
+            <p:cNvPr id="16" name="CaixaDeTexto 15">
+              <a:extLst>
+                <a:ext uri="{FF2B5EF4-FFF2-40B4-BE49-F238E27FC236}">
+                  <a16:creationId xmlns:a16="http://schemas.microsoft.com/office/drawing/2014/main" id="{2A67D164-1A73-E164-3080-0EFC03F60BBA}"/>
+                </a:ext>
+              </a:extLst>
+            </p:cNvPr>
+            <p:cNvSpPr txBox="1"/>
+            <p:nvPr/>
+          </p:nvSpPr>
+          <p:spPr>
+            <a:xfrm>
+              <a:off x="9468347" y="2889564"/>
+              <a:ext cx="494323" cy="307777"/>
+            </a:xfrm>
+            <a:prstGeom prst="rect">
+              <a:avLst/>
+            </a:prstGeom>
+            <a:noFill/>
+          </p:spPr>
+          <p:txBody>
+            <a:bodyPr wrap="square" rtlCol="0">
+              <a:spAutoFit/>
+            </a:bodyPr>
+            <a:lstStyle/>
+            <a:p>
+              <a:pPr algn="ctr"/>
+              <a:r>
+                <a:rPr lang="pt-BR" sz="1400" dirty="0">
+                  <a:solidFill>
+                    <a:srgbClr val="C00000"/>
+                  </a:solidFill>
+                  <a:latin typeface="Arial" panose="020B0604020202020204" pitchFamily="34" charset="0"/>
+                  <a:cs typeface="Arial" panose="020B0604020202020204" pitchFamily="34" charset="0"/>
+                </a:rPr>
+                <a:t>[06]</a:t>
+              </a:r>
+            </a:p>
+          </p:txBody>
+        </p:sp>
+        <p:sp>
+          <p:nvSpPr>
+            <p:cNvPr id="17" name="CaixaDeTexto 16">
+              <a:extLst>
+                <a:ext uri="{FF2B5EF4-FFF2-40B4-BE49-F238E27FC236}">
+                  <a16:creationId xmlns:a16="http://schemas.microsoft.com/office/drawing/2014/main" id="{E05C91E1-BA99-F7ED-C96B-A78649D7B337}"/>
+                </a:ext>
+              </a:extLst>
+            </p:cNvPr>
+            <p:cNvSpPr txBox="1"/>
+            <p:nvPr/>
+          </p:nvSpPr>
+          <p:spPr>
+            <a:xfrm>
+              <a:off x="9904102" y="2889564"/>
+              <a:ext cx="494323" cy="307777"/>
+            </a:xfrm>
+            <a:prstGeom prst="rect">
+              <a:avLst/>
+            </a:prstGeom>
+            <a:noFill/>
+          </p:spPr>
+          <p:txBody>
+            <a:bodyPr wrap="square" rtlCol="0">
+              <a:spAutoFit/>
+            </a:bodyPr>
+            <a:lstStyle/>
+            <a:p>
+              <a:pPr algn="ctr"/>
+              <a:r>
+                <a:rPr lang="pt-BR" sz="1400" dirty="0">
+                  <a:solidFill>
+                    <a:srgbClr val="C00000"/>
+                  </a:solidFill>
+                  <a:latin typeface="Arial" panose="020B0604020202020204" pitchFamily="34" charset="0"/>
+                  <a:cs typeface="Arial" panose="020B0604020202020204" pitchFamily="34" charset="0"/>
+                </a:rPr>
+                <a:t>[07]</a:t>
+              </a:r>
+            </a:p>
+          </p:txBody>
+        </p:sp>
+        <p:sp>
+          <p:nvSpPr>
+            <p:cNvPr id="19" name="CaixaDeTexto 18">
+              <a:extLst>
+                <a:ext uri="{FF2B5EF4-FFF2-40B4-BE49-F238E27FC236}">
+                  <a16:creationId xmlns:a16="http://schemas.microsoft.com/office/drawing/2014/main" id="{6D708E3B-82B4-4F3D-EC69-1A59E7AF1529}"/>
+                </a:ext>
+              </a:extLst>
+            </p:cNvPr>
+            <p:cNvSpPr txBox="1"/>
+            <p:nvPr/>
+          </p:nvSpPr>
+          <p:spPr>
+            <a:xfrm>
+              <a:off x="10339857" y="2889564"/>
+              <a:ext cx="494323" cy="307777"/>
+            </a:xfrm>
+            <a:prstGeom prst="rect">
+              <a:avLst/>
+            </a:prstGeom>
+            <a:noFill/>
+          </p:spPr>
+          <p:txBody>
+            <a:bodyPr wrap="square" rtlCol="0">
+              <a:spAutoFit/>
+            </a:bodyPr>
+            <a:lstStyle/>
+            <a:p>
+              <a:pPr algn="ctr"/>
+              <a:r>
+                <a:rPr lang="pt-BR" sz="1400" dirty="0">
+                  <a:solidFill>
+                    <a:srgbClr val="C00000"/>
+                  </a:solidFill>
+                  <a:latin typeface="Arial" panose="020B0604020202020204" pitchFamily="34" charset="0"/>
+                  <a:cs typeface="Arial" panose="020B0604020202020204" pitchFamily="34" charset="0"/>
+                </a:rPr>
+                <a:t>[08]</a:t>
+              </a:r>
+            </a:p>
+          </p:txBody>
+        </p:sp>
+        <p:sp>
+          <p:nvSpPr>
+            <p:cNvPr id="35" name="CaixaDeTexto 34">
+              <a:extLst>
+                <a:ext uri="{FF2B5EF4-FFF2-40B4-BE49-F238E27FC236}">
+                  <a16:creationId xmlns:a16="http://schemas.microsoft.com/office/drawing/2014/main" id="{3C696621-B688-3480-2DFA-7AF7B268FA89}"/>
+                </a:ext>
+              </a:extLst>
+            </p:cNvPr>
+            <p:cNvSpPr txBox="1"/>
+            <p:nvPr/>
+          </p:nvSpPr>
+          <p:spPr>
+            <a:xfrm>
+              <a:off x="10775612" y="2889564"/>
+              <a:ext cx="494323" cy="307777"/>
+            </a:xfrm>
+            <a:prstGeom prst="rect">
+              <a:avLst/>
+            </a:prstGeom>
+            <a:noFill/>
+          </p:spPr>
+          <p:txBody>
+            <a:bodyPr wrap="square" rtlCol="0">
+              <a:spAutoFit/>
+            </a:bodyPr>
+            <a:lstStyle/>
+            <a:p>
+              <a:pPr algn="ctr"/>
+              <a:r>
+                <a:rPr lang="pt-BR" sz="1400" dirty="0">
+                  <a:solidFill>
+                    <a:srgbClr val="C00000"/>
+                  </a:solidFill>
+                  <a:latin typeface="Arial" panose="020B0604020202020204" pitchFamily="34" charset="0"/>
+                  <a:cs typeface="Arial" panose="020B0604020202020204" pitchFamily="34" charset="0"/>
+                </a:rPr>
+                <a:t>[09]</a:t>
+              </a:r>
+            </a:p>
+          </p:txBody>
+        </p:sp>
+        <p:sp>
+          <p:nvSpPr>
+            <p:cNvPr id="1078" name="CaixaDeTexto 1077">
+              <a:extLst>
+                <a:ext uri="{FF2B5EF4-FFF2-40B4-BE49-F238E27FC236}">
+                  <a16:creationId xmlns:a16="http://schemas.microsoft.com/office/drawing/2014/main" id="{928CA91C-3A15-3CA2-1B69-965F880C9799}"/>
+                </a:ext>
+              </a:extLst>
+            </p:cNvPr>
+            <p:cNvSpPr txBox="1"/>
+            <p:nvPr/>
+          </p:nvSpPr>
+          <p:spPr>
+            <a:xfrm>
+              <a:off x="11211363" y="2889564"/>
+              <a:ext cx="494323" cy="307777"/>
+            </a:xfrm>
+            <a:prstGeom prst="rect">
+              <a:avLst/>
+            </a:prstGeom>
+            <a:noFill/>
+          </p:spPr>
+          <p:txBody>
+            <a:bodyPr wrap="square" rtlCol="0">
+              <a:spAutoFit/>
+            </a:bodyPr>
+            <a:lstStyle/>
+            <a:p>
+              <a:pPr algn="ctr"/>
+              <a:r>
+                <a:rPr lang="pt-BR" sz="1400" dirty="0">
+                  <a:solidFill>
+                    <a:srgbClr val="C00000"/>
+                  </a:solidFill>
+                  <a:latin typeface="Arial" panose="020B0604020202020204" pitchFamily="34" charset="0"/>
+                  <a:cs typeface="Arial" panose="020B0604020202020204" pitchFamily="34" charset="0"/>
+                </a:rPr>
+                <a:t>[10]</a:t>
+              </a:r>
+            </a:p>
+          </p:txBody>
+        </p:sp>
+      </p:grpSp>
+      <p:grpSp>
+        <p:nvGrpSpPr>
+          <p:cNvPr id="1079" name="Agrupar 1078">
+            <a:extLst>
+              <a:ext uri="{FF2B5EF4-FFF2-40B4-BE49-F238E27FC236}">
+                <a16:creationId xmlns:a16="http://schemas.microsoft.com/office/drawing/2014/main" id="{C6FAB2FA-95BB-438A-85C4-B5FE93FCBFA3}"/>
+              </a:ext>
+            </a:extLst>
+          </p:cNvPr>
+          <p:cNvGrpSpPr/>
+          <p:nvPr/>
+        </p:nvGrpSpPr>
+        <p:grpSpPr>
+          <a:xfrm>
+            <a:off x="4012845" y="5785644"/>
+            <a:ext cx="4416114" cy="307777"/>
+            <a:chOff x="7289572" y="2889564"/>
+            <a:chExt cx="4416114" cy="307777"/>
+          </a:xfrm>
+        </p:grpSpPr>
+        <p:sp>
+          <p:nvSpPr>
+            <p:cNvPr id="1080" name="CaixaDeTexto 1079">
+              <a:extLst>
+                <a:ext uri="{FF2B5EF4-FFF2-40B4-BE49-F238E27FC236}">
+                  <a16:creationId xmlns:a16="http://schemas.microsoft.com/office/drawing/2014/main" id="{DE86136D-56FE-1789-084B-C03EEA6866B4}"/>
+                </a:ext>
+              </a:extLst>
+            </p:cNvPr>
+            <p:cNvSpPr txBox="1"/>
+            <p:nvPr/>
+          </p:nvSpPr>
+          <p:spPr>
+            <a:xfrm>
+              <a:off x="7289572" y="2889564"/>
+              <a:ext cx="494323" cy="307777"/>
+            </a:xfrm>
+            <a:prstGeom prst="rect">
+              <a:avLst/>
+            </a:prstGeom>
+            <a:noFill/>
+          </p:spPr>
+          <p:txBody>
+            <a:bodyPr wrap="square" rtlCol="0">
+              <a:spAutoFit/>
+            </a:bodyPr>
+            <a:lstStyle/>
+            <a:p>
+              <a:pPr algn="ctr"/>
+              <a:r>
+                <a:rPr lang="pt-BR" sz="1400" dirty="0">
+                  <a:solidFill>
+                    <a:srgbClr val="C00000"/>
+                  </a:solidFill>
+                  <a:latin typeface="Arial" panose="020B0604020202020204" pitchFamily="34" charset="0"/>
+                  <a:cs typeface="Arial" panose="020B0604020202020204" pitchFamily="34" charset="0"/>
+                </a:rPr>
+                <a:t>[11]</a:t>
+              </a:r>
+            </a:p>
+          </p:txBody>
+        </p:sp>
+        <p:sp>
+          <p:nvSpPr>
+            <p:cNvPr id="1081" name="CaixaDeTexto 1080">
+              <a:extLst>
+                <a:ext uri="{FF2B5EF4-FFF2-40B4-BE49-F238E27FC236}">
+                  <a16:creationId xmlns:a16="http://schemas.microsoft.com/office/drawing/2014/main" id="{63A78992-FE6A-07FB-1D33-14B530F818CE}"/>
+                </a:ext>
+              </a:extLst>
+            </p:cNvPr>
+            <p:cNvSpPr txBox="1"/>
+            <p:nvPr/>
+          </p:nvSpPr>
+          <p:spPr>
+            <a:xfrm>
+              <a:off x="7725327" y="2889564"/>
+              <a:ext cx="494323" cy="307777"/>
+            </a:xfrm>
+            <a:prstGeom prst="rect">
+              <a:avLst/>
+            </a:prstGeom>
+            <a:noFill/>
+          </p:spPr>
+          <p:txBody>
+            <a:bodyPr wrap="square" rtlCol="0">
+              <a:spAutoFit/>
+            </a:bodyPr>
+            <a:lstStyle/>
+            <a:p>
+              <a:pPr algn="ctr"/>
+              <a:r>
+                <a:rPr lang="pt-BR" sz="1400" dirty="0">
+                  <a:solidFill>
+                    <a:srgbClr val="C00000"/>
+                  </a:solidFill>
+                  <a:latin typeface="Arial" panose="020B0604020202020204" pitchFamily="34" charset="0"/>
+                  <a:cs typeface="Arial" panose="020B0604020202020204" pitchFamily="34" charset="0"/>
+                </a:rPr>
+                <a:t>[12]</a:t>
+              </a:r>
+            </a:p>
+          </p:txBody>
+        </p:sp>
+        <p:sp>
+          <p:nvSpPr>
+            <p:cNvPr id="1082" name="CaixaDeTexto 1081">
+              <a:extLst>
+                <a:ext uri="{FF2B5EF4-FFF2-40B4-BE49-F238E27FC236}">
+                  <a16:creationId xmlns:a16="http://schemas.microsoft.com/office/drawing/2014/main" id="{F51723E4-F99A-F5C2-81F7-994A6A50B8B1}"/>
+                </a:ext>
+              </a:extLst>
+            </p:cNvPr>
+            <p:cNvSpPr txBox="1"/>
+            <p:nvPr/>
+          </p:nvSpPr>
+          <p:spPr>
+            <a:xfrm>
+              <a:off x="8161082" y="2889564"/>
+              <a:ext cx="494323" cy="307777"/>
+            </a:xfrm>
+            <a:prstGeom prst="rect">
+              <a:avLst/>
+            </a:prstGeom>
+            <a:noFill/>
+          </p:spPr>
+          <p:txBody>
+            <a:bodyPr wrap="square" rtlCol="0">
+              <a:spAutoFit/>
+            </a:bodyPr>
+            <a:lstStyle/>
+            <a:p>
+              <a:pPr algn="ctr"/>
+              <a:r>
+                <a:rPr lang="pt-BR" sz="1400" dirty="0">
+                  <a:solidFill>
+                    <a:srgbClr val="C00000"/>
+                  </a:solidFill>
+                  <a:latin typeface="Arial" panose="020B0604020202020204" pitchFamily="34" charset="0"/>
+                  <a:cs typeface="Arial" panose="020B0604020202020204" pitchFamily="34" charset="0"/>
+                </a:rPr>
+                <a:t>[13]</a:t>
+              </a:r>
+            </a:p>
+          </p:txBody>
+        </p:sp>
+        <p:sp>
+          <p:nvSpPr>
+            <p:cNvPr id="1083" name="CaixaDeTexto 1082">
+              <a:extLst>
+                <a:ext uri="{FF2B5EF4-FFF2-40B4-BE49-F238E27FC236}">
+                  <a16:creationId xmlns:a16="http://schemas.microsoft.com/office/drawing/2014/main" id="{1DAE8EB0-B1B3-DE95-2F64-5124BE2356B3}"/>
+                </a:ext>
+              </a:extLst>
+            </p:cNvPr>
+            <p:cNvSpPr txBox="1"/>
+            <p:nvPr/>
+          </p:nvSpPr>
+          <p:spPr>
+            <a:xfrm>
+              <a:off x="8596837" y="2889564"/>
+              <a:ext cx="494323" cy="307777"/>
+            </a:xfrm>
+            <a:prstGeom prst="rect">
+              <a:avLst/>
+            </a:prstGeom>
+            <a:noFill/>
+          </p:spPr>
+          <p:txBody>
+            <a:bodyPr wrap="square" rtlCol="0">
+              <a:spAutoFit/>
+            </a:bodyPr>
+            <a:lstStyle/>
+            <a:p>
+              <a:pPr algn="ctr"/>
+              <a:r>
+                <a:rPr lang="pt-BR" sz="1400" dirty="0">
+                  <a:solidFill>
+                    <a:srgbClr val="C00000"/>
+                  </a:solidFill>
+                  <a:latin typeface="Arial" panose="020B0604020202020204" pitchFamily="34" charset="0"/>
+                  <a:cs typeface="Arial" panose="020B0604020202020204" pitchFamily="34" charset="0"/>
+                </a:rPr>
+                <a:t>[14]</a:t>
+              </a:r>
+            </a:p>
+          </p:txBody>
+        </p:sp>
+        <p:sp>
+          <p:nvSpPr>
+            <p:cNvPr id="1084" name="CaixaDeTexto 1083">
+              <a:extLst>
+                <a:ext uri="{FF2B5EF4-FFF2-40B4-BE49-F238E27FC236}">
+                  <a16:creationId xmlns:a16="http://schemas.microsoft.com/office/drawing/2014/main" id="{119385CB-E59E-6094-2C48-52EB82321BAC}"/>
+                </a:ext>
+              </a:extLst>
+            </p:cNvPr>
+            <p:cNvSpPr txBox="1"/>
+            <p:nvPr/>
+          </p:nvSpPr>
+          <p:spPr>
+            <a:xfrm>
+              <a:off x="9032592" y="2889564"/>
+              <a:ext cx="494323" cy="307777"/>
+            </a:xfrm>
+            <a:prstGeom prst="rect">
+              <a:avLst/>
+            </a:prstGeom>
+            <a:noFill/>
+          </p:spPr>
+          <p:txBody>
+            <a:bodyPr wrap="square" rtlCol="0">
+              <a:spAutoFit/>
+            </a:bodyPr>
+            <a:lstStyle/>
+            <a:p>
+              <a:pPr algn="ctr"/>
+              <a:r>
+                <a:rPr lang="pt-BR" sz="1400" dirty="0">
+                  <a:solidFill>
+                    <a:srgbClr val="C00000"/>
+                  </a:solidFill>
+                  <a:latin typeface="Arial" panose="020B0604020202020204" pitchFamily="34" charset="0"/>
+                  <a:cs typeface="Arial" panose="020B0604020202020204" pitchFamily="34" charset="0"/>
+                </a:rPr>
+                <a:t>[15]</a:t>
+              </a:r>
+            </a:p>
+          </p:txBody>
+        </p:sp>
+        <p:sp>
+          <p:nvSpPr>
+            <p:cNvPr id="1085" name="CaixaDeTexto 1084">
+              <a:extLst>
+                <a:ext uri="{FF2B5EF4-FFF2-40B4-BE49-F238E27FC236}">
+                  <a16:creationId xmlns:a16="http://schemas.microsoft.com/office/drawing/2014/main" id="{F79B7A32-B5F3-BFD1-A1E3-E5C1EC6B84E0}"/>
+                </a:ext>
+              </a:extLst>
+            </p:cNvPr>
+            <p:cNvSpPr txBox="1"/>
+            <p:nvPr/>
+          </p:nvSpPr>
+          <p:spPr>
+            <a:xfrm>
+              <a:off x="9468347" y="2889564"/>
+              <a:ext cx="494323" cy="307777"/>
+            </a:xfrm>
+            <a:prstGeom prst="rect">
+              <a:avLst/>
+            </a:prstGeom>
+            <a:noFill/>
+          </p:spPr>
+          <p:txBody>
+            <a:bodyPr wrap="square" rtlCol="0">
+              <a:spAutoFit/>
+            </a:bodyPr>
+            <a:lstStyle/>
+            <a:p>
+              <a:pPr algn="ctr"/>
+              <a:r>
+                <a:rPr lang="pt-BR" sz="1400" dirty="0">
+                  <a:solidFill>
+                    <a:srgbClr val="C00000"/>
+                  </a:solidFill>
+                  <a:latin typeface="Arial" panose="020B0604020202020204" pitchFamily="34" charset="0"/>
+                  <a:cs typeface="Arial" panose="020B0604020202020204" pitchFamily="34" charset="0"/>
+                </a:rPr>
+                <a:t>[16]</a:t>
+              </a:r>
+            </a:p>
+          </p:txBody>
+        </p:sp>
+        <p:sp>
+          <p:nvSpPr>
+            <p:cNvPr id="1086" name="CaixaDeTexto 1085">
+              <a:extLst>
+                <a:ext uri="{FF2B5EF4-FFF2-40B4-BE49-F238E27FC236}">
+                  <a16:creationId xmlns:a16="http://schemas.microsoft.com/office/drawing/2014/main" id="{EBD50102-24FB-0978-16B0-94A5581368F0}"/>
+                </a:ext>
+              </a:extLst>
+            </p:cNvPr>
+            <p:cNvSpPr txBox="1"/>
+            <p:nvPr/>
+          </p:nvSpPr>
+          <p:spPr>
+            <a:xfrm>
+              <a:off x="9904102" y="2889564"/>
+              <a:ext cx="494323" cy="307777"/>
+            </a:xfrm>
+            <a:prstGeom prst="rect">
+              <a:avLst/>
+            </a:prstGeom>
+            <a:noFill/>
+          </p:spPr>
+          <p:txBody>
+            <a:bodyPr wrap="square" rtlCol="0">
+              <a:spAutoFit/>
+            </a:bodyPr>
+            <a:lstStyle/>
+            <a:p>
+              <a:pPr algn="ctr"/>
+              <a:r>
+                <a:rPr lang="pt-BR" sz="1400" dirty="0">
+                  <a:solidFill>
+                    <a:srgbClr val="C00000"/>
+                  </a:solidFill>
+                  <a:latin typeface="Arial" panose="020B0604020202020204" pitchFamily="34" charset="0"/>
+                  <a:cs typeface="Arial" panose="020B0604020202020204" pitchFamily="34" charset="0"/>
+                </a:rPr>
+                <a:t>[17]</a:t>
+              </a:r>
+            </a:p>
+          </p:txBody>
+        </p:sp>
+        <p:sp>
+          <p:nvSpPr>
+            <p:cNvPr id="1087" name="CaixaDeTexto 1086">
+              <a:extLst>
+                <a:ext uri="{FF2B5EF4-FFF2-40B4-BE49-F238E27FC236}">
+                  <a16:creationId xmlns:a16="http://schemas.microsoft.com/office/drawing/2014/main" id="{C4326659-E090-81EB-D369-AA481FE5658F}"/>
+                </a:ext>
+              </a:extLst>
+            </p:cNvPr>
+            <p:cNvSpPr txBox="1"/>
+            <p:nvPr/>
+          </p:nvSpPr>
+          <p:spPr>
+            <a:xfrm>
+              <a:off x="10339857" y="2889564"/>
+              <a:ext cx="494323" cy="307777"/>
+            </a:xfrm>
+            <a:prstGeom prst="rect">
+              <a:avLst/>
+            </a:prstGeom>
+            <a:noFill/>
+          </p:spPr>
+          <p:txBody>
+            <a:bodyPr wrap="square" rtlCol="0">
+              <a:spAutoFit/>
+            </a:bodyPr>
+            <a:lstStyle/>
+            <a:p>
+              <a:pPr algn="ctr"/>
+              <a:r>
+                <a:rPr lang="pt-BR" sz="1400" dirty="0">
+                  <a:solidFill>
+                    <a:srgbClr val="C00000"/>
+                  </a:solidFill>
+                  <a:latin typeface="Arial" panose="020B0604020202020204" pitchFamily="34" charset="0"/>
+                  <a:cs typeface="Arial" panose="020B0604020202020204" pitchFamily="34" charset="0"/>
+                </a:rPr>
+                <a:t>[18]</a:t>
+              </a:r>
+            </a:p>
+          </p:txBody>
+        </p:sp>
+        <p:sp>
+          <p:nvSpPr>
+            <p:cNvPr id="1088" name="CaixaDeTexto 1087">
+              <a:extLst>
+                <a:ext uri="{FF2B5EF4-FFF2-40B4-BE49-F238E27FC236}">
+                  <a16:creationId xmlns:a16="http://schemas.microsoft.com/office/drawing/2014/main" id="{54DDE8D6-D518-FE52-F164-7BFEC6966670}"/>
+                </a:ext>
+              </a:extLst>
+            </p:cNvPr>
+            <p:cNvSpPr txBox="1"/>
+            <p:nvPr/>
+          </p:nvSpPr>
+          <p:spPr>
+            <a:xfrm>
+              <a:off x="10775612" y="2889564"/>
+              <a:ext cx="494323" cy="307777"/>
+            </a:xfrm>
+            <a:prstGeom prst="rect">
+              <a:avLst/>
+            </a:prstGeom>
+            <a:noFill/>
+          </p:spPr>
+          <p:txBody>
+            <a:bodyPr wrap="square" rtlCol="0">
+              <a:spAutoFit/>
+            </a:bodyPr>
+            <a:lstStyle/>
+            <a:p>
+              <a:pPr algn="ctr"/>
+              <a:r>
+                <a:rPr lang="pt-BR" sz="1400" dirty="0">
+                  <a:solidFill>
+                    <a:srgbClr val="C00000"/>
+                  </a:solidFill>
+                  <a:latin typeface="Arial" panose="020B0604020202020204" pitchFamily="34" charset="0"/>
+                  <a:cs typeface="Arial" panose="020B0604020202020204" pitchFamily="34" charset="0"/>
+                </a:rPr>
+                <a:t>[19]</a:t>
+              </a:r>
+            </a:p>
+          </p:txBody>
+        </p:sp>
+        <p:sp>
+          <p:nvSpPr>
+            <p:cNvPr id="1089" name="CaixaDeTexto 1088">
+              <a:extLst>
+                <a:ext uri="{FF2B5EF4-FFF2-40B4-BE49-F238E27FC236}">
+                  <a16:creationId xmlns:a16="http://schemas.microsoft.com/office/drawing/2014/main" id="{6061D21E-14DD-5DE3-3D46-86453AF13BF6}"/>
+                </a:ext>
+              </a:extLst>
+            </p:cNvPr>
+            <p:cNvSpPr txBox="1"/>
+            <p:nvPr/>
+          </p:nvSpPr>
+          <p:spPr>
+            <a:xfrm>
+              <a:off x="11211363" y="2889564"/>
+              <a:ext cx="494323" cy="307777"/>
+            </a:xfrm>
+            <a:prstGeom prst="rect">
+              <a:avLst/>
+            </a:prstGeom>
+            <a:noFill/>
+          </p:spPr>
+          <p:txBody>
+            <a:bodyPr wrap="square" rtlCol="0">
+              <a:spAutoFit/>
+            </a:bodyPr>
+            <a:lstStyle/>
+            <a:p>
+              <a:pPr algn="ctr"/>
+              <a:r>
+                <a:rPr lang="pt-BR" sz="1400" dirty="0">
+                  <a:solidFill>
+                    <a:srgbClr val="C00000"/>
+                  </a:solidFill>
+                  <a:latin typeface="Arial" panose="020B0604020202020204" pitchFamily="34" charset="0"/>
+                  <a:cs typeface="Arial" panose="020B0604020202020204" pitchFamily="34" charset="0"/>
+                </a:rPr>
+                <a:t>[20]</a:t>
+              </a:r>
+            </a:p>
+          </p:txBody>
+        </p:sp>
+      </p:grpSp>
+      <p:grpSp>
+        <p:nvGrpSpPr>
+          <p:cNvPr id="1090" name="Agrupar 1089">
+            <a:extLst>
+              <a:ext uri="{FF2B5EF4-FFF2-40B4-BE49-F238E27FC236}">
+                <a16:creationId xmlns:a16="http://schemas.microsoft.com/office/drawing/2014/main" id="{D5358484-B2B8-8E31-0E0F-1E449BC85532}"/>
+              </a:ext>
+            </a:extLst>
+          </p:cNvPr>
+          <p:cNvGrpSpPr/>
+          <p:nvPr/>
+        </p:nvGrpSpPr>
+        <p:grpSpPr>
+          <a:xfrm>
+            <a:off x="4012845" y="6030591"/>
+            <a:ext cx="4416114" cy="307777"/>
+            <a:chOff x="7289572" y="2889564"/>
+            <a:chExt cx="4416114" cy="307777"/>
+          </a:xfrm>
+        </p:grpSpPr>
+        <p:sp>
+          <p:nvSpPr>
+            <p:cNvPr id="1091" name="CaixaDeTexto 1090">
+              <a:extLst>
+                <a:ext uri="{FF2B5EF4-FFF2-40B4-BE49-F238E27FC236}">
+                  <a16:creationId xmlns:a16="http://schemas.microsoft.com/office/drawing/2014/main" id="{18B71369-A7FE-155B-49CE-DC8A8E7F8F6E}"/>
+                </a:ext>
+              </a:extLst>
+            </p:cNvPr>
+            <p:cNvSpPr txBox="1"/>
+            <p:nvPr/>
+          </p:nvSpPr>
+          <p:spPr>
+            <a:xfrm>
+              <a:off x="7289572" y="2889564"/>
+              <a:ext cx="494323" cy="307777"/>
+            </a:xfrm>
+            <a:prstGeom prst="rect">
+              <a:avLst/>
+            </a:prstGeom>
+            <a:noFill/>
+          </p:spPr>
+          <p:txBody>
+            <a:bodyPr wrap="square" rtlCol="0">
+              <a:spAutoFit/>
+            </a:bodyPr>
+            <a:lstStyle/>
+            <a:p>
+              <a:pPr algn="ctr"/>
+              <a:r>
+                <a:rPr lang="pt-BR" sz="1400" dirty="0">
+                  <a:solidFill>
+                    <a:srgbClr val="C00000"/>
+                  </a:solidFill>
+                  <a:latin typeface="Arial" panose="020B0604020202020204" pitchFamily="34" charset="0"/>
+                  <a:cs typeface="Arial" panose="020B0604020202020204" pitchFamily="34" charset="0"/>
+                </a:rPr>
+                <a:t>[21]</a:t>
+              </a:r>
+            </a:p>
+          </p:txBody>
+        </p:sp>
+        <p:sp>
+          <p:nvSpPr>
+            <p:cNvPr id="1092" name="CaixaDeTexto 1091">
+              <a:extLst>
+                <a:ext uri="{FF2B5EF4-FFF2-40B4-BE49-F238E27FC236}">
+                  <a16:creationId xmlns:a16="http://schemas.microsoft.com/office/drawing/2014/main" id="{D00C0FA0-1E3F-0C71-5D2E-D979EF84D384}"/>
+                </a:ext>
+              </a:extLst>
+            </p:cNvPr>
+            <p:cNvSpPr txBox="1"/>
+            <p:nvPr/>
+          </p:nvSpPr>
+          <p:spPr>
+            <a:xfrm>
+              <a:off x="7725327" y="2889564"/>
+              <a:ext cx="494323" cy="307777"/>
+            </a:xfrm>
+            <a:prstGeom prst="rect">
+              <a:avLst/>
+            </a:prstGeom>
+            <a:noFill/>
+          </p:spPr>
+          <p:txBody>
+            <a:bodyPr wrap="square" rtlCol="0">
+              <a:spAutoFit/>
+            </a:bodyPr>
+            <a:lstStyle/>
+            <a:p>
+              <a:pPr algn="ctr"/>
+              <a:r>
+                <a:rPr lang="pt-BR" sz="1400" dirty="0">
+                  <a:solidFill>
+                    <a:srgbClr val="C00000"/>
+                  </a:solidFill>
+                  <a:latin typeface="Arial" panose="020B0604020202020204" pitchFamily="34" charset="0"/>
+                  <a:cs typeface="Arial" panose="020B0604020202020204" pitchFamily="34" charset="0"/>
+                </a:rPr>
+                <a:t>[22]</a:t>
+              </a:r>
+            </a:p>
+          </p:txBody>
+        </p:sp>
+        <p:sp>
+          <p:nvSpPr>
+            <p:cNvPr id="1093" name="CaixaDeTexto 1092">
+              <a:extLst>
+                <a:ext uri="{FF2B5EF4-FFF2-40B4-BE49-F238E27FC236}">
+                  <a16:creationId xmlns:a16="http://schemas.microsoft.com/office/drawing/2014/main" id="{FF6CDDC5-3C9A-79C0-16AC-F2194C41A5EB}"/>
+                </a:ext>
+              </a:extLst>
+            </p:cNvPr>
+            <p:cNvSpPr txBox="1"/>
+            <p:nvPr/>
+          </p:nvSpPr>
+          <p:spPr>
+            <a:xfrm>
+              <a:off x="8161082" y="2889564"/>
+              <a:ext cx="494323" cy="307777"/>
+            </a:xfrm>
+            <a:prstGeom prst="rect">
+              <a:avLst/>
+            </a:prstGeom>
+            <a:noFill/>
+          </p:spPr>
+          <p:txBody>
+            <a:bodyPr wrap="square" rtlCol="0">
+              <a:spAutoFit/>
+            </a:bodyPr>
+            <a:lstStyle/>
+            <a:p>
+              <a:pPr algn="ctr"/>
+              <a:r>
+                <a:rPr lang="pt-BR" sz="1400" dirty="0">
+                  <a:solidFill>
+                    <a:srgbClr val="C00000"/>
+                  </a:solidFill>
+                  <a:latin typeface="Arial" panose="020B0604020202020204" pitchFamily="34" charset="0"/>
+                  <a:cs typeface="Arial" panose="020B0604020202020204" pitchFamily="34" charset="0"/>
+                </a:rPr>
+                <a:t>[23]</a:t>
+              </a:r>
+            </a:p>
+          </p:txBody>
+        </p:sp>
+        <p:sp>
+          <p:nvSpPr>
+            <p:cNvPr id="1094" name="CaixaDeTexto 1093">
+              <a:extLst>
+                <a:ext uri="{FF2B5EF4-FFF2-40B4-BE49-F238E27FC236}">
+                  <a16:creationId xmlns:a16="http://schemas.microsoft.com/office/drawing/2014/main" id="{BB992FFB-A583-D7AD-6D92-EF27C6E2A55C}"/>
+                </a:ext>
+              </a:extLst>
+            </p:cNvPr>
+            <p:cNvSpPr txBox="1"/>
+            <p:nvPr/>
+          </p:nvSpPr>
+          <p:spPr>
+            <a:xfrm>
+              <a:off x="8596837" y="2889564"/>
+              <a:ext cx="494323" cy="307777"/>
+            </a:xfrm>
+            <a:prstGeom prst="rect">
+              <a:avLst/>
+            </a:prstGeom>
+            <a:noFill/>
+          </p:spPr>
+          <p:txBody>
+            <a:bodyPr wrap="square" rtlCol="0">
+              <a:spAutoFit/>
+            </a:bodyPr>
+            <a:lstStyle/>
+            <a:p>
+              <a:pPr algn="ctr"/>
+              <a:r>
+                <a:rPr lang="pt-BR" sz="1400" dirty="0">
+                  <a:solidFill>
+                    <a:srgbClr val="C00000"/>
+                  </a:solidFill>
+                  <a:latin typeface="Arial" panose="020B0604020202020204" pitchFamily="34" charset="0"/>
+                  <a:cs typeface="Arial" panose="020B0604020202020204" pitchFamily="34" charset="0"/>
+                </a:rPr>
+                <a:t>[24]</a:t>
+              </a:r>
+            </a:p>
+          </p:txBody>
+        </p:sp>
+        <p:sp>
+          <p:nvSpPr>
+            <p:cNvPr id="1095" name="CaixaDeTexto 1094">
+              <a:extLst>
+                <a:ext uri="{FF2B5EF4-FFF2-40B4-BE49-F238E27FC236}">
+                  <a16:creationId xmlns:a16="http://schemas.microsoft.com/office/drawing/2014/main" id="{C39CE8A4-87E0-8F30-A4EE-C24293ACFC30}"/>
+                </a:ext>
+              </a:extLst>
+            </p:cNvPr>
+            <p:cNvSpPr txBox="1"/>
+            <p:nvPr/>
+          </p:nvSpPr>
+          <p:spPr>
+            <a:xfrm>
+              <a:off x="9032592" y="2889564"/>
+              <a:ext cx="494323" cy="307777"/>
+            </a:xfrm>
+            <a:prstGeom prst="rect">
+              <a:avLst/>
+            </a:prstGeom>
+            <a:noFill/>
+          </p:spPr>
+          <p:txBody>
+            <a:bodyPr wrap="square" rtlCol="0">
+              <a:spAutoFit/>
+            </a:bodyPr>
+            <a:lstStyle/>
+            <a:p>
+              <a:pPr algn="ctr"/>
+              <a:r>
+                <a:rPr lang="pt-BR" sz="1400" dirty="0">
+                  <a:solidFill>
+                    <a:srgbClr val="C00000"/>
+                  </a:solidFill>
+                  <a:latin typeface="Arial" panose="020B0604020202020204" pitchFamily="34" charset="0"/>
+                  <a:cs typeface="Arial" panose="020B0604020202020204" pitchFamily="34" charset="0"/>
+                </a:rPr>
+                <a:t>[25]</a:t>
+              </a:r>
+            </a:p>
+          </p:txBody>
+        </p:sp>
+        <p:sp>
+          <p:nvSpPr>
+            <p:cNvPr id="1096" name="CaixaDeTexto 1095">
+              <a:extLst>
+                <a:ext uri="{FF2B5EF4-FFF2-40B4-BE49-F238E27FC236}">
+                  <a16:creationId xmlns:a16="http://schemas.microsoft.com/office/drawing/2014/main" id="{F1C261E0-2DCD-6991-1AF1-1A3D8D5D0C23}"/>
+                </a:ext>
+              </a:extLst>
+            </p:cNvPr>
+            <p:cNvSpPr txBox="1"/>
+            <p:nvPr/>
+          </p:nvSpPr>
+          <p:spPr>
+            <a:xfrm>
+              <a:off x="9468347" y="2889564"/>
+              <a:ext cx="494323" cy="307777"/>
+            </a:xfrm>
+            <a:prstGeom prst="rect">
+              <a:avLst/>
+            </a:prstGeom>
+            <a:noFill/>
+          </p:spPr>
+          <p:txBody>
+            <a:bodyPr wrap="square" rtlCol="0">
+              <a:spAutoFit/>
+            </a:bodyPr>
+            <a:lstStyle/>
+            <a:p>
+              <a:pPr algn="ctr"/>
+              <a:r>
+                <a:rPr lang="pt-BR" sz="1400" dirty="0">
+                  <a:solidFill>
+                    <a:srgbClr val="C00000"/>
+                  </a:solidFill>
+                  <a:latin typeface="Arial" panose="020B0604020202020204" pitchFamily="34" charset="0"/>
+                  <a:cs typeface="Arial" panose="020B0604020202020204" pitchFamily="34" charset="0"/>
+                </a:rPr>
+                <a:t>[26]</a:t>
+              </a:r>
+            </a:p>
+          </p:txBody>
+        </p:sp>
+        <p:sp>
+          <p:nvSpPr>
+            <p:cNvPr id="1097" name="CaixaDeTexto 1096">
+              <a:extLst>
+                <a:ext uri="{FF2B5EF4-FFF2-40B4-BE49-F238E27FC236}">
+                  <a16:creationId xmlns:a16="http://schemas.microsoft.com/office/drawing/2014/main" id="{4DF5A4B1-69F0-5BAD-F003-9DECCD9A18AB}"/>
+                </a:ext>
+              </a:extLst>
+            </p:cNvPr>
+            <p:cNvSpPr txBox="1"/>
+            <p:nvPr/>
+          </p:nvSpPr>
+          <p:spPr>
+            <a:xfrm>
+              <a:off x="9904102" y="2889564"/>
+              <a:ext cx="494323" cy="307777"/>
+            </a:xfrm>
+            <a:prstGeom prst="rect">
+              <a:avLst/>
+            </a:prstGeom>
+            <a:noFill/>
+          </p:spPr>
+          <p:txBody>
+            <a:bodyPr wrap="square" rtlCol="0">
+              <a:spAutoFit/>
+            </a:bodyPr>
+            <a:lstStyle/>
+            <a:p>
+              <a:pPr algn="ctr"/>
+              <a:r>
+                <a:rPr lang="pt-BR" sz="1400" dirty="0">
+                  <a:solidFill>
+                    <a:srgbClr val="C00000"/>
+                  </a:solidFill>
+                  <a:latin typeface="Arial" panose="020B0604020202020204" pitchFamily="34" charset="0"/>
+                  <a:cs typeface="Arial" panose="020B0604020202020204" pitchFamily="34" charset="0"/>
+                </a:rPr>
+                <a:t>[27]</a:t>
+              </a:r>
+            </a:p>
+          </p:txBody>
+        </p:sp>
+        <p:sp>
+          <p:nvSpPr>
+            <p:cNvPr id="1098" name="CaixaDeTexto 1097">
+              <a:extLst>
+                <a:ext uri="{FF2B5EF4-FFF2-40B4-BE49-F238E27FC236}">
+                  <a16:creationId xmlns:a16="http://schemas.microsoft.com/office/drawing/2014/main" id="{9FD150E0-ADAD-3412-8B86-406DC03131DB}"/>
+                </a:ext>
+              </a:extLst>
+            </p:cNvPr>
+            <p:cNvSpPr txBox="1"/>
+            <p:nvPr/>
+          </p:nvSpPr>
+          <p:spPr>
+            <a:xfrm>
+              <a:off x="10339857" y="2889564"/>
+              <a:ext cx="494323" cy="307777"/>
+            </a:xfrm>
+            <a:prstGeom prst="rect">
+              <a:avLst/>
+            </a:prstGeom>
+            <a:noFill/>
+          </p:spPr>
+          <p:txBody>
+            <a:bodyPr wrap="square" rtlCol="0">
+              <a:spAutoFit/>
+            </a:bodyPr>
+            <a:lstStyle/>
+            <a:p>
+              <a:pPr algn="ctr"/>
+              <a:r>
+                <a:rPr lang="pt-BR" sz="1400" dirty="0">
+                  <a:solidFill>
+                    <a:srgbClr val="C00000"/>
+                  </a:solidFill>
+                  <a:latin typeface="Arial" panose="020B0604020202020204" pitchFamily="34" charset="0"/>
+                  <a:cs typeface="Arial" panose="020B0604020202020204" pitchFamily="34" charset="0"/>
+                </a:rPr>
+                <a:t>[28]</a:t>
+              </a:r>
+            </a:p>
+          </p:txBody>
+        </p:sp>
+        <p:sp>
+          <p:nvSpPr>
+            <p:cNvPr id="1099" name="CaixaDeTexto 1098">
+              <a:extLst>
+                <a:ext uri="{FF2B5EF4-FFF2-40B4-BE49-F238E27FC236}">
+                  <a16:creationId xmlns:a16="http://schemas.microsoft.com/office/drawing/2014/main" id="{5EC7149C-72F3-25C1-0393-4F056AEC1E7A}"/>
+                </a:ext>
+              </a:extLst>
+            </p:cNvPr>
+            <p:cNvSpPr txBox="1"/>
+            <p:nvPr/>
+          </p:nvSpPr>
+          <p:spPr>
+            <a:xfrm>
+              <a:off x="10775612" y="2889564"/>
+              <a:ext cx="494323" cy="307777"/>
+            </a:xfrm>
+            <a:prstGeom prst="rect">
+              <a:avLst/>
+            </a:prstGeom>
+            <a:noFill/>
+          </p:spPr>
+          <p:txBody>
+            <a:bodyPr wrap="square" rtlCol="0">
+              <a:spAutoFit/>
+            </a:bodyPr>
+            <a:lstStyle/>
+            <a:p>
+              <a:pPr algn="ctr"/>
+              <a:r>
+                <a:rPr lang="pt-BR" sz="1400" dirty="0">
+                  <a:solidFill>
+                    <a:srgbClr val="C00000"/>
+                  </a:solidFill>
+                  <a:latin typeface="Arial" panose="020B0604020202020204" pitchFamily="34" charset="0"/>
+                  <a:cs typeface="Arial" panose="020B0604020202020204" pitchFamily="34" charset="0"/>
+                </a:rPr>
+                <a:t>[29]</a:t>
+              </a:r>
+            </a:p>
+          </p:txBody>
+        </p:sp>
+        <p:sp>
+          <p:nvSpPr>
+            <p:cNvPr id="1100" name="CaixaDeTexto 1099">
+              <a:extLst>
+                <a:ext uri="{FF2B5EF4-FFF2-40B4-BE49-F238E27FC236}">
+                  <a16:creationId xmlns:a16="http://schemas.microsoft.com/office/drawing/2014/main" id="{4AFB8207-56DD-F2D8-5A06-9A3550F77966}"/>
+                </a:ext>
+              </a:extLst>
+            </p:cNvPr>
+            <p:cNvSpPr txBox="1"/>
+            <p:nvPr/>
+          </p:nvSpPr>
+          <p:spPr>
+            <a:xfrm>
+              <a:off x="11211363" y="2889564"/>
+              <a:ext cx="494323" cy="307777"/>
+            </a:xfrm>
+            <a:prstGeom prst="rect">
+              <a:avLst/>
+            </a:prstGeom>
+            <a:noFill/>
+          </p:spPr>
+          <p:txBody>
+            <a:bodyPr wrap="square" rtlCol="0">
+              <a:spAutoFit/>
+            </a:bodyPr>
+            <a:lstStyle/>
+            <a:p>
+              <a:pPr algn="ctr"/>
+              <a:r>
+                <a:rPr lang="pt-BR" sz="1400" dirty="0">
+                  <a:solidFill>
+                    <a:srgbClr val="C00000"/>
+                  </a:solidFill>
+                  <a:latin typeface="Arial" panose="020B0604020202020204" pitchFamily="34" charset="0"/>
+                  <a:cs typeface="Arial" panose="020B0604020202020204" pitchFamily="34" charset="0"/>
+                </a:rPr>
+                <a:t>[30]</a:t>
+              </a:r>
+            </a:p>
+          </p:txBody>
+        </p:sp>
+      </p:grpSp>
+      <p:grpSp>
+        <p:nvGrpSpPr>
+          <p:cNvPr id="1101" name="Agrupar 1100">
+            <a:extLst>
+              <a:ext uri="{FF2B5EF4-FFF2-40B4-BE49-F238E27FC236}">
+                <a16:creationId xmlns:a16="http://schemas.microsoft.com/office/drawing/2014/main" id="{32CB8096-F5F2-7FA7-5CE0-AE2FD4ABB1E2}"/>
+              </a:ext>
+            </a:extLst>
+          </p:cNvPr>
+          <p:cNvGrpSpPr/>
+          <p:nvPr/>
+        </p:nvGrpSpPr>
+        <p:grpSpPr>
+          <a:xfrm>
+            <a:off x="4012845" y="6275538"/>
+            <a:ext cx="4416114" cy="307777"/>
+            <a:chOff x="7289572" y="2889564"/>
+            <a:chExt cx="4416114" cy="307777"/>
+          </a:xfrm>
+        </p:grpSpPr>
+        <p:sp>
+          <p:nvSpPr>
+            <p:cNvPr id="1102" name="CaixaDeTexto 1101">
+              <a:extLst>
+                <a:ext uri="{FF2B5EF4-FFF2-40B4-BE49-F238E27FC236}">
+                  <a16:creationId xmlns:a16="http://schemas.microsoft.com/office/drawing/2014/main" id="{BB1CA3F8-9C7F-ACF0-F57E-1FCE739BCC62}"/>
+                </a:ext>
+              </a:extLst>
+            </p:cNvPr>
+            <p:cNvSpPr txBox="1"/>
+            <p:nvPr/>
+          </p:nvSpPr>
+          <p:spPr>
+            <a:xfrm>
+              <a:off x="7289572" y="2889564"/>
+              <a:ext cx="494323" cy="307777"/>
+            </a:xfrm>
+            <a:prstGeom prst="rect">
+              <a:avLst/>
+            </a:prstGeom>
+            <a:noFill/>
+          </p:spPr>
+          <p:txBody>
+            <a:bodyPr wrap="square" rtlCol="0">
+              <a:spAutoFit/>
+            </a:bodyPr>
+            <a:lstStyle/>
+            <a:p>
+              <a:pPr algn="ctr"/>
+              <a:r>
+                <a:rPr lang="pt-BR" sz="1400" dirty="0">
+                  <a:solidFill>
+                    <a:srgbClr val="C00000"/>
+                  </a:solidFill>
+                  <a:latin typeface="Arial" panose="020B0604020202020204" pitchFamily="34" charset="0"/>
+                  <a:cs typeface="Arial" panose="020B0604020202020204" pitchFamily="34" charset="0"/>
+                </a:rPr>
+                <a:t>[31]</a:t>
+              </a:r>
+            </a:p>
+          </p:txBody>
+        </p:sp>
+        <p:sp>
+          <p:nvSpPr>
+            <p:cNvPr id="1103" name="CaixaDeTexto 1102">
+              <a:extLst>
+                <a:ext uri="{FF2B5EF4-FFF2-40B4-BE49-F238E27FC236}">
+                  <a16:creationId xmlns:a16="http://schemas.microsoft.com/office/drawing/2014/main" id="{325083D3-59DA-A33D-D1B8-2AAB568F6602}"/>
+                </a:ext>
+              </a:extLst>
+            </p:cNvPr>
+            <p:cNvSpPr txBox="1"/>
+            <p:nvPr/>
+          </p:nvSpPr>
+          <p:spPr>
+            <a:xfrm>
+              <a:off x="7725327" y="2889564"/>
+              <a:ext cx="494323" cy="307777"/>
+            </a:xfrm>
+            <a:prstGeom prst="rect">
+              <a:avLst/>
+            </a:prstGeom>
+            <a:noFill/>
+          </p:spPr>
+          <p:txBody>
+            <a:bodyPr wrap="square" rtlCol="0">
+              <a:spAutoFit/>
+            </a:bodyPr>
+            <a:lstStyle/>
+            <a:p>
+              <a:pPr algn="ctr"/>
+              <a:r>
+                <a:rPr lang="pt-BR" sz="1400" dirty="0">
+                  <a:solidFill>
+                    <a:srgbClr val="C00000"/>
+                  </a:solidFill>
+                  <a:latin typeface="Arial" panose="020B0604020202020204" pitchFamily="34" charset="0"/>
+                  <a:cs typeface="Arial" panose="020B0604020202020204" pitchFamily="34" charset="0"/>
+                </a:rPr>
+                <a:t>[32]</a:t>
+              </a:r>
+            </a:p>
+          </p:txBody>
+        </p:sp>
+        <p:sp>
+          <p:nvSpPr>
+            <p:cNvPr id="1104" name="CaixaDeTexto 1103">
+              <a:extLst>
+                <a:ext uri="{FF2B5EF4-FFF2-40B4-BE49-F238E27FC236}">
+                  <a16:creationId xmlns:a16="http://schemas.microsoft.com/office/drawing/2014/main" id="{3F24AC09-983E-8509-3C92-F56119793FB2}"/>
+                </a:ext>
+              </a:extLst>
+            </p:cNvPr>
+            <p:cNvSpPr txBox="1"/>
+            <p:nvPr/>
+          </p:nvSpPr>
+          <p:spPr>
+            <a:xfrm>
+              <a:off x="8161082" y="2889564"/>
+              <a:ext cx="494323" cy="307777"/>
+            </a:xfrm>
+            <a:prstGeom prst="rect">
+              <a:avLst/>
+            </a:prstGeom>
+            <a:noFill/>
+          </p:spPr>
+          <p:txBody>
+            <a:bodyPr wrap="square" rtlCol="0">
+              <a:spAutoFit/>
+            </a:bodyPr>
+            <a:lstStyle/>
+            <a:p>
+              <a:pPr algn="ctr"/>
+              <a:r>
+                <a:rPr lang="pt-BR" sz="1400" dirty="0">
+                  <a:solidFill>
+                    <a:srgbClr val="C00000"/>
+                  </a:solidFill>
+                  <a:latin typeface="Arial" panose="020B0604020202020204" pitchFamily="34" charset="0"/>
+                  <a:cs typeface="Arial" panose="020B0604020202020204" pitchFamily="34" charset="0"/>
+                </a:rPr>
+                <a:t>[33]</a:t>
+              </a:r>
+            </a:p>
+          </p:txBody>
+        </p:sp>
+        <p:sp>
+          <p:nvSpPr>
+            <p:cNvPr id="1105" name="CaixaDeTexto 1104">
+              <a:extLst>
+                <a:ext uri="{FF2B5EF4-FFF2-40B4-BE49-F238E27FC236}">
+                  <a16:creationId xmlns:a16="http://schemas.microsoft.com/office/drawing/2014/main" id="{B68061E5-8D37-B1AE-5B7B-DC94943ABBE8}"/>
+                </a:ext>
+              </a:extLst>
+            </p:cNvPr>
+            <p:cNvSpPr txBox="1"/>
+            <p:nvPr/>
+          </p:nvSpPr>
+          <p:spPr>
+            <a:xfrm>
+              <a:off x="8596837" y="2889564"/>
+              <a:ext cx="494323" cy="307777"/>
+            </a:xfrm>
+            <a:prstGeom prst="rect">
+              <a:avLst/>
+            </a:prstGeom>
+            <a:noFill/>
+          </p:spPr>
+          <p:txBody>
+            <a:bodyPr wrap="square" rtlCol="0">
+              <a:spAutoFit/>
+            </a:bodyPr>
+            <a:lstStyle/>
+            <a:p>
+              <a:pPr algn="ctr"/>
+              <a:r>
+                <a:rPr lang="pt-BR" sz="1400" dirty="0">
+                  <a:solidFill>
+                    <a:srgbClr val="C00000"/>
+                  </a:solidFill>
+                  <a:latin typeface="Arial" panose="020B0604020202020204" pitchFamily="34" charset="0"/>
+                  <a:cs typeface="Arial" panose="020B0604020202020204" pitchFamily="34" charset="0"/>
+                </a:rPr>
+                <a:t>[34]</a:t>
+              </a:r>
+            </a:p>
+          </p:txBody>
+        </p:sp>
+        <p:sp>
+          <p:nvSpPr>
+            <p:cNvPr id="1106" name="CaixaDeTexto 1105">
+              <a:extLst>
+                <a:ext uri="{FF2B5EF4-FFF2-40B4-BE49-F238E27FC236}">
+                  <a16:creationId xmlns:a16="http://schemas.microsoft.com/office/drawing/2014/main" id="{4F4EC853-9DA9-6E87-1F2A-DEDDBF57AEA0}"/>
+                </a:ext>
+              </a:extLst>
+            </p:cNvPr>
+            <p:cNvSpPr txBox="1"/>
+            <p:nvPr/>
+          </p:nvSpPr>
+          <p:spPr>
+            <a:xfrm>
+              <a:off x="9032592" y="2889564"/>
+              <a:ext cx="494323" cy="307777"/>
+            </a:xfrm>
+            <a:prstGeom prst="rect">
+              <a:avLst/>
+            </a:prstGeom>
+            <a:noFill/>
+          </p:spPr>
+          <p:txBody>
+            <a:bodyPr wrap="square" rtlCol="0">
+              <a:spAutoFit/>
+            </a:bodyPr>
+            <a:lstStyle/>
+            <a:p>
+              <a:pPr algn="ctr"/>
+              <a:r>
+                <a:rPr lang="pt-BR" sz="1400" dirty="0">
+                  <a:solidFill>
+                    <a:srgbClr val="C00000"/>
+                  </a:solidFill>
+                  <a:latin typeface="Arial" panose="020B0604020202020204" pitchFamily="34" charset="0"/>
+                  <a:cs typeface="Arial" panose="020B0604020202020204" pitchFamily="34" charset="0"/>
+                </a:rPr>
+                <a:t>[35]</a:t>
+              </a:r>
+            </a:p>
+          </p:txBody>
+        </p:sp>
+        <p:sp>
+          <p:nvSpPr>
+            <p:cNvPr id="1107" name="CaixaDeTexto 1106">
+              <a:extLst>
+                <a:ext uri="{FF2B5EF4-FFF2-40B4-BE49-F238E27FC236}">
+                  <a16:creationId xmlns:a16="http://schemas.microsoft.com/office/drawing/2014/main" id="{149269D7-D349-8A57-4E86-EE1E48DE508A}"/>
+                </a:ext>
+              </a:extLst>
+            </p:cNvPr>
+            <p:cNvSpPr txBox="1"/>
+            <p:nvPr/>
+          </p:nvSpPr>
+          <p:spPr>
+            <a:xfrm>
+              <a:off x="9468347" y="2889564"/>
+              <a:ext cx="494323" cy="307777"/>
+            </a:xfrm>
+            <a:prstGeom prst="rect">
+              <a:avLst/>
+            </a:prstGeom>
+            <a:noFill/>
+          </p:spPr>
+          <p:txBody>
+            <a:bodyPr wrap="square" rtlCol="0">
+              <a:spAutoFit/>
+            </a:bodyPr>
+            <a:lstStyle/>
+            <a:p>
+              <a:pPr algn="ctr"/>
+              <a:r>
+                <a:rPr lang="pt-BR" sz="1400" dirty="0">
+                  <a:solidFill>
+                    <a:srgbClr val="C00000"/>
+                  </a:solidFill>
+                  <a:latin typeface="Arial" panose="020B0604020202020204" pitchFamily="34" charset="0"/>
+                  <a:cs typeface="Arial" panose="020B0604020202020204" pitchFamily="34" charset="0"/>
+                </a:rPr>
+                <a:t>[36]</a:t>
+              </a:r>
+            </a:p>
+          </p:txBody>
+        </p:sp>
+        <p:sp>
+          <p:nvSpPr>
+            <p:cNvPr id="1108" name="CaixaDeTexto 1107">
+              <a:extLst>
+                <a:ext uri="{FF2B5EF4-FFF2-40B4-BE49-F238E27FC236}">
+                  <a16:creationId xmlns:a16="http://schemas.microsoft.com/office/drawing/2014/main" id="{3B5E9E62-E228-E42E-8C03-6E37D5FD1676}"/>
+                </a:ext>
+              </a:extLst>
+            </p:cNvPr>
+            <p:cNvSpPr txBox="1"/>
+            <p:nvPr/>
+          </p:nvSpPr>
+          <p:spPr>
+            <a:xfrm>
+              <a:off x="9904102" y="2889564"/>
+              <a:ext cx="494323" cy="307777"/>
+            </a:xfrm>
+            <a:prstGeom prst="rect">
+              <a:avLst/>
+            </a:prstGeom>
+            <a:noFill/>
+          </p:spPr>
+          <p:txBody>
+            <a:bodyPr wrap="square" rtlCol="0">
+              <a:spAutoFit/>
+            </a:bodyPr>
+            <a:lstStyle/>
+            <a:p>
+              <a:pPr algn="ctr"/>
+              <a:r>
+                <a:rPr lang="pt-BR" sz="1400" dirty="0">
+                  <a:solidFill>
+                    <a:srgbClr val="C00000"/>
+                  </a:solidFill>
+                  <a:latin typeface="Arial" panose="020B0604020202020204" pitchFamily="34" charset="0"/>
+                  <a:cs typeface="Arial" panose="020B0604020202020204" pitchFamily="34" charset="0"/>
+                </a:rPr>
+                <a:t>[37]</a:t>
+              </a:r>
+            </a:p>
+          </p:txBody>
+        </p:sp>
+        <p:sp>
+          <p:nvSpPr>
+            <p:cNvPr id="1109" name="CaixaDeTexto 1108">
+              <a:extLst>
+                <a:ext uri="{FF2B5EF4-FFF2-40B4-BE49-F238E27FC236}">
+                  <a16:creationId xmlns:a16="http://schemas.microsoft.com/office/drawing/2014/main" id="{E96308F6-0BED-4D4F-879D-60EEC2BF5ABD}"/>
+                </a:ext>
+              </a:extLst>
+            </p:cNvPr>
+            <p:cNvSpPr txBox="1"/>
+            <p:nvPr/>
+          </p:nvSpPr>
+          <p:spPr>
+            <a:xfrm>
+              <a:off x="10339857" y="2889564"/>
+              <a:ext cx="494323" cy="307777"/>
+            </a:xfrm>
+            <a:prstGeom prst="rect">
+              <a:avLst/>
+            </a:prstGeom>
+            <a:noFill/>
+          </p:spPr>
+          <p:txBody>
+            <a:bodyPr wrap="square" rtlCol="0">
+              <a:spAutoFit/>
+            </a:bodyPr>
+            <a:lstStyle/>
+            <a:p>
+              <a:pPr algn="ctr"/>
+              <a:r>
+                <a:rPr lang="pt-BR" sz="1400" dirty="0">
+                  <a:solidFill>
+                    <a:srgbClr val="C00000"/>
+                  </a:solidFill>
+                  <a:latin typeface="Arial" panose="020B0604020202020204" pitchFamily="34" charset="0"/>
+                  <a:cs typeface="Arial" panose="020B0604020202020204" pitchFamily="34" charset="0"/>
+                </a:rPr>
+                <a:t>[38]</a:t>
+              </a:r>
+            </a:p>
+          </p:txBody>
+        </p:sp>
+        <p:sp>
+          <p:nvSpPr>
+            <p:cNvPr id="1110" name="CaixaDeTexto 1109">
+              <a:extLst>
+                <a:ext uri="{FF2B5EF4-FFF2-40B4-BE49-F238E27FC236}">
+                  <a16:creationId xmlns:a16="http://schemas.microsoft.com/office/drawing/2014/main" id="{53AAEEC8-E245-DE13-744E-E90BDB3273B3}"/>
+                </a:ext>
+              </a:extLst>
+            </p:cNvPr>
+            <p:cNvSpPr txBox="1"/>
+            <p:nvPr/>
+          </p:nvSpPr>
+          <p:spPr>
+            <a:xfrm>
+              <a:off x="10775612" y="2889564"/>
+              <a:ext cx="494323" cy="307777"/>
+            </a:xfrm>
+            <a:prstGeom prst="rect">
+              <a:avLst/>
+            </a:prstGeom>
+            <a:noFill/>
+          </p:spPr>
+          <p:txBody>
+            <a:bodyPr wrap="square" rtlCol="0">
+              <a:spAutoFit/>
+            </a:bodyPr>
+            <a:lstStyle/>
+            <a:p>
+              <a:pPr algn="ctr"/>
+              <a:r>
+                <a:rPr lang="pt-BR" sz="1400" dirty="0">
+                  <a:solidFill>
+                    <a:srgbClr val="C00000"/>
+                  </a:solidFill>
+                  <a:latin typeface="Arial" panose="020B0604020202020204" pitchFamily="34" charset="0"/>
+                  <a:cs typeface="Arial" panose="020B0604020202020204" pitchFamily="34" charset="0"/>
+                </a:rPr>
+                <a:t>[39]</a:t>
+              </a:r>
+            </a:p>
+          </p:txBody>
+        </p:sp>
+        <p:sp>
+          <p:nvSpPr>
+            <p:cNvPr id="1111" name="CaixaDeTexto 1110">
+              <a:extLst>
+                <a:ext uri="{FF2B5EF4-FFF2-40B4-BE49-F238E27FC236}">
+                  <a16:creationId xmlns:a16="http://schemas.microsoft.com/office/drawing/2014/main" id="{F5A3864C-83DE-98D2-2E12-ED1FE39B6D64}"/>
+                </a:ext>
+              </a:extLst>
+            </p:cNvPr>
+            <p:cNvSpPr txBox="1"/>
+            <p:nvPr/>
+          </p:nvSpPr>
+          <p:spPr>
+            <a:xfrm>
+              <a:off x="11211363" y="2889564"/>
+              <a:ext cx="494323" cy="307777"/>
+            </a:xfrm>
+            <a:prstGeom prst="rect">
+              <a:avLst/>
+            </a:prstGeom>
+            <a:noFill/>
+          </p:spPr>
+          <p:txBody>
+            <a:bodyPr wrap="square" rtlCol="0">
+              <a:spAutoFit/>
+            </a:bodyPr>
+            <a:lstStyle/>
+            <a:p>
+              <a:pPr algn="ctr"/>
+              <a:r>
+                <a:rPr lang="pt-BR" sz="1400" dirty="0">
+                  <a:solidFill>
+                    <a:srgbClr val="C00000"/>
+                  </a:solidFill>
+                  <a:latin typeface="Arial" panose="020B0604020202020204" pitchFamily="34" charset="0"/>
+                  <a:cs typeface="Arial" panose="020B0604020202020204" pitchFamily="34" charset="0"/>
+                </a:rPr>
+                <a:t>[40]</a:t>
+              </a:r>
+            </a:p>
+          </p:txBody>
+        </p:sp>
+      </p:grpSp>
+      <p:grpSp>
+        <p:nvGrpSpPr>
+          <p:cNvPr id="1112" name="Agrupar 1111">
+            <a:extLst>
+              <a:ext uri="{FF2B5EF4-FFF2-40B4-BE49-F238E27FC236}">
+                <a16:creationId xmlns:a16="http://schemas.microsoft.com/office/drawing/2014/main" id="{57149CB3-421C-7404-93D8-49D821EFDDB0}"/>
+              </a:ext>
+            </a:extLst>
+          </p:cNvPr>
+          <p:cNvGrpSpPr/>
+          <p:nvPr/>
+        </p:nvGrpSpPr>
+        <p:grpSpPr>
+          <a:xfrm>
+            <a:off x="4012845" y="6520485"/>
+            <a:ext cx="4416114" cy="307777"/>
+            <a:chOff x="7289572" y="2889564"/>
+            <a:chExt cx="4416114" cy="307777"/>
+          </a:xfrm>
+        </p:grpSpPr>
+        <p:sp>
+          <p:nvSpPr>
+            <p:cNvPr id="1113" name="CaixaDeTexto 1112">
+              <a:extLst>
+                <a:ext uri="{FF2B5EF4-FFF2-40B4-BE49-F238E27FC236}">
+                  <a16:creationId xmlns:a16="http://schemas.microsoft.com/office/drawing/2014/main" id="{6C6E5D90-2451-8FFE-03E8-BD4F77C12B90}"/>
+                </a:ext>
+              </a:extLst>
+            </p:cNvPr>
+            <p:cNvSpPr txBox="1"/>
+            <p:nvPr/>
+          </p:nvSpPr>
+          <p:spPr>
+            <a:xfrm>
+              <a:off x="7289572" y="2889564"/>
+              <a:ext cx="494323" cy="307777"/>
+            </a:xfrm>
+            <a:prstGeom prst="rect">
+              <a:avLst/>
+            </a:prstGeom>
+            <a:noFill/>
+          </p:spPr>
+          <p:txBody>
+            <a:bodyPr wrap="square" rtlCol="0">
+              <a:spAutoFit/>
+            </a:bodyPr>
+            <a:lstStyle/>
+            <a:p>
+              <a:pPr algn="ctr"/>
+              <a:r>
+                <a:rPr lang="pt-BR" sz="1400" dirty="0">
+                  <a:solidFill>
+                    <a:srgbClr val="C00000"/>
+                  </a:solidFill>
+                  <a:latin typeface="Arial" panose="020B0604020202020204" pitchFamily="34" charset="0"/>
+                  <a:cs typeface="Arial" panose="020B0604020202020204" pitchFamily="34" charset="0"/>
+                </a:rPr>
+                <a:t>[41]</a:t>
+              </a:r>
+            </a:p>
+          </p:txBody>
+        </p:sp>
+        <p:sp>
+          <p:nvSpPr>
+            <p:cNvPr id="1114" name="CaixaDeTexto 1113">
+              <a:extLst>
+                <a:ext uri="{FF2B5EF4-FFF2-40B4-BE49-F238E27FC236}">
+                  <a16:creationId xmlns:a16="http://schemas.microsoft.com/office/drawing/2014/main" id="{214C9A37-2018-2BE7-9EEB-67B3EA7C4D93}"/>
+                </a:ext>
+              </a:extLst>
+            </p:cNvPr>
+            <p:cNvSpPr txBox="1"/>
+            <p:nvPr/>
+          </p:nvSpPr>
+          <p:spPr>
+            <a:xfrm>
+              <a:off x="7725327" y="2889564"/>
+              <a:ext cx="494323" cy="307777"/>
+            </a:xfrm>
+            <a:prstGeom prst="rect">
+              <a:avLst/>
+            </a:prstGeom>
+            <a:noFill/>
+          </p:spPr>
+          <p:txBody>
+            <a:bodyPr wrap="square" rtlCol="0">
+              <a:spAutoFit/>
+            </a:bodyPr>
+            <a:lstStyle/>
+            <a:p>
+              <a:pPr algn="ctr"/>
+              <a:r>
+                <a:rPr lang="pt-BR" sz="1400" dirty="0">
+                  <a:solidFill>
+                    <a:srgbClr val="C00000"/>
+                  </a:solidFill>
+                  <a:latin typeface="Arial" panose="020B0604020202020204" pitchFamily="34" charset="0"/>
+                  <a:cs typeface="Arial" panose="020B0604020202020204" pitchFamily="34" charset="0"/>
+                </a:rPr>
+                <a:t>[42]</a:t>
+              </a:r>
+            </a:p>
+          </p:txBody>
+        </p:sp>
+        <p:sp>
+          <p:nvSpPr>
+            <p:cNvPr id="1115" name="CaixaDeTexto 1114">
+              <a:extLst>
+                <a:ext uri="{FF2B5EF4-FFF2-40B4-BE49-F238E27FC236}">
+                  <a16:creationId xmlns:a16="http://schemas.microsoft.com/office/drawing/2014/main" id="{DA2A86D1-B6AF-7108-83BD-4D399E4E5590}"/>
+                </a:ext>
+              </a:extLst>
+            </p:cNvPr>
+            <p:cNvSpPr txBox="1"/>
+            <p:nvPr/>
+          </p:nvSpPr>
+          <p:spPr>
+            <a:xfrm>
+              <a:off x="8161082" y="2889564"/>
+              <a:ext cx="494323" cy="307777"/>
+            </a:xfrm>
+            <a:prstGeom prst="rect">
+              <a:avLst/>
+            </a:prstGeom>
+            <a:noFill/>
+          </p:spPr>
+          <p:txBody>
+            <a:bodyPr wrap="square" rtlCol="0">
+              <a:spAutoFit/>
+            </a:bodyPr>
+            <a:lstStyle/>
+            <a:p>
+              <a:pPr algn="ctr"/>
+              <a:r>
+                <a:rPr lang="pt-BR" sz="1400" dirty="0">
+                  <a:solidFill>
+                    <a:srgbClr val="C00000"/>
+                  </a:solidFill>
+                  <a:latin typeface="Arial" panose="020B0604020202020204" pitchFamily="34" charset="0"/>
+                  <a:cs typeface="Arial" panose="020B0604020202020204" pitchFamily="34" charset="0"/>
+                </a:rPr>
+                <a:t>[43]</a:t>
+              </a:r>
+            </a:p>
+          </p:txBody>
+        </p:sp>
+        <p:sp>
+          <p:nvSpPr>
+            <p:cNvPr id="1116" name="CaixaDeTexto 1115">
+              <a:extLst>
+                <a:ext uri="{FF2B5EF4-FFF2-40B4-BE49-F238E27FC236}">
+                  <a16:creationId xmlns:a16="http://schemas.microsoft.com/office/drawing/2014/main" id="{FE35067E-C94D-3051-9E2F-F31E80B373AE}"/>
+                </a:ext>
+              </a:extLst>
+            </p:cNvPr>
+            <p:cNvSpPr txBox="1"/>
+            <p:nvPr/>
+          </p:nvSpPr>
+          <p:spPr>
+            <a:xfrm>
+              <a:off x="8596837" y="2889564"/>
+              <a:ext cx="494323" cy="307777"/>
+            </a:xfrm>
+            <a:prstGeom prst="rect">
+              <a:avLst/>
+            </a:prstGeom>
+            <a:noFill/>
+          </p:spPr>
+          <p:txBody>
+            <a:bodyPr wrap="square" rtlCol="0">
+              <a:spAutoFit/>
+            </a:bodyPr>
+            <a:lstStyle/>
+            <a:p>
+              <a:pPr algn="ctr"/>
+              <a:r>
+                <a:rPr lang="pt-BR" sz="1400" dirty="0">
+                  <a:solidFill>
+                    <a:srgbClr val="C00000"/>
+                  </a:solidFill>
+                  <a:latin typeface="Arial" panose="020B0604020202020204" pitchFamily="34" charset="0"/>
+                  <a:cs typeface="Arial" panose="020B0604020202020204" pitchFamily="34" charset="0"/>
+                </a:rPr>
+                <a:t>[44]</a:t>
+              </a:r>
+            </a:p>
+          </p:txBody>
+        </p:sp>
+        <p:sp>
+          <p:nvSpPr>
+            <p:cNvPr id="1117" name="CaixaDeTexto 1116">
+              <a:extLst>
+                <a:ext uri="{FF2B5EF4-FFF2-40B4-BE49-F238E27FC236}">
+                  <a16:creationId xmlns:a16="http://schemas.microsoft.com/office/drawing/2014/main" id="{831C68AA-DA26-D754-E9EC-02E9661A6B6B}"/>
+                </a:ext>
+              </a:extLst>
+            </p:cNvPr>
+            <p:cNvSpPr txBox="1"/>
+            <p:nvPr/>
+          </p:nvSpPr>
+          <p:spPr>
+            <a:xfrm>
+              <a:off x="9032592" y="2889564"/>
+              <a:ext cx="494323" cy="307777"/>
+            </a:xfrm>
+            <a:prstGeom prst="rect">
+              <a:avLst/>
+            </a:prstGeom>
+            <a:noFill/>
+          </p:spPr>
+          <p:txBody>
+            <a:bodyPr wrap="square" rtlCol="0">
+              <a:spAutoFit/>
+            </a:bodyPr>
+            <a:lstStyle/>
+            <a:p>
+              <a:pPr algn="ctr"/>
+              <a:r>
+                <a:rPr lang="pt-BR" sz="1400" dirty="0">
+                  <a:solidFill>
+                    <a:srgbClr val="C00000"/>
+                  </a:solidFill>
+                  <a:latin typeface="Arial" panose="020B0604020202020204" pitchFamily="34" charset="0"/>
+                  <a:cs typeface="Arial" panose="020B0604020202020204" pitchFamily="34" charset="0"/>
+                </a:rPr>
+                <a:t>[45]</a:t>
+              </a:r>
+            </a:p>
+          </p:txBody>
+        </p:sp>
+        <p:sp>
+          <p:nvSpPr>
+            <p:cNvPr id="1118" name="CaixaDeTexto 1117">
+              <a:extLst>
+                <a:ext uri="{FF2B5EF4-FFF2-40B4-BE49-F238E27FC236}">
+                  <a16:creationId xmlns:a16="http://schemas.microsoft.com/office/drawing/2014/main" id="{2A394446-2F32-B9BF-AC42-E1B16F491144}"/>
+                </a:ext>
+              </a:extLst>
+            </p:cNvPr>
+            <p:cNvSpPr txBox="1"/>
+            <p:nvPr/>
+          </p:nvSpPr>
+          <p:spPr>
+            <a:xfrm>
+              <a:off x="9468347" y="2889564"/>
+              <a:ext cx="494323" cy="307777"/>
+            </a:xfrm>
+            <a:prstGeom prst="rect">
+              <a:avLst/>
+            </a:prstGeom>
+            <a:noFill/>
+          </p:spPr>
+          <p:txBody>
+            <a:bodyPr wrap="square" rtlCol="0">
+              <a:spAutoFit/>
+            </a:bodyPr>
+            <a:lstStyle/>
+            <a:p>
+              <a:pPr algn="ctr"/>
+              <a:r>
+                <a:rPr lang="pt-BR" sz="1400" dirty="0">
+                  <a:solidFill>
+                    <a:srgbClr val="C00000"/>
+                  </a:solidFill>
+                  <a:latin typeface="Arial" panose="020B0604020202020204" pitchFamily="34" charset="0"/>
+                  <a:cs typeface="Arial" panose="020B0604020202020204" pitchFamily="34" charset="0"/>
+                </a:rPr>
+                <a:t>[46]</a:t>
+              </a:r>
+            </a:p>
+          </p:txBody>
+        </p:sp>
+        <p:sp>
+          <p:nvSpPr>
+            <p:cNvPr id="1119" name="CaixaDeTexto 1118">
+              <a:extLst>
+                <a:ext uri="{FF2B5EF4-FFF2-40B4-BE49-F238E27FC236}">
+                  <a16:creationId xmlns:a16="http://schemas.microsoft.com/office/drawing/2014/main" id="{97087C3D-0985-3A0D-5ADA-C476EB80DC7B}"/>
+                </a:ext>
+              </a:extLst>
+            </p:cNvPr>
+            <p:cNvSpPr txBox="1"/>
+            <p:nvPr/>
+          </p:nvSpPr>
+          <p:spPr>
+            <a:xfrm>
+              <a:off x="9904102" y="2889564"/>
+              <a:ext cx="494323" cy="307777"/>
+            </a:xfrm>
+            <a:prstGeom prst="rect">
+              <a:avLst/>
+            </a:prstGeom>
+            <a:noFill/>
+          </p:spPr>
+          <p:txBody>
+            <a:bodyPr wrap="square" rtlCol="0">
+              <a:spAutoFit/>
+            </a:bodyPr>
+            <a:lstStyle/>
+            <a:p>
+              <a:pPr algn="ctr"/>
+              <a:r>
+                <a:rPr lang="pt-BR" sz="1400" dirty="0">
+                  <a:solidFill>
+                    <a:srgbClr val="C00000"/>
+                  </a:solidFill>
+                  <a:latin typeface="Arial" panose="020B0604020202020204" pitchFamily="34" charset="0"/>
+                  <a:cs typeface="Arial" panose="020B0604020202020204" pitchFamily="34" charset="0"/>
+                </a:rPr>
+                <a:t>[47]</a:t>
+              </a:r>
+            </a:p>
+          </p:txBody>
+        </p:sp>
+        <p:sp>
+          <p:nvSpPr>
+            <p:cNvPr id="1120" name="CaixaDeTexto 1119">
+              <a:extLst>
+                <a:ext uri="{FF2B5EF4-FFF2-40B4-BE49-F238E27FC236}">
+                  <a16:creationId xmlns:a16="http://schemas.microsoft.com/office/drawing/2014/main" id="{DC21C23E-E242-53AC-8DED-5258AF064E1C}"/>
+                </a:ext>
+              </a:extLst>
+            </p:cNvPr>
+            <p:cNvSpPr txBox="1"/>
+            <p:nvPr/>
+          </p:nvSpPr>
+          <p:spPr>
+            <a:xfrm>
+              <a:off x="10339857" y="2889564"/>
+              <a:ext cx="494323" cy="307777"/>
+            </a:xfrm>
+            <a:prstGeom prst="rect">
+              <a:avLst/>
+            </a:prstGeom>
+            <a:noFill/>
+          </p:spPr>
+          <p:txBody>
+            <a:bodyPr wrap="square" rtlCol="0">
+              <a:spAutoFit/>
+            </a:bodyPr>
+            <a:lstStyle/>
+            <a:p>
+              <a:pPr algn="ctr"/>
+              <a:r>
+                <a:rPr lang="pt-BR" sz="1400" dirty="0">
+                  <a:solidFill>
+                    <a:srgbClr val="C00000"/>
+                  </a:solidFill>
+                  <a:latin typeface="Arial" panose="020B0604020202020204" pitchFamily="34" charset="0"/>
+                  <a:cs typeface="Arial" panose="020B0604020202020204" pitchFamily="34" charset="0"/>
+                </a:rPr>
+                <a:t>[48]</a:t>
+              </a:r>
+            </a:p>
+          </p:txBody>
+        </p:sp>
+        <p:sp>
+          <p:nvSpPr>
+            <p:cNvPr id="1121" name="CaixaDeTexto 1120">
+              <a:extLst>
+                <a:ext uri="{FF2B5EF4-FFF2-40B4-BE49-F238E27FC236}">
+                  <a16:creationId xmlns:a16="http://schemas.microsoft.com/office/drawing/2014/main" id="{3F9A3609-EB09-E8D6-EB36-946B18BED9B5}"/>
+                </a:ext>
+              </a:extLst>
+            </p:cNvPr>
+            <p:cNvSpPr txBox="1"/>
+            <p:nvPr/>
+          </p:nvSpPr>
+          <p:spPr>
+            <a:xfrm>
+              <a:off x="10775612" y="2889564"/>
+              <a:ext cx="494323" cy="307777"/>
+            </a:xfrm>
+            <a:prstGeom prst="rect">
+              <a:avLst/>
+            </a:prstGeom>
+            <a:noFill/>
+          </p:spPr>
+          <p:txBody>
+            <a:bodyPr wrap="square" rtlCol="0">
+              <a:spAutoFit/>
+            </a:bodyPr>
+            <a:lstStyle/>
+            <a:p>
+              <a:pPr algn="ctr"/>
+              <a:r>
+                <a:rPr lang="pt-BR" sz="1400" dirty="0">
+                  <a:solidFill>
+                    <a:srgbClr val="C00000"/>
+                  </a:solidFill>
+                  <a:latin typeface="Arial" panose="020B0604020202020204" pitchFamily="34" charset="0"/>
+                  <a:cs typeface="Arial" panose="020B0604020202020204" pitchFamily="34" charset="0"/>
+                </a:rPr>
+                <a:t>[49]</a:t>
+              </a:r>
+            </a:p>
+          </p:txBody>
+        </p:sp>
+        <p:sp>
+          <p:nvSpPr>
+            <p:cNvPr id="1122" name="CaixaDeTexto 1121">
+              <a:extLst>
+                <a:ext uri="{FF2B5EF4-FFF2-40B4-BE49-F238E27FC236}">
+                  <a16:creationId xmlns:a16="http://schemas.microsoft.com/office/drawing/2014/main" id="{DC65AF13-9EA5-6645-8794-269B09665C3E}"/>
+                </a:ext>
+              </a:extLst>
+            </p:cNvPr>
+            <p:cNvSpPr txBox="1"/>
+            <p:nvPr/>
+          </p:nvSpPr>
+          <p:spPr>
+            <a:xfrm>
+              <a:off x="11211363" y="2889564"/>
+              <a:ext cx="494323" cy="307777"/>
+            </a:xfrm>
+            <a:prstGeom prst="rect">
+              <a:avLst/>
+            </a:prstGeom>
+            <a:noFill/>
+          </p:spPr>
+          <p:txBody>
+            <a:bodyPr wrap="square" rtlCol="0">
+              <a:spAutoFit/>
+            </a:bodyPr>
+            <a:lstStyle/>
+            <a:p>
+              <a:pPr algn="ctr"/>
+              <a:r>
+                <a:rPr lang="pt-BR" sz="1400" dirty="0">
+                  <a:solidFill>
+                    <a:srgbClr val="C00000"/>
+                  </a:solidFill>
+                  <a:latin typeface="Arial" panose="020B0604020202020204" pitchFamily="34" charset="0"/>
+                  <a:cs typeface="Arial" panose="020B0604020202020204" pitchFamily="34" charset="0"/>
+                </a:rPr>
+                <a:t>[50]</a:t>
+              </a:r>
+            </a:p>
+          </p:txBody>
+        </p:sp>
+      </p:grpSp>
+      <p:grpSp>
+        <p:nvGrpSpPr>
+          <p:cNvPr id="1123" name="Agrupar 1122">
+            <a:extLst>
+              <a:ext uri="{FF2B5EF4-FFF2-40B4-BE49-F238E27FC236}">
+                <a16:creationId xmlns:a16="http://schemas.microsoft.com/office/drawing/2014/main" id="{0044DF96-33B3-040F-ECF6-46C6D7C20746}"/>
+              </a:ext>
+            </a:extLst>
+          </p:cNvPr>
+          <p:cNvGrpSpPr/>
+          <p:nvPr/>
+        </p:nvGrpSpPr>
+        <p:grpSpPr>
+          <a:xfrm>
+            <a:off x="4012490" y="6765431"/>
+            <a:ext cx="4416114" cy="307777"/>
+            <a:chOff x="7289572" y="2889564"/>
+            <a:chExt cx="4416114" cy="307777"/>
+          </a:xfrm>
+        </p:grpSpPr>
+        <p:sp>
+          <p:nvSpPr>
+            <p:cNvPr id="1124" name="CaixaDeTexto 1123">
+              <a:extLst>
+                <a:ext uri="{FF2B5EF4-FFF2-40B4-BE49-F238E27FC236}">
+                  <a16:creationId xmlns:a16="http://schemas.microsoft.com/office/drawing/2014/main" id="{9312236D-5D27-C90A-B7A7-DE7FAB3341B1}"/>
+                </a:ext>
+              </a:extLst>
+            </p:cNvPr>
+            <p:cNvSpPr txBox="1"/>
+            <p:nvPr/>
+          </p:nvSpPr>
+          <p:spPr>
+            <a:xfrm>
+              <a:off x="7289572" y="2889564"/>
+              <a:ext cx="494323" cy="307777"/>
+            </a:xfrm>
+            <a:prstGeom prst="rect">
+              <a:avLst/>
+            </a:prstGeom>
+            <a:noFill/>
+          </p:spPr>
+          <p:txBody>
+            <a:bodyPr wrap="square" rtlCol="0">
+              <a:spAutoFit/>
+            </a:bodyPr>
+            <a:lstStyle/>
+            <a:p>
+              <a:pPr algn="ctr"/>
+              <a:r>
+                <a:rPr lang="pt-BR" sz="1400" dirty="0">
+                  <a:solidFill>
+                    <a:srgbClr val="C00000"/>
+                  </a:solidFill>
+                  <a:latin typeface="Arial" panose="020B0604020202020204" pitchFamily="34" charset="0"/>
+                  <a:cs typeface="Arial" panose="020B0604020202020204" pitchFamily="34" charset="0"/>
+                </a:rPr>
+                <a:t>[51]</a:t>
+              </a:r>
+            </a:p>
+          </p:txBody>
+        </p:sp>
+        <p:sp>
+          <p:nvSpPr>
+            <p:cNvPr id="1125" name="CaixaDeTexto 1124">
+              <a:extLst>
+                <a:ext uri="{FF2B5EF4-FFF2-40B4-BE49-F238E27FC236}">
+                  <a16:creationId xmlns:a16="http://schemas.microsoft.com/office/drawing/2014/main" id="{31FCDC26-B147-AB9A-76A6-A44768D2EFE1}"/>
+                </a:ext>
+              </a:extLst>
+            </p:cNvPr>
+            <p:cNvSpPr txBox="1"/>
+            <p:nvPr/>
+          </p:nvSpPr>
+          <p:spPr>
+            <a:xfrm>
+              <a:off x="7725327" y="2889564"/>
+              <a:ext cx="494323" cy="307777"/>
+            </a:xfrm>
+            <a:prstGeom prst="rect">
+              <a:avLst/>
+            </a:prstGeom>
+            <a:noFill/>
+          </p:spPr>
+          <p:txBody>
+            <a:bodyPr wrap="square" rtlCol="0">
+              <a:spAutoFit/>
+            </a:bodyPr>
+            <a:lstStyle/>
+            <a:p>
+              <a:pPr algn="ctr"/>
+              <a:r>
+                <a:rPr lang="pt-BR" sz="1400" dirty="0">
+                  <a:solidFill>
+                    <a:srgbClr val="C00000"/>
+                  </a:solidFill>
+                  <a:latin typeface="Arial" panose="020B0604020202020204" pitchFamily="34" charset="0"/>
+                  <a:cs typeface="Arial" panose="020B0604020202020204" pitchFamily="34" charset="0"/>
+                </a:rPr>
+                <a:t>[52]</a:t>
+              </a:r>
+            </a:p>
+          </p:txBody>
+        </p:sp>
+        <p:sp>
+          <p:nvSpPr>
+            <p:cNvPr id="1126" name="CaixaDeTexto 1125">
+              <a:extLst>
+                <a:ext uri="{FF2B5EF4-FFF2-40B4-BE49-F238E27FC236}">
+                  <a16:creationId xmlns:a16="http://schemas.microsoft.com/office/drawing/2014/main" id="{59CB0963-62F1-00CA-A5FA-990386A98954}"/>
+                </a:ext>
+              </a:extLst>
+            </p:cNvPr>
+            <p:cNvSpPr txBox="1"/>
+            <p:nvPr/>
+          </p:nvSpPr>
+          <p:spPr>
+            <a:xfrm>
+              <a:off x="8161082" y="2889564"/>
+              <a:ext cx="494323" cy="307777"/>
+            </a:xfrm>
+            <a:prstGeom prst="rect">
+              <a:avLst/>
+            </a:prstGeom>
+            <a:noFill/>
+          </p:spPr>
+          <p:txBody>
+            <a:bodyPr wrap="square" rtlCol="0">
+              <a:spAutoFit/>
+            </a:bodyPr>
+            <a:lstStyle/>
+            <a:p>
+              <a:pPr algn="ctr"/>
+              <a:r>
+                <a:rPr lang="pt-BR" sz="1400" dirty="0">
+                  <a:solidFill>
+                    <a:srgbClr val="C00000"/>
+                  </a:solidFill>
+                  <a:latin typeface="Arial" panose="020B0604020202020204" pitchFamily="34" charset="0"/>
+                  <a:cs typeface="Arial" panose="020B0604020202020204" pitchFamily="34" charset="0"/>
+                </a:rPr>
+                <a:t>[53]</a:t>
+              </a:r>
+            </a:p>
+          </p:txBody>
+        </p:sp>
+        <p:sp>
+          <p:nvSpPr>
+            <p:cNvPr id="1127" name="CaixaDeTexto 1126">
+              <a:extLst>
+                <a:ext uri="{FF2B5EF4-FFF2-40B4-BE49-F238E27FC236}">
+                  <a16:creationId xmlns:a16="http://schemas.microsoft.com/office/drawing/2014/main" id="{2FE9FA70-A8BB-B512-8FD5-A8D9FFDE81B9}"/>
+                </a:ext>
+              </a:extLst>
+            </p:cNvPr>
+            <p:cNvSpPr txBox="1"/>
+            <p:nvPr/>
+          </p:nvSpPr>
+          <p:spPr>
+            <a:xfrm>
+              <a:off x="8596837" y="2889564"/>
+              <a:ext cx="494323" cy="307777"/>
+            </a:xfrm>
+            <a:prstGeom prst="rect">
+              <a:avLst/>
+            </a:prstGeom>
+            <a:noFill/>
+          </p:spPr>
+          <p:txBody>
+            <a:bodyPr wrap="square" rtlCol="0">
+              <a:spAutoFit/>
+            </a:bodyPr>
+            <a:lstStyle/>
+            <a:p>
+              <a:pPr algn="ctr"/>
+              <a:r>
+                <a:rPr lang="pt-BR" sz="1400" dirty="0">
+                  <a:solidFill>
+                    <a:srgbClr val="C00000"/>
+                  </a:solidFill>
+                  <a:latin typeface="Arial" panose="020B0604020202020204" pitchFamily="34" charset="0"/>
+                  <a:cs typeface="Arial" panose="020B0604020202020204" pitchFamily="34" charset="0"/>
+                </a:rPr>
+                <a:t>[54]</a:t>
+              </a:r>
+            </a:p>
+          </p:txBody>
+        </p:sp>
+        <p:sp>
+          <p:nvSpPr>
+            <p:cNvPr id="1128" name="CaixaDeTexto 1127">
+              <a:extLst>
+                <a:ext uri="{FF2B5EF4-FFF2-40B4-BE49-F238E27FC236}">
+                  <a16:creationId xmlns:a16="http://schemas.microsoft.com/office/drawing/2014/main" id="{2C6B961E-2B9C-5E39-B598-15A12DF3018C}"/>
+                </a:ext>
+              </a:extLst>
+            </p:cNvPr>
+            <p:cNvSpPr txBox="1"/>
+            <p:nvPr/>
+          </p:nvSpPr>
+          <p:spPr>
+            <a:xfrm>
+              <a:off x="9032592" y="2889564"/>
+              <a:ext cx="494323" cy="307777"/>
+            </a:xfrm>
+            <a:prstGeom prst="rect">
+              <a:avLst/>
+            </a:prstGeom>
+            <a:noFill/>
+          </p:spPr>
+          <p:txBody>
+            <a:bodyPr wrap="square" rtlCol="0">
+              <a:spAutoFit/>
+            </a:bodyPr>
+            <a:lstStyle/>
+            <a:p>
+              <a:pPr algn="ctr"/>
+              <a:r>
+                <a:rPr lang="pt-BR" sz="1400" dirty="0">
+                  <a:solidFill>
+                    <a:srgbClr val="C00000"/>
+                  </a:solidFill>
+                  <a:latin typeface="Arial" panose="020B0604020202020204" pitchFamily="34" charset="0"/>
+                  <a:cs typeface="Arial" panose="020B0604020202020204" pitchFamily="34" charset="0"/>
+                </a:rPr>
+                <a:t>[55]</a:t>
+              </a:r>
+            </a:p>
+          </p:txBody>
+        </p:sp>
+        <p:sp>
+          <p:nvSpPr>
+            <p:cNvPr id="1129" name="CaixaDeTexto 1128">
+              <a:extLst>
+                <a:ext uri="{FF2B5EF4-FFF2-40B4-BE49-F238E27FC236}">
+                  <a16:creationId xmlns:a16="http://schemas.microsoft.com/office/drawing/2014/main" id="{10D6A1F2-54CC-DB35-E4A7-4CB0029CDEAA}"/>
+                </a:ext>
+              </a:extLst>
+            </p:cNvPr>
+            <p:cNvSpPr txBox="1"/>
+            <p:nvPr/>
+          </p:nvSpPr>
+          <p:spPr>
+            <a:xfrm>
+              <a:off x="9468347" y="2889564"/>
+              <a:ext cx="494323" cy="307777"/>
+            </a:xfrm>
+            <a:prstGeom prst="rect">
+              <a:avLst/>
+            </a:prstGeom>
+            <a:noFill/>
+          </p:spPr>
+          <p:txBody>
+            <a:bodyPr wrap="square" rtlCol="0">
+              <a:spAutoFit/>
+            </a:bodyPr>
+            <a:lstStyle/>
+            <a:p>
+              <a:pPr algn="ctr"/>
+              <a:r>
+                <a:rPr lang="pt-BR" sz="1400" dirty="0">
+                  <a:solidFill>
+                    <a:srgbClr val="C00000"/>
+                  </a:solidFill>
+                  <a:latin typeface="Arial" panose="020B0604020202020204" pitchFamily="34" charset="0"/>
+                  <a:cs typeface="Arial" panose="020B0604020202020204" pitchFamily="34" charset="0"/>
+                </a:rPr>
+                <a:t>[56]</a:t>
+              </a:r>
+            </a:p>
+          </p:txBody>
+        </p:sp>
+        <p:sp>
+          <p:nvSpPr>
+            <p:cNvPr id="1130" name="CaixaDeTexto 1129">
+              <a:extLst>
+                <a:ext uri="{FF2B5EF4-FFF2-40B4-BE49-F238E27FC236}">
+                  <a16:creationId xmlns:a16="http://schemas.microsoft.com/office/drawing/2014/main" id="{1661235B-9C8E-316B-79C6-58443CBB8B4C}"/>
+                </a:ext>
+              </a:extLst>
+            </p:cNvPr>
+            <p:cNvSpPr txBox="1"/>
+            <p:nvPr/>
+          </p:nvSpPr>
+          <p:spPr>
+            <a:xfrm>
+              <a:off x="9904102" y="2889564"/>
+              <a:ext cx="494323" cy="307777"/>
+            </a:xfrm>
+            <a:prstGeom prst="rect">
+              <a:avLst/>
+            </a:prstGeom>
+            <a:noFill/>
+          </p:spPr>
+          <p:txBody>
+            <a:bodyPr wrap="square" rtlCol="0">
+              <a:spAutoFit/>
+            </a:bodyPr>
+            <a:lstStyle/>
+            <a:p>
+              <a:pPr algn="ctr"/>
+              <a:r>
+                <a:rPr lang="pt-BR" sz="1400" dirty="0">
+                  <a:solidFill>
+                    <a:srgbClr val="C00000"/>
+                  </a:solidFill>
+                  <a:latin typeface="Arial" panose="020B0604020202020204" pitchFamily="34" charset="0"/>
+                  <a:cs typeface="Arial" panose="020B0604020202020204" pitchFamily="34" charset="0"/>
+                </a:rPr>
+                <a:t>[57]</a:t>
+              </a:r>
+            </a:p>
+          </p:txBody>
+        </p:sp>
+        <p:sp>
+          <p:nvSpPr>
+            <p:cNvPr id="1131" name="CaixaDeTexto 1130">
+              <a:extLst>
+                <a:ext uri="{FF2B5EF4-FFF2-40B4-BE49-F238E27FC236}">
+                  <a16:creationId xmlns:a16="http://schemas.microsoft.com/office/drawing/2014/main" id="{1B7891EA-59D6-D52F-17BE-1D1C2977BEEB}"/>
+                </a:ext>
+              </a:extLst>
+            </p:cNvPr>
+            <p:cNvSpPr txBox="1"/>
+            <p:nvPr/>
+          </p:nvSpPr>
+          <p:spPr>
+            <a:xfrm>
+              <a:off x="10339857" y="2889564"/>
+              <a:ext cx="494323" cy="307777"/>
+            </a:xfrm>
+            <a:prstGeom prst="rect">
+              <a:avLst/>
+            </a:prstGeom>
+            <a:noFill/>
+          </p:spPr>
+          <p:txBody>
+            <a:bodyPr wrap="square" rtlCol="0">
+              <a:spAutoFit/>
+            </a:bodyPr>
+            <a:lstStyle/>
+            <a:p>
+              <a:pPr algn="ctr"/>
+              <a:r>
+                <a:rPr lang="pt-BR" sz="1400" dirty="0">
+                  <a:solidFill>
+                    <a:srgbClr val="C00000"/>
+                  </a:solidFill>
+                  <a:latin typeface="Arial" panose="020B0604020202020204" pitchFamily="34" charset="0"/>
+                  <a:cs typeface="Arial" panose="020B0604020202020204" pitchFamily="34" charset="0"/>
+                </a:rPr>
+                <a:t>[58]</a:t>
+              </a:r>
+            </a:p>
+          </p:txBody>
+        </p:sp>
+        <p:sp>
+          <p:nvSpPr>
+            <p:cNvPr id="1132" name="CaixaDeTexto 1131">
+              <a:extLst>
+                <a:ext uri="{FF2B5EF4-FFF2-40B4-BE49-F238E27FC236}">
+                  <a16:creationId xmlns:a16="http://schemas.microsoft.com/office/drawing/2014/main" id="{9DF07C35-E868-A57A-F00F-3BC6A68B3ADC}"/>
+                </a:ext>
+              </a:extLst>
+            </p:cNvPr>
+            <p:cNvSpPr txBox="1"/>
+            <p:nvPr/>
+          </p:nvSpPr>
+          <p:spPr>
+            <a:xfrm>
+              <a:off x="10775612" y="2889564"/>
+              <a:ext cx="494323" cy="307777"/>
+            </a:xfrm>
+            <a:prstGeom prst="rect">
+              <a:avLst/>
+            </a:prstGeom>
+            <a:noFill/>
+          </p:spPr>
+          <p:txBody>
+            <a:bodyPr wrap="square" rtlCol="0">
+              <a:spAutoFit/>
+            </a:bodyPr>
+            <a:lstStyle/>
+            <a:p>
+              <a:pPr algn="ctr"/>
+              <a:r>
+                <a:rPr lang="pt-BR" sz="1400" dirty="0">
+                  <a:solidFill>
+                    <a:srgbClr val="C00000"/>
+                  </a:solidFill>
+                  <a:latin typeface="Arial" panose="020B0604020202020204" pitchFamily="34" charset="0"/>
+                  <a:cs typeface="Arial" panose="020B0604020202020204" pitchFamily="34" charset="0"/>
+                </a:rPr>
+                <a:t>[59]</a:t>
+              </a:r>
+            </a:p>
+          </p:txBody>
+        </p:sp>
+        <p:sp>
+          <p:nvSpPr>
+            <p:cNvPr id="1133" name="CaixaDeTexto 1132">
+              <a:extLst>
+                <a:ext uri="{FF2B5EF4-FFF2-40B4-BE49-F238E27FC236}">
+                  <a16:creationId xmlns:a16="http://schemas.microsoft.com/office/drawing/2014/main" id="{EBF57813-F060-2FFF-5FF9-36282B38C2AC}"/>
+                </a:ext>
+              </a:extLst>
+            </p:cNvPr>
+            <p:cNvSpPr txBox="1"/>
+            <p:nvPr/>
+          </p:nvSpPr>
+          <p:spPr>
+            <a:xfrm>
+              <a:off x="11211363" y="2889564"/>
+              <a:ext cx="494323" cy="307777"/>
+            </a:xfrm>
+            <a:prstGeom prst="rect">
+              <a:avLst/>
+            </a:prstGeom>
+            <a:noFill/>
+          </p:spPr>
+          <p:txBody>
+            <a:bodyPr wrap="square" rtlCol="0">
+              <a:spAutoFit/>
+            </a:bodyPr>
+            <a:lstStyle/>
+            <a:p>
+              <a:pPr algn="ctr"/>
+              <a:r>
+                <a:rPr lang="pt-BR" sz="1400" dirty="0">
+                  <a:solidFill>
+                    <a:srgbClr val="C00000"/>
+                  </a:solidFill>
+                  <a:latin typeface="Arial" panose="020B0604020202020204" pitchFamily="34" charset="0"/>
+                  <a:cs typeface="Arial" panose="020B0604020202020204" pitchFamily="34" charset="0"/>
+                </a:rPr>
+                <a:t>[60]</a:t>
+              </a:r>
+            </a:p>
+          </p:txBody>
+        </p:sp>
+      </p:grpSp>
+      <p:sp>
+        <p:nvSpPr>
+          <p:cNvPr id="1134" name="CaixaDeTexto 1133">
+            <a:extLst>
+              <a:ext uri="{FF2B5EF4-FFF2-40B4-BE49-F238E27FC236}">
+                <a16:creationId xmlns:a16="http://schemas.microsoft.com/office/drawing/2014/main" id="{5856E2AF-B1CE-A712-3EA3-F3CEBC0CB5E2}"/>
+              </a:ext>
+            </a:extLst>
+          </p:cNvPr>
+          <p:cNvSpPr txBox="1"/>
+          <p:nvPr/>
+        </p:nvSpPr>
+        <p:spPr>
+          <a:xfrm>
+            <a:off x="7933926" y="7500589"/>
+            <a:ext cx="494323" cy="307777"/>
+          </a:xfrm>
+          <a:prstGeom prst="rect">
+            <a:avLst/>
+          </a:prstGeom>
+          <a:noFill/>
+        </p:spPr>
+        <p:txBody>
+          <a:bodyPr wrap="square" rtlCol="0">
+            <a:spAutoFit/>
+          </a:bodyPr>
+          <a:lstStyle/>
+          <a:p>
+            <a:pPr algn="ctr"/>
+            <a:r>
+              <a:rPr lang="pt-BR" sz="1400" dirty="0">
+                <a:solidFill>
+                  <a:srgbClr val="C00000"/>
+                </a:solidFill>
+                <a:latin typeface="Arial" panose="020B0604020202020204" pitchFamily="34" charset="0"/>
+                <a:cs typeface="Arial" panose="020B0604020202020204" pitchFamily="34" charset="0"/>
+              </a:rPr>
+              <a:t>[</a:t>
+            </a:r>
+            <a:r>
+              <a:rPr lang="pt-BR" sz="1400" dirty="0">
+                <a:solidFill>
+                  <a:srgbClr val="FFFBF0"/>
+                </a:solidFill>
+                <a:latin typeface="Arial" panose="020B0604020202020204" pitchFamily="34" charset="0"/>
+                <a:cs typeface="Arial" panose="020B0604020202020204" pitchFamily="34" charset="0"/>
+              </a:rPr>
+              <a:t>60</a:t>
+            </a:r>
+            <a:r>
+              <a:rPr lang="pt-BR" sz="1400" dirty="0">
+                <a:solidFill>
+                  <a:srgbClr val="C00000"/>
+                </a:solidFill>
+                <a:latin typeface="Arial" panose="020B0604020202020204" pitchFamily="34" charset="0"/>
+                <a:cs typeface="Arial" panose="020B0604020202020204" pitchFamily="34" charset="0"/>
+              </a:rPr>
+              <a:t>]</a:t>
+            </a:r>
+          </a:p>
+        </p:txBody>
+      </p:sp>
+      <p:sp>
+        <p:nvSpPr>
+          <p:cNvPr id="1135" name="CaixaDeTexto 1134">
+            <a:extLst>
+              <a:ext uri="{FF2B5EF4-FFF2-40B4-BE49-F238E27FC236}">
+                <a16:creationId xmlns:a16="http://schemas.microsoft.com/office/drawing/2014/main" id="{B696627D-956D-577B-9CAD-1DCBAAECFCDF}"/>
+              </a:ext>
+            </a:extLst>
+          </p:cNvPr>
+          <p:cNvSpPr txBox="1"/>
+          <p:nvPr/>
+        </p:nvSpPr>
+        <p:spPr>
+          <a:xfrm>
+            <a:off x="4023089" y="7571463"/>
+            <a:ext cx="3418875" cy="261610"/>
+          </a:xfrm>
+          <a:prstGeom prst="rect">
+            <a:avLst/>
+          </a:prstGeom>
+          <a:noFill/>
+        </p:spPr>
+        <p:txBody>
+          <a:bodyPr wrap="square" rtlCol="0">
+            <a:spAutoFit/>
+          </a:bodyPr>
+          <a:lstStyle/>
+          <a:p>
+            <a:r>
+              <a:rPr lang="pt-BR" sz="1100" dirty="0">
+                <a:solidFill>
+                  <a:srgbClr val="C00000"/>
+                </a:solidFill>
+                <a:latin typeface="Arial" panose="020B0604020202020204" pitchFamily="34" charset="0"/>
+                <a:cs typeface="Arial" panose="020B0604020202020204" pitchFamily="34" charset="0"/>
+              </a:rPr>
+              <a:t>Para anular esse jogo, marque ao lado:</a:t>
+            </a:r>
+          </a:p>
+        </p:txBody>
+      </p:sp>
+      <p:sp>
+        <p:nvSpPr>
+          <p:cNvPr id="1136" name="Retângulo 1135">
+            <a:extLst>
+              <a:ext uri="{FF2B5EF4-FFF2-40B4-BE49-F238E27FC236}">
+                <a16:creationId xmlns:a16="http://schemas.microsoft.com/office/drawing/2014/main" id="{4A74EDDF-2B39-AC59-B98F-587BF85BCE38}"/>
+              </a:ext>
+            </a:extLst>
+          </p:cNvPr>
+          <p:cNvSpPr/>
+          <p:nvPr/>
+        </p:nvSpPr>
+        <p:spPr>
+          <a:xfrm>
+            <a:off x="6708252" y="5371231"/>
+            <a:ext cx="324000" cy="108000"/>
+          </a:xfrm>
+          <a:prstGeom prst="rect">
+            <a:avLst/>
+          </a:prstGeom>
+          <a:solidFill>
+            <a:schemeClr val="tx1"/>
+          </a:solidFill>
+          <a:ln>
+            <a:noFill/>
+          </a:ln>
+        </p:spPr>
+        <p:style>
+          <a:lnRef idx="2">
+            <a:schemeClr val="accent1">
+              <a:shade val="15000"/>
+            </a:schemeClr>
+          </a:lnRef>
+          <a:fillRef idx="1">
+            <a:schemeClr val="accent1"/>
+          </a:fillRef>
+          <a:effectRef idx="0">
+            <a:schemeClr val="accent1"/>
+          </a:effectRef>
+          <a:fontRef idx="minor">
+            <a:schemeClr val="lt1"/>
+          </a:fontRef>
+        </p:style>
+        <p:txBody>
+          <a:bodyPr rtlCol="0" anchor="ctr"/>
+          <a:lstStyle/>
+          <a:p>
+            <a:pPr algn="ctr"/>
+            <a:endParaRPr lang="pt-BR"/>
+          </a:p>
+        </p:txBody>
+      </p:sp>
+      <p:sp>
+        <p:nvSpPr>
+          <p:cNvPr id="1137" name="Retângulo 1136">
+            <a:extLst>
+              <a:ext uri="{FF2B5EF4-FFF2-40B4-BE49-F238E27FC236}">
+                <a16:creationId xmlns:a16="http://schemas.microsoft.com/office/drawing/2014/main" id="{ACDAFA9C-25EB-569A-3A5E-19A615C58487}"/>
+              </a:ext>
+            </a:extLst>
+          </p:cNvPr>
+          <p:cNvSpPr/>
+          <p:nvPr/>
+        </p:nvSpPr>
+        <p:spPr>
+          <a:xfrm>
+            <a:off x="8024507" y="5371231"/>
+            <a:ext cx="324000" cy="108000"/>
+          </a:xfrm>
+          <a:prstGeom prst="rect">
+            <a:avLst/>
+          </a:prstGeom>
+          <a:solidFill>
+            <a:schemeClr val="tx1"/>
+          </a:solidFill>
+          <a:ln>
+            <a:noFill/>
+          </a:ln>
+        </p:spPr>
+        <p:style>
+          <a:lnRef idx="2">
+            <a:schemeClr val="accent1">
+              <a:shade val="15000"/>
+            </a:schemeClr>
+          </a:lnRef>
+          <a:fillRef idx="1">
+            <a:schemeClr val="accent1"/>
+          </a:fillRef>
+          <a:effectRef idx="0">
+            <a:schemeClr val="accent1"/>
+          </a:effectRef>
+          <a:fontRef idx="minor">
+            <a:schemeClr val="lt1"/>
+          </a:fontRef>
+        </p:style>
+        <p:txBody>
+          <a:bodyPr rtlCol="0" anchor="ctr"/>
+          <a:lstStyle/>
+          <a:p>
+            <a:pPr algn="ctr"/>
+            <a:endParaRPr lang="pt-BR"/>
+          </a:p>
+        </p:txBody>
+      </p:sp>
+      <p:sp>
+        <p:nvSpPr>
+          <p:cNvPr id="1138" name="Retângulo 1137">
+            <a:extLst>
+              <a:ext uri="{FF2B5EF4-FFF2-40B4-BE49-F238E27FC236}">
+                <a16:creationId xmlns:a16="http://schemas.microsoft.com/office/drawing/2014/main" id="{35DEECBF-DCD9-7A0A-A9B2-8FF912D25E7E}"/>
+              </a:ext>
+            </a:extLst>
+          </p:cNvPr>
+          <p:cNvSpPr/>
+          <p:nvPr/>
+        </p:nvSpPr>
+        <p:spPr>
+          <a:xfrm>
+            <a:off x="4097651" y="5371231"/>
+            <a:ext cx="324000" cy="108000"/>
+          </a:xfrm>
+          <a:prstGeom prst="rect">
+            <a:avLst/>
+          </a:prstGeom>
+          <a:solidFill>
+            <a:schemeClr val="tx1"/>
+          </a:solidFill>
+          <a:ln>
+            <a:noFill/>
+          </a:ln>
+        </p:spPr>
+        <p:style>
+          <a:lnRef idx="2">
+            <a:schemeClr val="accent1">
+              <a:shade val="15000"/>
+            </a:schemeClr>
+          </a:lnRef>
+          <a:fillRef idx="1">
+            <a:schemeClr val="accent1"/>
+          </a:fillRef>
+          <a:effectRef idx="0">
+            <a:schemeClr val="accent1"/>
+          </a:effectRef>
+          <a:fontRef idx="minor">
+            <a:schemeClr val="lt1"/>
+          </a:fontRef>
+        </p:style>
+        <p:txBody>
+          <a:bodyPr rtlCol="0" anchor="ctr"/>
+          <a:lstStyle/>
+          <a:p>
+            <a:pPr algn="ctr"/>
+            <a:endParaRPr lang="pt-BR"/>
+          </a:p>
+        </p:txBody>
+      </p:sp>
+      <p:sp>
+        <p:nvSpPr>
+          <p:cNvPr id="1139" name="Retângulo 1138">
+            <a:extLst>
+              <a:ext uri="{FF2B5EF4-FFF2-40B4-BE49-F238E27FC236}">
+                <a16:creationId xmlns:a16="http://schemas.microsoft.com/office/drawing/2014/main" id="{18DCBDAE-43D1-55D6-8620-B2F01A4DC75B}"/>
+              </a:ext>
+            </a:extLst>
+          </p:cNvPr>
+          <p:cNvSpPr/>
+          <p:nvPr/>
+        </p:nvSpPr>
+        <p:spPr>
+          <a:xfrm>
+            <a:off x="3663584" y="5371231"/>
+            <a:ext cx="180000" cy="108000"/>
+          </a:xfrm>
+          <a:prstGeom prst="rect">
+            <a:avLst/>
+          </a:prstGeom>
+          <a:solidFill>
+            <a:schemeClr val="tx1"/>
+          </a:solidFill>
+          <a:ln>
+            <a:noFill/>
+          </a:ln>
+        </p:spPr>
+        <p:style>
+          <a:lnRef idx="2">
+            <a:schemeClr val="accent1">
+              <a:shade val="15000"/>
+            </a:schemeClr>
+          </a:lnRef>
+          <a:fillRef idx="1">
+            <a:schemeClr val="accent1"/>
+          </a:fillRef>
+          <a:effectRef idx="0">
+            <a:schemeClr val="accent1"/>
+          </a:effectRef>
+          <a:fontRef idx="minor">
+            <a:schemeClr val="lt1"/>
+          </a:fontRef>
+        </p:style>
+        <p:txBody>
+          <a:bodyPr rtlCol="0" anchor="ctr"/>
+          <a:lstStyle/>
+          <a:p>
+            <a:pPr algn="ctr"/>
+            <a:endParaRPr lang="pt-BR"/>
+          </a:p>
+        </p:txBody>
+      </p:sp>
+      <p:sp>
+        <p:nvSpPr>
+          <p:cNvPr id="1140" name="Retângulo 1139">
+            <a:extLst>
+              <a:ext uri="{FF2B5EF4-FFF2-40B4-BE49-F238E27FC236}">
+                <a16:creationId xmlns:a16="http://schemas.microsoft.com/office/drawing/2014/main" id="{5B8AE0B6-4E09-C89F-873D-6DFF02BEB919}"/>
+              </a:ext>
+            </a:extLst>
+          </p:cNvPr>
+          <p:cNvSpPr/>
+          <p:nvPr/>
+        </p:nvSpPr>
+        <p:spPr>
+          <a:xfrm>
+            <a:off x="3663584" y="5631918"/>
+            <a:ext cx="180000" cy="108000"/>
+          </a:xfrm>
+          <a:prstGeom prst="rect">
+            <a:avLst/>
+          </a:prstGeom>
+          <a:solidFill>
+            <a:schemeClr val="tx1"/>
+          </a:solidFill>
+          <a:ln>
+            <a:noFill/>
+          </a:ln>
+        </p:spPr>
+        <p:style>
+          <a:lnRef idx="2">
+            <a:schemeClr val="accent1">
+              <a:shade val="15000"/>
+            </a:schemeClr>
+          </a:lnRef>
+          <a:fillRef idx="1">
+            <a:schemeClr val="accent1"/>
+          </a:fillRef>
+          <a:effectRef idx="0">
+            <a:schemeClr val="accent1"/>
+          </a:effectRef>
+          <a:fontRef idx="minor">
+            <a:schemeClr val="lt1"/>
+          </a:fontRef>
+        </p:style>
+        <p:txBody>
+          <a:bodyPr rtlCol="0" anchor="ctr"/>
+          <a:lstStyle/>
+          <a:p>
+            <a:pPr algn="ctr"/>
+            <a:endParaRPr lang="pt-BR"/>
+          </a:p>
+        </p:txBody>
+      </p:sp>
+      <p:sp>
+        <p:nvSpPr>
+          <p:cNvPr id="1141" name="Retângulo 1140">
+            <a:extLst>
+              <a:ext uri="{FF2B5EF4-FFF2-40B4-BE49-F238E27FC236}">
+                <a16:creationId xmlns:a16="http://schemas.microsoft.com/office/drawing/2014/main" id="{39C940DD-39B2-B1AF-899B-2DBC4BC0A9D7}"/>
+              </a:ext>
+            </a:extLst>
+          </p:cNvPr>
+          <p:cNvSpPr/>
+          <p:nvPr/>
+        </p:nvSpPr>
+        <p:spPr>
+          <a:xfrm>
+            <a:off x="3663584" y="5885598"/>
+            <a:ext cx="180000" cy="108000"/>
+          </a:xfrm>
+          <a:prstGeom prst="rect">
+            <a:avLst/>
+          </a:prstGeom>
+          <a:solidFill>
+            <a:schemeClr val="tx1"/>
+          </a:solidFill>
+          <a:ln>
+            <a:noFill/>
+          </a:ln>
+        </p:spPr>
+        <p:style>
+          <a:lnRef idx="2">
+            <a:schemeClr val="accent1">
+              <a:shade val="15000"/>
+            </a:schemeClr>
+          </a:lnRef>
+          <a:fillRef idx="1">
+            <a:schemeClr val="accent1"/>
+          </a:fillRef>
+          <a:effectRef idx="0">
+            <a:schemeClr val="accent1"/>
+          </a:effectRef>
+          <a:fontRef idx="minor">
+            <a:schemeClr val="lt1"/>
+          </a:fontRef>
+        </p:style>
+        <p:txBody>
+          <a:bodyPr rtlCol="0" anchor="ctr"/>
+          <a:lstStyle/>
+          <a:p>
+            <a:pPr algn="ctr"/>
+            <a:endParaRPr lang="pt-BR"/>
+          </a:p>
+        </p:txBody>
+      </p:sp>
+      <p:sp>
+        <p:nvSpPr>
+          <p:cNvPr id="1142" name="Retângulo 1141">
+            <a:extLst>
+              <a:ext uri="{FF2B5EF4-FFF2-40B4-BE49-F238E27FC236}">
+                <a16:creationId xmlns:a16="http://schemas.microsoft.com/office/drawing/2014/main" id="{FDF80AA2-2653-8914-74BA-7D9605CF1A8E}"/>
+              </a:ext>
+            </a:extLst>
+          </p:cNvPr>
+          <p:cNvSpPr/>
+          <p:nvPr/>
+        </p:nvSpPr>
+        <p:spPr>
+          <a:xfrm>
+            <a:off x="3663584" y="6139278"/>
+            <a:ext cx="180000" cy="108000"/>
+          </a:xfrm>
+          <a:prstGeom prst="rect">
+            <a:avLst/>
+          </a:prstGeom>
+          <a:solidFill>
+            <a:schemeClr val="tx1"/>
+          </a:solidFill>
+          <a:ln>
+            <a:noFill/>
+          </a:ln>
+        </p:spPr>
+        <p:style>
+          <a:lnRef idx="2">
+            <a:schemeClr val="accent1">
+              <a:shade val="15000"/>
+            </a:schemeClr>
+          </a:lnRef>
+          <a:fillRef idx="1">
+            <a:schemeClr val="accent1"/>
+          </a:fillRef>
+          <a:effectRef idx="0">
+            <a:schemeClr val="accent1"/>
+          </a:effectRef>
+          <a:fontRef idx="minor">
+            <a:schemeClr val="lt1"/>
+          </a:fontRef>
+        </p:style>
+        <p:txBody>
+          <a:bodyPr rtlCol="0" anchor="ctr"/>
+          <a:lstStyle/>
+          <a:p>
+            <a:pPr algn="ctr"/>
+            <a:endParaRPr lang="pt-BR"/>
+          </a:p>
+        </p:txBody>
+      </p:sp>
+      <p:sp>
+        <p:nvSpPr>
+          <p:cNvPr id="1143" name="Retângulo 1142">
+            <a:extLst>
+              <a:ext uri="{FF2B5EF4-FFF2-40B4-BE49-F238E27FC236}">
+                <a16:creationId xmlns:a16="http://schemas.microsoft.com/office/drawing/2014/main" id="{3D9FAC8E-77CE-BE86-FF0F-347444074E76}"/>
+              </a:ext>
+            </a:extLst>
+          </p:cNvPr>
+          <p:cNvSpPr/>
+          <p:nvPr/>
+        </p:nvSpPr>
+        <p:spPr>
+          <a:xfrm>
+            <a:off x="3663584" y="6392958"/>
+            <a:ext cx="180000" cy="108000"/>
+          </a:xfrm>
+          <a:prstGeom prst="rect">
+            <a:avLst/>
+          </a:prstGeom>
+          <a:solidFill>
+            <a:schemeClr val="tx1"/>
+          </a:solidFill>
+          <a:ln>
+            <a:noFill/>
+          </a:ln>
+        </p:spPr>
+        <p:style>
+          <a:lnRef idx="2">
+            <a:schemeClr val="accent1">
+              <a:shade val="15000"/>
+            </a:schemeClr>
+          </a:lnRef>
+          <a:fillRef idx="1">
+            <a:schemeClr val="accent1"/>
+          </a:fillRef>
+          <a:effectRef idx="0">
+            <a:schemeClr val="accent1"/>
+          </a:effectRef>
+          <a:fontRef idx="minor">
+            <a:schemeClr val="lt1"/>
+          </a:fontRef>
+        </p:style>
+        <p:txBody>
+          <a:bodyPr rtlCol="0" anchor="ctr"/>
+          <a:lstStyle/>
+          <a:p>
+            <a:pPr algn="ctr"/>
+            <a:endParaRPr lang="pt-BR"/>
+          </a:p>
+        </p:txBody>
+      </p:sp>
+      <p:sp>
+        <p:nvSpPr>
+          <p:cNvPr id="1144" name="Retângulo 1143">
+            <a:extLst>
+              <a:ext uri="{FF2B5EF4-FFF2-40B4-BE49-F238E27FC236}">
+                <a16:creationId xmlns:a16="http://schemas.microsoft.com/office/drawing/2014/main" id="{009E32CF-3F10-C421-AA51-CE0E08C7250F}"/>
+              </a:ext>
+            </a:extLst>
+          </p:cNvPr>
+          <p:cNvSpPr/>
+          <p:nvPr/>
+        </p:nvSpPr>
+        <p:spPr>
+          <a:xfrm>
+            <a:off x="3663584" y="6646638"/>
+            <a:ext cx="180000" cy="108000"/>
+          </a:xfrm>
+          <a:prstGeom prst="rect">
+            <a:avLst/>
+          </a:prstGeom>
+          <a:solidFill>
+            <a:schemeClr val="tx1"/>
+          </a:solidFill>
+          <a:ln>
+            <a:noFill/>
+          </a:ln>
+        </p:spPr>
+        <p:style>
+          <a:lnRef idx="2">
+            <a:schemeClr val="accent1">
+              <a:shade val="15000"/>
+            </a:schemeClr>
+          </a:lnRef>
+          <a:fillRef idx="1">
+            <a:schemeClr val="accent1"/>
+          </a:fillRef>
+          <a:effectRef idx="0">
+            <a:schemeClr val="accent1"/>
+          </a:effectRef>
+          <a:fontRef idx="minor">
+            <a:schemeClr val="lt1"/>
+          </a:fontRef>
+        </p:style>
+        <p:txBody>
+          <a:bodyPr rtlCol="0" anchor="ctr"/>
+          <a:lstStyle/>
+          <a:p>
+            <a:pPr algn="ctr"/>
+            <a:endParaRPr lang="pt-BR"/>
+          </a:p>
+        </p:txBody>
+      </p:sp>
+      <p:sp>
+        <p:nvSpPr>
+          <p:cNvPr id="1145" name="Retângulo 1144">
+            <a:extLst>
+              <a:ext uri="{FF2B5EF4-FFF2-40B4-BE49-F238E27FC236}">
+                <a16:creationId xmlns:a16="http://schemas.microsoft.com/office/drawing/2014/main" id="{8B69568C-C817-F6AC-0660-7592379D9900}"/>
+              </a:ext>
+            </a:extLst>
+          </p:cNvPr>
+          <p:cNvSpPr/>
+          <p:nvPr/>
+        </p:nvSpPr>
+        <p:spPr>
+          <a:xfrm>
+            <a:off x="3663584" y="6900318"/>
+            <a:ext cx="180000" cy="108000"/>
+          </a:xfrm>
+          <a:prstGeom prst="rect">
+            <a:avLst/>
+          </a:prstGeom>
+          <a:solidFill>
+            <a:schemeClr val="tx1"/>
+          </a:solidFill>
+          <a:ln>
+            <a:noFill/>
+          </a:ln>
+        </p:spPr>
+        <p:style>
+          <a:lnRef idx="2">
+            <a:schemeClr val="accent1">
+              <a:shade val="15000"/>
+            </a:schemeClr>
+          </a:lnRef>
+          <a:fillRef idx="1">
+            <a:schemeClr val="accent1"/>
+          </a:fillRef>
+          <a:effectRef idx="0">
+            <a:schemeClr val="accent1"/>
+          </a:effectRef>
+          <a:fontRef idx="minor">
+            <a:schemeClr val="lt1"/>
+          </a:fontRef>
+        </p:style>
+        <p:txBody>
+          <a:bodyPr rtlCol="0" anchor="ctr"/>
+          <a:lstStyle/>
+          <a:p>
+            <a:pPr algn="ctr"/>
+            <a:endParaRPr lang="pt-BR"/>
+          </a:p>
+        </p:txBody>
+      </p:sp>
+      <p:sp>
+        <p:nvSpPr>
+          <p:cNvPr id="1146" name="Retângulo 1145">
+            <a:extLst>
+              <a:ext uri="{FF2B5EF4-FFF2-40B4-BE49-F238E27FC236}">
+                <a16:creationId xmlns:a16="http://schemas.microsoft.com/office/drawing/2014/main" id="{9919230D-5772-3564-0995-6C6DC491EB1C}"/>
+              </a:ext>
+            </a:extLst>
+          </p:cNvPr>
+          <p:cNvSpPr/>
+          <p:nvPr/>
+        </p:nvSpPr>
+        <p:spPr>
+          <a:xfrm>
+            <a:off x="3663584" y="7648268"/>
+            <a:ext cx="180000" cy="108000"/>
+          </a:xfrm>
+          <a:prstGeom prst="rect">
+            <a:avLst/>
+          </a:prstGeom>
+          <a:solidFill>
+            <a:schemeClr val="tx1"/>
+          </a:solidFill>
+          <a:ln>
+            <a:noFill/>
+          </a:ln>
+        </p:spPr>
+        <p:style>
+          <a:lnRef idx="2">
+            <a:schemeClr val="accent1">
+              <a:shade val="15000"/>
+            </a:schemeClr>
+          </a:lnRef>
+          <a:fillRef idx="1">
+            <a:schemeClr val="accent1"/>
+          </a:fillRef>
+          <a:effectRef idx="0">
+            <a:schemeClr val="accent1"/>
+          </a:effectRef>
+          <a:fontRef idx="minor">
+            <a:schemeClr val="lt1"/>
+          </a:fontRef>
+        </p:style>
+        <p:txBody>
+          <a:bodyPr rtlCol="0" anchor="ctr"/>
+          <a:lstStyle/>
+          <a:p>
+            <a:pPr algn="ctr"/>
+            <a:endParaRPr lang="pt-BR"/>
+          </a:p>
+        </p:txBody>
+      </p:sp>
+      <p:grpSp>
+        <p:nvGrpSpPr>
+          <p:cNvPr id="1151" name="Agrupar 1150">
+            <a:extLst>
+              <a:ext uri="{FF2B5EF4-FFF2-40B4-BE49-F238E27FC236}">
+                <a16:creationId xmlns:a16="http://schemas.microsoft.com/office/drawing/2014/main" id="{44C2F0C8-50F8-2581-6CB6-BF07D0891C5D}"/>
+              </a:ext>
+            </a:extLst>
+          </p:cNvPr>
+          <p:cNvGrpSpPr/>
+          <p:nvPr/>
+        </p:nvGrpSpPr>
+        <p:grpSpPr>
+          <a:xfrm>
+            <a:off x="4012135" y="7011752"/>
+            <a:ext cx="4416114" cy="307777"/>
+            <a:chOff x="7289572" y="2889564"/>
+            <a:chExt cx="4416114" cy="307777"/>
+          </a:xfrm>
+        </p:grpSpPr>
+        <p:sp>
+          <p:nvSpPr>
+            <p:cNvPr id="1152" name="CaixaDeTexto 1151">
+              <a:extLst>
+                <a:ext uri="{FF2B5EF4-FFF2-40B4-BE49-F238E27FC236}">
+                  <a16:creationId xmlns:a16="http://schemas.microsoft.com/office/drawing/2014/main" id="{F4D8A60A-B007-296B-0DD5-12C42AEEBA6C}"/>
+                </a:ext>
+              </a:extLst>
+            </p:cNvPr>
+            <p:cNvSpPr txBox="1"/>
+            <p:nvPr/>
+          </p:nvSpPr>
+          <p:spPr>
+            <a:xfrm>
+              <a:off x="7289572" y="2889564"/>
+              <a:ext cx="494323" cy="307777"/>
+            </a:xfrm>
+            <a:prstGeom prst="rect">
+              <a:avLst/>
+            </a:prstGeom>
+            <a:noFill/>
+          </p:spPr>
+          <p:txBody>
+            <a:bodyPr wrap="square" rtlCol="0">
+              <a:spAutoFit/>
+            </a:bodyPr>
+            <a:lstStyle/>
+            <a:p>
+              <a:pPr algn="ctr"/>
+              <a:r>
+                <a:rPr lang="pt-BR" sz="1400" dirty="0">
+                  <a:solidFill>
+                    <a:srgbClr val="C00000"/>
+                  </a:solidFill>
+                  <a:latin typeface="Arial" panose="020B0604020202020204" pitchFamily="34" charset="0"/>
+                  <a:cs typeface="Arial" panose="020B0604020202020204" pitchFamily="34" charset="0"/>
+                </a:rPr>
+                <a:t>[61]</a:t>
+              </a:r>
+            </a:p>
+          </p:txBody>
+        </p:sp>
+        <p:sp>
+          <p:nvSpPr>
+            <p:cNvPr id="1153" name="CaixaDeTexto 1152">
+              <a:extLst>
+                <a:ext uri="{FF2B5EF4-FFF2-40B4-BE49-F238E27FC236}">
+                  <a16:creationId xmlns:a16="http://schemas.microsoft.com/office/drawing/2014/main" id="{EF9363DB-C071-D739-87B5-D80E16C4129A}"/>
+                </a:ext>
+              </a:extLst>
+            </p:cNvPr>
+            <p:cNvSpPr txBox="1"/>
+            <p:nvPr/>
+          </p:nvSpPr>
+          <p:spPr>
+            <a:xfrm>
+              <a:off x="7725327" y="2889564"/>
+              <a:ext cx="494323" cy="307777"/>
+            </a:xfrm>
+            <a:prstGeom prst="rect">
+              <a:avLst/>
+            </a:prstGeom>
+            <a:noFill/>
+          </p:spPr>
+          <p:txBody>
+            <a:bodyPr wrap="square" rtlCol="0">
+              <a:spAutoFit/>
+            </a:bodyPr>
+            <a:lstStyle/>
+            <a:p>
+              <a:pPr algn="ctr"/>
+              <a:r>
+                <a:rPr lang="pt-BR" sz="1400" dirty="0">
+                  <a:solidFill>
+                    <a:srgbClr val="C00000"/>
+                  </a:solidFill>
+                  <a:latin typeface="Arial" panose="020B0604020202020204" pitchFamily="34" charset="0"/>
+                  <a:cs typeface="Arial" panose="020B0604020202020204" pitchFamily="34" charset="0"/>
+                </a:rPr>
+                <a:t>[62]</a:t>
+              </a:r>
+            </a:p>
+          </p:txBody>
+        </p:sp>
+        <p:sp>
+          <p:nvSpPr>
+            <p:cNvPr id="1154" name="CaixaDeTexto 1153">
+              <a:extLst>
+                <a:ext uri="{FF2B5EF4-FFF2-40B4-BE49-F238E27FC236}">
+                  <a16:creationId xmlns:a16="http://schemas.microsoft.com/office/drawing/2014/main" id="{674FC67B-0985-F91B-AD28-DA376C1312DC}"/>
+                </a:ext>
+              </a:extLst>
+            </p:cNvPr>
+            <p:cNvSpPr txBox="1"/>
+            <p:nvPr/>
+          </p:nvSpPr>
+          <p:spPr>
+            <a:xfrm>
+              <a:off x="8161082" y="2889564"/>
+              <a:ext cx="494323" cy="307777"/>
+            </a:xfrm>
+            <a:prstGeom prst="rect">
+              <a:avLst/>
+            </a:prstGeom>
+            <a:noFill/>
+          </p:spPr>
+          <p:txBody>
+            <a:bodyPr wrap="square" rtlCol="0">
+              <a:spAutoFit/>
+            </a:bodyPr>
+            <a:lstStyle/>
+            <a:p>
+              <a:pPr algn="ctr"/>
+              <a:r>
+                <a:rPr lang="pt-BR" sz="1400" dirty="0">
+                  <a:solidFill>
+                    <a:srgbClr val="C00000"/>
+                  </a:solidFill>
+                  <a:latin typeface="Arial" panose="020B0604020202020204" pitchFamily="34" charset="0"/>
+                  <a:cs typeface="Arial" panose="020B0604020202020204" pitchFamily="34" charset="0"/>
+                </a:rPr>
+                <a:t>[63]</a:t>
+              </a:r>
+            </a:p>
+          </p:txBody>
+        </p:sp>
+        <p:sp>
+          <p:nvSpPr>
+            <p:cNvPr id="1155" name="CaixaDeTexto 1154">
+              <a:extLst>
+                <a:ext uri="{FF2B5EF4-FFF2-40B4-BE49-F238E27FC236}">
+                  <a16:creationId xmlns:a16="http://schemas.microsoft.com/office/drawing/2014/main" id="{1D460F23-76E3-05C4-A160-F3388E98D6B8}"/>
+                </a:ext>
+              </a:extLst>
+            </p:cNvPr>
+            <p:cNvSpPr txBox="1"/>
+            <p:nvPr/>
+          </p:nvSpPr>
+          <p:spPr>
+            <a:xfrm>
+              <a:off x="8596837" y="2889564"/>
+              <a:ext cx="494323" cy="307777"/>
+            </a:xfrm>
+            <a:prstGeom prst="rect">
+              <a:avLst/>
+            </a:prstGeom>
+            <a:noFill/>
+          </p:spPr>
+          <p:txBody>
+            <a:bodyPr wrap="square" rtlCol="0">
+              <a:spAutoFit/>
+            </a:bodyPr>
+            <a:lstStyle/>
+            <a:p>
+              <a:pPr algn="ctr"/>
+              <a:r>
+                <a:rPr lang="pt-BR" sz="1400" dirty="0">
+                  <a:solidFill>
+                    <a:srgbClr val="C00000"/>
+                  </a:solidFill>
+                  <a:latin typeface="Arial" panose="020B0604020202020204" pitchFamily="34" charset="0"/>
+                  <a:cs typeface="Arial" panose="020B0604020202020204" pitchFamily="34" charset="0"/>
+                </a:rPr>
+                <a:t>[64]</a:t>
+              </a:r>
+            </a:p>
+          </p:txBody>
+        </p:sp>
+        <p:sp>
+          <p:nvSpPr>
+            <p:cNvPr id="1156" name="CaixaDeTexto 1155">
+              <a:extLst>
+                <a:ext uri="{FF2B5EF4-FFF2-40B4-BE49-F238E27FC236}">
+                  <a16:creationId xmlns:a16="http://schemas.microsoft.com/office/drawing/2014/main" id="{4A5AAA3F-E2E0-5C5E-5883-93C86D9B0525}"/>
+                </a:ext>
+              </a:extLst>
+            </p:cNvPr>
+            <p:cNvSpPr txBox="1"/>
+            <p:nvPr/>
+          </p:nvSpPr>
+          <p:spPr>
+            <a:xfrm>
+              <a:off x="9032592" y="2889564"/>
+              <a:ext cx="494323" cy="307777"/>
+            </a:xfrm>
+            <a:prstGeom prst="rect">
+              <a:avLst/>
+            </a:prstGeom>
+            <a:noFill/>
+          </p:spPr>
+          <p:txBody>
+            <a:bodyPr wrap="square" rtlCol="0">
+              <a:spAutoFit/>
+            </a:bodyPr>
+            <a:lstStyle/>
+            <a:p>
+              <a:pPr algn="ctr"/>
+              <a:r>
+                <a:rPr lang="pt-BR" sz="1400" dirty="0">
+                  <a:solidFill>
+                    <a:srgbClr val="C00000"/>
+                  </a:solidFill>
+                  <a:latin typeface="Arial" panose="020B0604020202020204" pitchFamily="34" charset="0"/>
+                  <a:cs typeface="Arial" panose="020B0604020202020204" pitchFamily="34" charset="0"/>
+                </a:rPr>
+                <a:t>[65]</a:t>
+              </a:r>
+            </a:p>
+          </p:txBody>
+        </p:sp>
+        <p:sp>
+          <p:nvSpPr>
+            <p:cNvPr id="1157" name="CaixaDeTexto 1156">
+              <a:extLst>
+                <a:ext uri="{FF2B5EF4-FFF2-40B4-BE49-F238E27FC236}">
+                  <a16:creationId xmlns:a16="http://schemas.microsoft.com/office/drawing/2014/main" id="{D038D9DE-9E95-707B-9432-1789CB883FDF}"/>
+                </a:ext>
+              </a:extLst>
+            </p:cNvPr>
+            <p:cNvSpPr txBox="1"/>
+            <p:nvPr/>
+          </p:nvSpPr>
+          <p:spPr>
+            <a:xfrm>
+              <a:off x="9468347" y="2889564"/>
+              <a:ext cx="494323" cy="307777"/>
+            </a:xfrm>
+            <a:prstGeom prst="rect">
+              <a:avLst/>
+            </a:prstGeom>
+            <a:noFill/>
+          </p:spPr>
+          <p:txBody>
+            <a:bodyPr wrap="square" rtlCol="0">
+              <a:spAutoFit/>
+            </a:bodyPr>
+            <a:lstStyle/>
+            <a:p>
+              <a:pPr algn="ctr"/>
+              <a:r>
+                <a:rPr lang="pt-BR" sz="1400" dirty="0">
+                  <a:solidFill>
+                    <a:srgbClr val="C00000"/>
+                  </a:solidFill>
+                  <a:latin typeface="Arial" panose="020B0604020202020204" pitchFamily="34" charset="0"/>
+                  <a:cs typeface="Arial" panose="020B0604020202020204" pitchFamily="34" charset="0"/>
+                </a:rPr>
+                <a:t>[66]</a:t>
+              </a:r>
+            </a:p>
+          </p:txBody>
+        </p:sp>
+        <p:sp>
+          <p:nvSpPr>
+            <p:cNvPr id="1158" name="CaixaDeTexto 1157">
+              <a:extLst>
+                <a:ext uri="{FF2B5EF4-FFF2-40B4-BE49-F238E27FC236}">
+                  <a16:creationId xmlns:a16="http://schemas.microsoft.com/office/drawing/2014/main" id="{3C050EAD-E2FF-3925-77F4-C00C0E34F2BC}"/>
+                </a:ext>
+              </a:extLst>
+            </p:cNvPr>
+            <p:cNvSpPr txBox="1"/>
+            <p:nvPr/>
+          </p:nvSpPr>
+          <p:spPr>
+            <a:xfrm>
+              <a:off x="9904102" y="2889564"/>
+              <a:ext cx="494323" cy="307777"/>
+            </a:xfrm>
+            <a:prstGeom prst="rect">
+              <a:avLst/>
+            </a:prstGeom>
+            <a:noFill/>
+          </p:spPr>
+          <p:txBody>
+            <a:bodyPr wrap="square" rtlCol="0">
+              <a:spAutoFit/>
+            </a:bodyPr>
+            <a:lstStyle/>
+            <a:p>
+              <a:pPr algn="ctr"/>
+              <a:r>
+                <a:rPr lang="pt-BR" sz="1400" dirty="0">
+                  <a:solidFill>
+                    <a:srgbClr val="C00000"/>
+                  </a:solidFill>
+                  <a:latin typeface="Arial" panose="020B0604020202020204" pitchFamily="34" charset="0"/>
+                  <a:cs typeface="Arial" panose="020B0604020202020204" pitchFamily="34" charset="0"/>
+                </a:rPr>
+                <a:t>[67]</a:t>
+              </a:r>
+            </a:p>
+          </p:txBody>
+        </p:sp>
+        <p:sp>
+          <p:nvSpPr>
+            <p:cNvPr id="1180" name="CaixaDeTexto 1179">
+              <a:extLst>
+                <a:ext uri="{FF2B5EF4-FFF2-40B4-BE49-F238E27FC236}">
+                  <a16:creationId xmlns:a16="http://schemas.microsoft.com/office/drawing/2014/main" id="{586392D4-6629-DE3A-C695-CAA47C45144A}"/>
+                </a:ext>
+              </a:extLst>
+            </p:cNvPr>
+            <p:cNvSpPr txBox="1"/>
+            <p:nvPr/>
+          </p:nvSpPr>
+          <p:spPr>
+            <a:xfrm>
+              <a:off x="10339857" y="2889564"/>
+              <a:ext cx="494323" cy="307777"/>
+            </a:xfrm>
+            <a:prstGeom prst="rect">
+              <a:avLst/>
+            </a:prstGeom>
+            <a:noFill/>
+          </p:spPr>
+          <p:txBody>
+            <a:bodyPr wrap="square" rtlCol="0">
+              <a:spAutoFit/>
+            </a:bodyPr>
+            <a:lstStyle/>
+            <a:p>
+              <a:pPr algn="ctr"/>
+              <a:r>
+                <a:rPr lang="pt-BR" sz="1400" dirty="0">
+                  <a:solidFill>
+                    <a:srgbClr val="C00000"/>
+                  </a:solidFill>
+                  <a:latin typeface="Arial" panose="020B0604020202020204" pitchFamily="34" charset="0"/>
+                  <a:cs typeface="Arial" panose="020B0604020202020204" pitchFamily="34" charset="0"/>
+                </a:rPr>
+                <a:t>[68]</a:t>
+              </a:r>
+            </a:p>
+          </p:txBody>
+        </p:sp>
+        <p:sp>
+          <p:nvSpPr>
+            <p:cNvPr id="1181" name="CaixaDeTexto 1180">
+              <a:extLst>
+                <a:ext uri="{FF2B5EF4-FFF2-40B4-BE49-F238E27FC236}">
+                  <a16:creationId xmlns:a16="http://schemas.microsoft.com/office/drawing/2014/main" id="{72A7606C-4E55-4DAB-B648-1CA0E0486CA2}"/>
+                </a:ext>
+              </a:extLst>
+            </p:cNvPr>
+            <p:cNvSpPr txBox="1"/>
+            <p:nvPr/>
+          </p:nvSpPr>
+          <p:spPr>
+            <a:xfrm>
+              <a:off x="10775612" y="2889564"/>
+              <a:ext cx="494323" cy="307777"/>
+            </a:xfrm>
+            <a:prstGeom prst="rect">
+              <a:avLst/>
+            </a:prstGeom>
+            <a:noFill/>
+          </p:spPr>
+          <p:txBody>
+            <a:bodyPr wrap="square" rtlCol="0">
+              <a:spAutoFit/>
+            </a:bodyPr>
+            <a:lstStyle/>
+            <a:p>
+              <a:pPr algn="ctr"/>
+              <a:r>
+                <a:rPr lang="pt-BR" sz="1400" dirty="0">
+                  <a:solidFill>
+                    <a:srgbClr val="C00000"/>
+                  </a:solidFill>
+                  <a:latin typeface="Arial" panose="020B0604020202020204" pitchFamily="34" charset="0"/>
+                  <a:cs typeface="Arial" panose="020B0604020202020204" pitchFamily="34" charset="0"/>
+                </a:rPr>
+                <a:t>[69]</a:t>
+              </a:r>
+            </a:p>
+          </p:txBody>
+        </p:sp>
+        <p:sp>
+          <p:nvSpPr>
+            <p:cNvPr id="1182" name="CaixaDeTexto 1181">
+              <a:extLst>
+                <a:ext uri="{FF2B5EF4-FFF2-40B4-BE49-F238E27FC236}">
+                  <a16:creationId xmlns:a16="http://schemas.microsoft.com/office/drawing/2014/main" id="{73B0FD83-D723-1085-45C0-62BA42B111E6}"/>
+                </a:ext>
+              </a:extLst>
+            </p:cNvPr>
+            <p:cNvSpPr txBox="1"/>
+            <p:nvPr/>
+          </p:nvSpPr>
+          <p:spPr>
+            <a:xfrm>
+              <a:off x="11211363" y="2889564"/>
+              <a:ext cx="494323" cy="307777"/>
+            </a:xfrm>
+            <a:prstGeom prst="rect">
+              <a:avLst/>
+            </a:prstGeom>
+            <a:noFill/>
+          </p:spPr>
+          <p:txBody>
+            <a:bodyPr wrap="square" rtlCol="0">
+              <a:spAutoFit/>
+            </a:bodyPr>
+            <a:lstStyle/>
+            <a:p>
+              <a:pPr algn="ctr"/>
+              <a:r>
+                <a:rPr lang="pt-BR" sz="1400" dirty="0">
+                  <a:solidFill>
+                    <a:srgbClr val="C00000"/>
+                  </a:solidFill>
+                  <a:latin typeface="Arial" panose="020B0604020202020204" pitchFamily="34" charset="0"/>
+                  <a:cs typeface="Arial" panose="020B0604020202020204" pitchFamily="34" charset="0"/>
+                </a:rPr>
+                <a:t>[70]</a:t>
+              </a:r>
+            </a:p>
+          </p:txBody>
+        </p:sp>
+      </p:grpSp>
+      <p:sp>
+        <p:nvSpPr>
+          <p:cNvPr id="1183" name="Retângulo 1182">
+            <a:extLst>
+              <a:ext uri="{FF2B5EF4-FFF2-40B4-BE49-F238E27FC236}">
+                <a16:creationId xmlns:a16="http://schemas.microsoft.com/office/drawing/2014/main" id="{D3826F04-C070-A475-38C3-EC96286D999A}"/>
+              </a:ext>
+            </a:extLst>
+          </p:cNvPr>
+          <p:cNvSpPr/>
+          <p:nvPr/>
+        </p:nvSpPr>
+        <p:spPr>
+          <a:xfrm>
+            <a:off x="3663229" y="7146639"/>
+            <a:ext cx="180000" cy="108000"/>
+          </a:xfrm>
+          <a:prstGeom prst="rect">
+            <a:avLst/>
+          </a:prstGeom>
+          <a:solidFill>
+            <a:schemeClr val="tx1"/>
+          </a:solidFill>
+          <a:ln>
+            <a:noFill/>
+          </a:ln>
+        </p:spPr>
+        <p:style>
+          <a:lnRef idx="2">
+            <a:schemeClr val="accent1">
+              <a:shade val="15000"/>
+            </a:schemeClr>
+          </a:lnRef>
+          <a:fillRef idx="1">
+            <a:schemeClr val="accent1"/>
+          </a:fillRef>
+          <a:effectRef idx="0">
+            <a:schemeClr val="accent1"/>
+          </a:effectRef>
+          <a:fontRef idx="minor">
+            <a:schemeClr val="lt1"/>
+          </a:fontRef>
+        </p:style>
+        <p:txBody>
+          <a:bodyPr rtlCol="0" anchor="ctr"/>
+          <a:lstStyle/>
+          <a:p>
+            <a:pPr algn="ctr"/>
+            <a:endParaRPr lang="pt-BR"/>
+          </a:p>
+        </p:txBody>
+      </p:sp>
+      <p:grpSp>
+        <p:nvGrpSpPr>
+          <p:cNvPr id="1184" name="Agrupar 1183">
+            <a:extLst>
+              <a:ext uri="{FF2B5EF4-FFF2-40B4-BE49-F238E27FC236}">
+                <a16:creationId xmlns:a16="http://schemas.microsoft.com/office/drawing/2014/main" id="{BEBEF301-8FFF-4013-36EC-D01FB643D083}"/>
+              </a:ext>
+            </a:extLst>
+          </p:cNvPr>
+          <p:cNvGrpSpPr/>
+          <p:nvPr/>
+        </p:nvGrpSpPr>
+        <p:grpSpPr>
+          <a:xfrm>
+            <a:off x="4012135" y="7264663"/>
+            <a:ext cx="4416114" cy="307777"/>
+            <a:chOff x="7289572" y="2889564"/>
+            <a:chExt cx="4416114" cy="307777"/>
+          </a:xfrm>
+        </p:grpSpPr>
+        <p:sp>
+          <p:nvSpPr>
+            <p:cNvPr id="1185" name="CaixaDeTexto 1184">
+              <a:extLst>
+                <a:ext uri="{FF2B5EF4-FFF2-40B4-BE49-F238E27FC236}">
+                  <a16:creationId xmlns:a16="http://schemas.microsoft.com/office/drawing/2014/main" id="{5C7B1EFC-9494-FCF6-10B6-EB14267CFE8A}"/>
+                </a:ext>
+              </a:extLst>
+            </p:cNvPr>
+            <p:cNvSpPr txBox="1"/>
+            <p:nvPr/>
+          </p:nvSpPr>
+          <p:spPr>
+            <a:xfrm>
+              <a:off x="7289572" y="2889564"/>
+              <a:ext cx="494323" cy="307777"/>
+            </a:xfrm>
+            <a:prstGeom prst="rect">
+              <a:avLst/>
+            </a:prstGeom>
+            <a:noFill/>
+          </p:spPr>
+          <p:txBody>
+            <a:bodyPr wrap="square" rtlCol="0">
+              <a:spAutoFit/>
+            </a:bodyPr>
+            <a:lstStyle/>
+            <a:p>
+              <a:pPr algn="ctr"/>
+              <a:r>
+                <a:rPr lang="pt-BR" sz="1400" dirty="0">
+                  <a:solidFill>
+                    <a:srgbClr val="C00000"/>
+                  </a:solidFill>
+                  <a:latin typeface="Arial" panose="020B0604020202020204" pitchFamily="34" charset="0"/>
+                  <a:cs typeface="Arial" panose="020B0604020202020204" pitchFamily="34" charset="0"/>
+                </a:rPr>
+                <a:t>[71]</a:t>
+              </a:r>
+            </a:p>
+          </p:txBody>
+        </p:sp>
+        <p:sp>
+          <p:nvSpPr>
+            <p:cNvPr id="1186" name="CaixaDeTexto 1185">
+              <a:extLst>
+                <a:ext uri="{FF2B5EF4-FFF2-40B4-BE49-F238E27FC236}">
+                  <a16:creationId xmlns:a16="http://schemas.microsoft.com/office/drawing/2014/main" id="{8499F0C2-C5F1-BC51-037D-6872203423AA}"/>
+                </a:ext>
+              </a:extLst>
+            </p:cNvPr>
+            <p:cNvSpPr txBox="1"/>
+            <p:nvPr/>
+          </p:nvSpPr>
+          <p:spPr>
+            <a:xfrm>
+              <a:off x="7725327" y="2889564"/>
+              <a:ext cx="494323" cy="307777"/>
+            </a:xfrm>
+            <a:prstGeom prst="rect">
+              <a:avLst/>
+            </a:prstGeom>
+            <a:noFill/>
+          </p:spPr>
+          <p:txBody>
+            <a:bodyPr wrap="square" rtlCol="0">
+              <a:spAutoFit/>
+            </a:bodyPr>
+            <a:lstStyle/>
+            <a:p>
+              <a:pPr algn="ctr"/>
+              <a:r>
+                <a:rPr lang="pt-BR" sz="1400" dirty="0">
+                  <a:solidFill>
+                    <a:srgbClr val="C00000"/>
+                  </a:solidFill>
+                  <a:latin typeface="Arial" panose="020B0604020202020204" pitchFamily="34" charset="0"/>
+                  <a:cs typeface="Arial" panose="020B0604020202020204" pitchFamily="34" charset="0"/>
+                </a:rPr>
+                <a:t>[72]</a:t>
+              </a:r>
+            </a:p>
+          </p:txBody>
+        </p:sp>
+        <p:sp>
+          <p:nvSpPr>
+            <p:cNvPr id="1187" name="CaixaDeTexto 1186">
+              <a:extLst>
+                <a:ext uri="{FF2B5EF4-FFF2-40B4-BE49-F238E27FC236}">
+                  <a16:creationId xmlns:a16="http://schemas.microsoft.com/office/drawing/2014/main" id="{55542317-22BA-9132-2FE9-79F4807BA01B}"/>
+                </a:ext>
+              </a:extLst>
+            </p:cNvPr>
+            <p:cNvSpPr txBox="1"/>
+            <p:nvPr/>
+          </p:nvSpPr>
+          <p:spPr>
+            <a:xfrm>
+              <a:off x="8161082" y="2889564"/>
+              <a:ext cx="494323" cy="307777"/>
+            </a:xfrm>
+            <a:prstGeom prst="rect">
+              <a:avLst/>
+            </a:prstGeom>
+            <a:noFill/>
+          </p:spPr>
+          <p:txBody>
+            <a:bodyPr wrap="square" rtlCol="0">
+              <a:spAutoFit/>
+            </a:bodyPr>
+            <a:lstStyle/>
+            <a:p>
+              <a:pPr algn="ctr"/>
+              <a:r>
+                <a:rPr lang="pt-BR" sz="1400" dirty="0">
+                  <a:solidFill>
+                    <a:srgbClr val="C00000"/>
+                  </a:solidFill>
+                  <a:latin typeface="Arial" panose="020B0604020202020204" pitchFamily="34" charset="0"/>
+                  <a:cs typeface="Arial" panose="020B0604020202020204" pitchFamily="34" charset="0"/>
+                </a:rPr>
+                <a:t>[73]</a:t>
+              </a:r>
+            </a:p>
+          </p:txBody>
+        </p:sp>
+        <p:sp>
+          <p:nvSpPr>
+            <p:cNvPr id="1188" name="CaixaDeTexto 1187">
+              <a:extLst>
+                <a:ext uri="{FF2B5EF4-FFF2-40B4-BE49-F238E27FC236}">
+                  <a16:creationId xmlns:a16="http://schemas.microsoft.com/office/drawing/2014/main" id="{FFFE7360-6020-5034-EB1A-5403D62BC7DD}"/>
+                </a:ext>
+              </a:extLst>
+            </p:cNvPr>
+            <p:cNvSpPr txBox="1"/>
+            <p:nvPr/>
+          </p:nvSpPr>
+          <p:spPr>
+            <a:xfrm>
+              <a:off x="8596837" y="2889564"/>
+              <a:ext cx="494323" cy="307777"/>
+            </a:xfrm>
+            <a:prstGeom prst="rect">
+              <a:avLst/>
+            </a:prstGeom>
+            <a:noFill/>
+          </p:spPr>
+          <p:txBody>
+            <a:bodyPr wrap="square" rtlCol="0">
+              <a:spAutoFit/>
+            </a:bodyPr>
+            <a:lstStyle/>
+            <a:p>
+              <a:pPr algn="ctr"/>
+              <a:r>
+                <a:rPr lang="pt-BR" sz="1400" dirty="0">
+                  <a:solidFill>
+                    <a:srgbClr val="C00000"/>
+                  </a:solidFill>
+                  <a:latin typeface="Arial" panose="020B0604020202020204" pitchFamily="34" charset="0"/>
+                  <a:cs typeface="Arial" panose="020B0604020202020204" pitchFamily="34" charset="0"/>
+                </a:rPr>
+                <a:t>[74]</a:t>
+              </a:r>
+            </a:p>
+          </p:txBody>
+        </p:sp>
+        <p:sp>
+          <p:nvSpPr>
+            <p:cNvPr id="1189" name="CaixaDeTexto 1188">
+              <a:extLst>
+                <a:ext uri="{FF2B5EF4-FFF2-40B4-BE49-F238E27FC236}">
+                  <a16:creationId xmlns:a16="http://schemas.microsoft.com/office/drawing/2014/main" id="{F92005A3-ECB0-CE68-D951-FBAEC21A7284}"/>
+                </a:ext>
+              </a:extLst>
+            </p:cNvPr>
+            <p:cNvSpPr txBox="1"/>
+            <p:nvPr/>
+          </p:nvSpPr>
+          <p:spPr>
+            <a:xfrm>
+              <a:off x="9032592" y="2889564"/>
+              <a:ext cx="494323" cy="307777"/>
+            </a:xfrm>
+            <a:prstGeom prst="rect">
+              <a:avLst/>
+            </a:prstGeom>
+            <a:noFill/>
+          </p:spPr>
+          <p:txBody>
+            <a:bodyPr wrap="square" rtlCol="0">
+              <a:spAutoFit/>
+            </a:bodyPr>
+            <a:lstStyle/>
+            <a:p>
+              <a:pPr algn="ctr"/>
+              <a:r>
+                <a:rPr lang="pt-BR" sz="1400" dirty="0">
+                  <a:solidFill>
+                    <a:srgbClr val="C00000"/>
+                  </a:solidFill>
+                  <a:latin typeface="Arial" panose="020B0604020202020204" pitchFamily="34" charset="0"/>
+                  <a:cs typeface="Arial" panose="020B0604020202020204" pitchFamily="34" charset="0"/>
+                </a:rPr>
+                <a:t>[75]</a:t>
+              </a:r>
+            </a:p>
+          </p:txBody>
+        </p:sp>
+        <p:sp>
+          <p:nvSpPr>
+            <p:cNvPr id="1190" name="CaixaDeTexto 1189">
+              <a:extLst>
+                <a:ext uri="{FF2B5EF4-FFF2-40B4-BE49-F238E27FC236}">
+                  <a16:creationId xmlns:a16="http://schemas.microsoft.com/office/drawing/2014/main" id="{5668DF34-ABFF-3A23-9B24-7F281961A724}"/>
+                </a:ext>
+              </a:extLst>
+            </p:cNvPr>
+            <p:cNvSpPr txBox="1"/>
+            <p:nvPr/>
+          </p:nvSpPr>
+          <p:spPr>
+            <a:xfrm>
+              <a:off x="9468347" y="2889564"/>
+              <a:ext cx="494323" cy="307777"/>
+            </a:xfrm>
+            <a:prstGeom prst="rect">
+              <a:avLst/>
+            </a:prstGeom>
+            <a:noFill/>
+          </p:spPr>
+          <p:txBody>
+            <a:bodyPr wrap="square" rtlCol="0">
+              <a:spAutoFit/>
+            </a:bodyPr>
+            <a:lstStyle/>
+            <a:p>
+              <a:pPr algn="ctr"/>
+              <a:r>
+                <a:rPr lang="pt-BR" sz="1400" dirty="0">
+                  <a:solidFill>
+                    <a:srgbClr val="C00000"/>
+                  </a:solidFill>
+                  <a:latin typeface="Arial" panose="020B0604020202020204" pitchFamily="34" charset="0"/>
+                  <a:cs typeface="Arial" panose="020B0604020202020204" pitchFamily="34" charset="0"/>
+                </a:rPr>
+                <a:t>[76]</a:t>
+              </a:r>
+            </a:p>
+          </p:txBody>
+        </p:sp>
+        <p:sp>
+          <p:nvSpPr>
+            <p:cNvPr id="1191" name="CaixaDeTexto 1190">
+              <a:extLst>
+                <a:ext uri="{FF2B5EF4-FFF2-40B4-BE49-F238E27FC236}">
+                  <a16:creationId xmlns:a16="http://schemas.microsoft.com/office/drawing/2014/main" id="{6615C1A7-7CED-4903-2830-5A4C418EF4D8}"/>
+                </a:ext>
+              </a:extLst>
+            </p:cNvPr>
+            <p:cNvSpPr txBox="1"/>
+            <p:nvPr/>
+          </p:nvSpPr>
+          <p:spPr>
+            <a:xfrm>
+              <a:off x="9904102" y="2889564"/>
+              <a:ext cx="494323" cy="307777"/>
+            </a:xfrm>
+            <a:prstGeom prst="rect">
+              <a:avLst/>
+            </a:prstGeom>
+            <a:noFill/>
+          </p:spPr>
+          <p:txBody>
+            <a:bodyPr wrap="square" rtlCol="0">
+              <a:spAutoFit/>
+            </a:bodyPr>
+            <a:lstStyle/>
+            <a:p>
+              <a:pPr algn="ctr"/>
+              <a:r>
+                <a:rPr lang="pt-BR" sz="1400" dirty="0">
+                  <a:solidFill>
+                    <a:srgbClr val="C00000"/>
+                  </a:solidFill>
+                  <a:latin typeface="Arial" panose="020B0604020202020204" pitchFamily="34" charset="0"/>
+                  <a:cs typeface="Arial" panose="020B0604020202020204" pitchFamily="34" charset="0"/>
+                </a:rPr>
+                <a:t>[77]</a:t>
+              </a:r>
+            </a:p>
+          </p:txBody>
+        </p:sp>
+        <p:sp>
+          <p:nvSpPr>
+            <p:cNvPr id="1192" name="CaixaDeTexto 1191">
+              <a:extLst>
+                <a:ext uri="{FF2B5EF4-FFF2-40B4-BE49-F238E27FC236}">
+                  <a16:creationId xmlns:a16="http://schemas.microsoft.com/office/drawing/2014/main" id="{486DB03F-0910-B9DD-1903-F07E02CBCC2C}"/>
+                </a:ext>
+              </a:extLst>
+            </p:cNvPr>
+            <p:cNvSpPr txBox="1"/>
+            <p:nvPr/>
+          </p:nvSpPr>
+          <p:spPr>
+            <a:xfrm>
+              <a:off x="10339857" y="2889564"/>
+              <a:ext cx="494323" cy="307777"/>
+            </a:xfrm>
+            <a:prstGeom prst="rect">
+              <a:avLst/>
+            </a:prstGeom>
+            <a:noFill/>
+          </p:spPr>
+          <p:txBody>
+            <a:bodyPr wrap="square" rtlCol="0">
+              <a:spAutoFit/>
+            </a:bodyPr>
+            <a:lstStyle/>
+            <a:p>
+              <a:pPr algn="ctr"/>
+              <a:r>
+                <a:rPr lang="pt-BR" sz="1400" dirty="0">
+                  <a:solidFill>
+                    <a:srgbClr val="C00000"/>
+                  </a:solidFill>
+                  <a:latin typeface="Arial" panose="020B0604020202020204" pitchFamily="34" charset="0"/>
+                  <a:cs typeface="Arial" panose="020B0604020202020204" pitchFamily="34" charset="0"/>
+                </a:rPr>
+                <a:t>[78]</a:t>
+              </a:r>
+            </a:p>
+          </p:txBody>
+        </p:sp>
+        <p:sp>
+          <p:nvSpPr>
+            <p:cNvPr id="1193" name="CaixaDeTexto 1192">
+              <a:extLst>
+                <a:ext uri="{FF2B5EF4-FFF2-40B4-BE49-F238E27FC236}">
+                  <a16:creationId xmlns:a16="http://schemas.microsoft.com/office/drawing/2014/main" id="{974F59B7-61DA-1B23-C784-670EDC2BE81D}"/>
+                </a:ext>
+              </a:extLst>
+            </p:cNvPr>
+            <p:cNvSpPr txBox="1"/>
+            <p:nvPr/>
+          </p:nvSpPr>
+          <p:spPr>
+            <a:xfrm>
+              <a:off x="10775612" y="2889564"/>
+              <a:ext cx="494323" cy="307777"/>
+            </a:xfrm>
+            <a:prstGeom prst="rect">
+              <a:avLst/>
+            </a:prstGeom>
+            <a:noFill/>
+          </p:spPr>
+          <p:txBody>
+            <a:bodyPr wrap="square" rtlCol="0">
+              <a:spAutoFit/>
+            </a:bodyPr>
+            <a:lstStyle/>
+            <a:p>
+              <a:pPr algn="ctr"/>
+              <a:r>
+                <a:rPr lang="pt-BR" sz="1400" dirty="0">
+                  <a:solidFill>
+                    <a:srgbClr val="C00000"/>
+                  </a:solidFill>
+                  <a:latin typeface="Arial" panose="020B0604020202020204" pitchFamily="34" charset="0"/>
+                  <a:cs typeface="Arial" panose="020B0604020202020204" pitchFamily="34" charset="0"/>
+                </a:rPr>
+                <a:t>[79]</a:t>
+              </a:r>
+            </a:p>
+          </p:txBody>
+        </p:sp>
+        <p:sp>
+          <p:nvSpPr>
+            <p:cNvPr id="1194" name="CaixaDeTexto 1193">
+              <a:extLst>
+                <a:ext uri="{FF2B5EF4-FFF2-40B4-BE49-F238E27FC236}">
+                  <a16:creationId xmlns:a16="http://schemas.microsoft.com/office/drawing/2014/main" id="{4C6D0D3F-47CD-95AF-91B8-6A0D94603D08}"/>
+                </a:ext>
+              </a:extLst>
+            </p:cNvPr>
+            <p:cNvSpPr txBox="1"/>
+            <p:nvPr/>
+          </p:nvSpPr>
+          <p:spPr>
+            <a:xfrm>
+              <a:off x="11211363" y="2889564"/>
+              <a:ext cx="494323" cy="307777"/>
+            </a:xfrm>
+            <a:prstGeom prst="rect">
+              <a:avLst/>
+            </a:prstGeom>
+            <a:noFill/>
+          </p:spPr>
+          <p:txBody>
+            <a:bodyPr wrap="square" rtlCol="0">
+              <a:spAutoFit/>
+            </a:bodyPr>
+            <a:lstStyle/>
+            <a:p>
+              <a:pPr algn="ctr"/>
+              <a:r>
+                <a:rPr lang="pt-BR" sz="1400" dirty="0">
+                  <a:solidFill>
+                    <a:srgbClr val="C00000"/>
+                  </a:solidFill>
+                  <a:latin typeface="Arial" panose="020B0604020202020204" pitchFamily="34" charset="0"/>
+                  <a:cs typeface="Arial" panose="020B0604020202020204" pitchFamily="34" charset="0"/>
+                </a:rPr>
+                <a:t>[80]</a:t>
+              </a:r>
+            </a:p>
+          </p:txBody>
+        </p:sp>
+      </p:grpSp>
+      <p:sp>
+        <p:nvSpPr>
+          <p:cNvPr id="1195" name="Retângulo 1194">
+            <a:extLst>
+              <a:ext uri="{FF2B5EF4-FFF2-40B4-BE49-F238E27FC236}">
+                <a16:creationId xmlns:a16="http://schemas.microsoft.com/office/drawing/2014/main" id="{E2D936D1-39AE-26AF-D723-FF5E0D4E35B6}"/>
+              </a:ext>
+            </a:extLst>
+          </p:cNvPr>
+          <p:cNvSpPr/>
+          <p:nvPr/>
+        </p:nvSpPr>
+        <p:spPr>
+          <a:xfrm>
+            <a:off x="3663229" y="7399550"/>
+            <a:ext cx="180000" cy="108000"/>
+          </a:xfrm>
+          <a:prstGeom prst="rect">
+            <a:avLst/>
+          </a:prstGeom>
+          <a:solidFill>
+            <a:schemeClr val="tx1"/>
+          </a:solidFill>
+          <a:ln>
+            <a:noFill/>
+          </a:ln>
+        </p:spPr>
+        <p:style>
+          <a:lnRef idx="2">
+            <a:schemeClr val="accent1">
+              <a:shade val="15000"/>
+            </a:schemeClr>
+          </a:lnRef>
+          <a:fillRef idx="1">
+            <a:schemeClr val="accent1"/>
+          </a:fillRef>
+          <a:effectRef idx="0">
+            <a:schemeClr val="accent1"/>
+          </a:effectRef>
+          <a:fontRef idx="minor">
+            <a:schemeClr val="lt1"/>
+          </a:fontRef>
+        </p:style>
+        <p:txBody>
+          <a:bodyPr rtlCol="0" anchor="ctr"/>
+          <a:lstStyle/>
+          <a:p>
+            <a:pPr algn="ctr"/>
+            <a:endParaRPr lang="pt-BR"/>
+          </a:p>
+        </p:txBody>
+      </p:sp>
     </p:spTree>
     <p:extLst>
       <p:ext uri="{BB962C8B-B14F-4D97-AF65-F5344CB8AC3E}">
@@ -9237,6 +13740,181 @@
 </file>
 
 <file path=ppt/slides/slide2.xml><?xml version="1.0" encoding="utf-8"?>
+<p:sld xmlns:a="http://schemas.openxmlformats.org/drawingml/2006/main" xmlns:r="http://schemas.openxmlformats.org/officeDocument/2006/relationships" xmlns:p="http://schemas.openxmlformats.org/presentationml/2006/main">
+  <p:cSld>
+    <p:spTree>
+      <p:nvGrpSpPr>
+        <p:cNvPr id="1" name=""/>
+        <p:cNvGrpSpPr/>
+        <p:nvPr/>
+      </p:nvGrpSpPr>
+      <p:grpSpPr>
+        <a:xfrm>
+          <a:off x="0" y="0"/>
+          <a:ext cx="0" cy="0"/>
+          <a:chOff x="0" y="0"/>
+          <a:chExt cx="0" cy="0"/>
+        </a:xfrm>
+      </p:grpSpPr>
+      <p:sp>
+        <p:nvSpPr>
+          <p:cNvPr id="4" name="Retângulo 3">
+            <a:extLst>
+              <a:ext uri="{FF2B5EF4-FFF2-40B4-BE49-F238E27FC236}">
+                <a16:creationId xmlns:a16="http://schemas.microsoft.com/office/drawing/2014/main" id="{30DB928B-A821-C257-5825-8495B0514ECA}"/>
+              </a:ext>
+            </a:extLst>
+          </p:cNvPr>
+          <p:cNvSpPr/>
+          <p:nvPr/>
+        </p:nvSpPr>
+        <p:spPr>
+          <a:xfrm>
+            <a:off x="2046369" y="862769"/>
+            <a:ext cx="8099261" cy="4225521"/>
+          </a:xfrm>
+          <a:prstGeom prst="rect">
+            <a:avLst/>
+          </a:prstGeom>
+          <a:solidFill>
+            <a:schemeClr val="bg1">
+              <a:lumMod val="85000"/>
+            </a:schemeClr>
+          </a:solidFill>
+          <a:ln>
+            <a:noFill/>
+          </a:ln>
+        </p:spPr>
+        <p:style>
+          <a:lnRef idx="2">
+            <a:schemeClr val="accent1">
+              <a:shade val="15000"/>
+            </a:schemeClr>
+          </a:lnRef>
+          <a:fillRef idx="1">
+            <a:schemeClr val="accent1"/>
+          </a:fillRef>
+          <a:effectRef idx="0">
+            <a:schemeClr val="accent1"/>
+          </a:effectRef>
+          <a:fontRef idx="minor">
+            <a:schemeClr val="lt1"/>
+          </a:fontRef>
+        </p:style>
+        <p:txBody>
+          <a:bodyPr rtlCol="0" anchor="ctr"/>
+          <a:lstStyle/>
+          <a:p>
+            <a:pPr algn="ctr"/>
+            <a:endParaRPr lang="pt-BR"/>
+          </a:p>
+        </p:txBody>
+      </p:sp>
+      <p:pic>
+        <p:nvPicPr>
+          <p:cNvPr id="5" name="Imagem 4">
+            <a:extLst>
+              <a:ext uri="{FF2B5EF4-FFF2-40B4-BE49-F238E27FC236}">
+                <a16:creationId xmlns:a16="http://schemas.microsoft.com/office/drawing/2014/main" id="{B49E97C0-F59F-1C86-E1CA-E0F43FF5DD70}"/>
+              </a:ext>
+            </a:extLst>
+          </p:cNvPr>
+          <p:cNvPicPr>
+            <a:picLocks noChangeAspect="1"/>
+          </p:cNvPicPr>
+          <p:nvPr/>
+        </p:nvPicPr>
+        <p:blipFill>
+          <a:blip r:embed="rId2"/>
+          <a:stretch>
+            <a:fillRect/>
+          </a:stretch>
+        </p:blipFill>
+        <p:spPr>
+          <a:xfrm rot="21171668">
+            <a:off x="3878597" y="678639"/>
+            <a:ext cx="4434804" cy="5913072"/>
+          </a:xfrm>
+          <a:prstGeom prst="rect">
+            <a:avLst/>
+          </a:prstGeom>
+        </p:spPr>
+      </p:pic>
+    </p:spTree>
+    <p:extLst>
+      <p:ext uri="{BB962C8B-B14F-4D97-AF65-F5344CB8AC3E}">
+        <p14:creationId xmlns:p14="http://schemas.microsoft.com/office/powerpoint/2010/main" val="4263816774"/>
+      </p:ext>
+    </p:extLst>
+  </p:cSld>
+  <p:clrMapOvr>
+    <a:masterClrMapping/>
+  </p:clrMapOvr>
+</p:sld>
+</file>
+
+<file path=ppt/slides/slide3.xml><?xml version="1.0" encoding="utf-8"?>
+<p:sld xmlns:a="http://schemas.openxmlformats.org/drawingml/2006/main" xmlns:r="http://schemas.openxmlformats.org/officeDocument/2006/relationships" xmlns:p="http://schemas.openxmlformats.org/presentationml/2006/main">
+  <p:cSld>
+    <p:spTree>
+      <p:nvGrpSpPr>
+        <p:cNvPr id="1" name=""/>
+        <p:cNvGrpSpPr/>
+        <p:nvPr/>
+      </p:nvGrpSpPr>
+      <p:grpSpPr>
+        <a:xfrm>
+          <a:off x="0" y="0"/>
+          <a:ext cx="0" cy="0"/>
+          <a:chOff x="0" y="0"/>
+          <a:chExt cx="0" cy="0"/>
+        </a:xfrm>
+      </p:grpSpPr>
+      <p:pic>
+        <p:nvPicPr>
+          <p:cNvPr id="5" name="Imagem 4">
+            <a:extLst>
+              <a:ext uri="{FF2B5EF4-FFF2-40B4-BE49-F238E27FC236}">
+                <a16:creationId xmlns:a16="http://schemas.microsoft.com/office/drawing/2014/main" id="{C113BEE1-131D-2476-A9E4-E6081342646A}"/>
+              </a:ext>
+            </a:extLst>
+          </p:cNvPr>
+          <p:cNvPicPr>
+            <a:picLocks noChangeAspect="1"/>
+          </p:cNvPicPr>
+          <p:nvPr/>
+        </p:nvPicPr>
+        <p:blipFill>
+          <a:blip r:embed="rId2"/>
+          <a:srcRect t="6890" b="27285"/>
+          <a:stretch>
+            <a:fillRect/>
+          </a:stretch>
+        </p:blipFill>
+        <p:spPr>
+          <a:xfrm>
+            <a:off x="2209800" y="771526"/>
+            <a:ext cx="7772400" cy="4057650"/>
+          </a:xfrm>
+          <a:prstGeom prst="rect">
+            <a:avLst/>
+          </a:prstGeom>
+        </p:spPr>
+      </p:pic>
+    </p:spTree>
+    <p:extLst>
+      <p:ext uri="{BB962C8B-B14F-4D97-AF65-F5344CB8AC3E}">
+        <p14:creationId xmlns:p14="http://schemas.microsoft.com/office/powerpoint/2010/main" val="1029161573"/>
+      </p:ext>
+    </p:extLst>
+  </p:cSld>
+  <p:clrMapOvr>
+    <a:masterClrMapping/>
+  </p:clrMapOvr>
+</p:sld>
+</file>
+
+<file path=ppt/slides/slide4.xml><?xml version="1.0" encoding="utf-8"?>
 <p:sld xmlns:a="http://schemas.openxmlformats.org/drawingml/2006/main" xmlns:r="http://schemas.openxmlformats.org/officeDocument/2006/relationships" xmlns:p="http://schemas.openxmlformats.org/presentationml/2006/main">
   <p:cSld>
     <p:spTree>
@@ -9317,50 +13995,6 @@
           </a:p>
         </p:txBody>
       </p:sp>
-      <p:sp>
-        <p:nvSpPr>
-          <p:cNvPr id="5" name="CaixaDeTexto 4">
-            <a:extLst>
-              <a:ext uri="{FF2B5EF4-FFF2-40B4-BE49-F238E27FC236}">
-                <a16:creationId xmlns:a16="http://schemas.microsoft.com/office/drawing/2014/main" id="{F2FCC20B-2FD2-9ED4-1387-62E3F1430EA8}"/>
-              </a:ext>
-            </a:extLst>
-          </p:cNvPr>
-          <p:cNvSpPr txBox="1"/>
-          <p:nvPr/>
-        </p:nvSpPr>
-        <p:spPr>
-          <a:xfrm>
-            <a:off x="3612220" y="1134295"/>
-            <a:ext cx="635505" cy="1569660"/>
-          </a:xfrm>
-          <a:prstGeom prst="rect">
-            <a:avLst/>
-          </a:prstGeom>
-          <a:noFill/>
-          <a:ln>
-            <a:noFill/>
-          </a:ln>
-        </p:spPr>
-        <p:txBody>
-          <a:bodyPr wrap="square" rtlCol="0">
-            <a:spAutoFit/>
-          </a:bodyPr>
-          <a:lstStyle/>
-          <a:p>
-            <a:r>
-              <a:rPr lang="pt-BR" sz="9600" b="1" dirty="0">
-                <a:solidFill>
-                  <a:schemeClr val="bg1"/>
-                </a:solidFill>
-                <a:latin typeface="Aharoni" panose="02010803020104030203" pitchFamily="2" charset="-79"/>
-                <a:cs typeface="Aharoni" panose="02010803020104030203" pitchFamily="2" charset="-79"/>
-              </a:rPr>
-              <a:t>5</a:t>
-            </a:r>
-          </a:p>
-        </p:txBody>
-      </p:sp>
       <p:pic>
         <p:nvPicPr>
           <p:cNvPr id="6" name="Imagem 5" descr="Resultado da Quina: ninguém acerta dezenas, e prêmio acumula em R$ 1,5  milhão; confira números">
@@ -9391,6 +14025,780 @@
           </a:prstGeom>
         </p:spPr>
       </p:pic>
+      <p:sp>
+        <p:nvSpPr>
+          <p:cNvPr id="2" name="CaixaDeTexto 1">
+            <a:extLst>
+              <a:ext uri="{FF2B5EF4-FFF2-40B4-BE49-F238E27FC236}">
+                <a16:creationId xmlns:a16="http://schemas.microsoft.com/office/drawing/2014/main" id="{86386E28-1880-FDBD-A4C0-67E49E6E4DE3}"/>
+              </a:ext>
+            </a:extLst>
+          </p:cNvPr>
+          <p:cNvSpPr txBox="1"/>
+          <p:nvPr/>
+        </p:nvSpPr>
+        <p:spPr>
+          <a:xfrm>
+            <a:off x="3632887" y="906797"/>
+            <a:ext cx="1223319" cy="1862048"/>
+          </a:xfrm>
+          <a:prstGeom prst="rect">
+            <a:avLst/>
+          </a:prstGeom>
+          <a:noFill/>
+        </p:spPr>
+        <p:txBody>
+          <a:bodyPr wrap="square" rtlCol="0">
+            <a:spAutoFit/>
+          </a:bodyPr>
+          <a:lstStyle/>
+          <a:p>
+            <a:r>
+              <a:rPr lang="pt-BR" sz="11500" dirty="0">
+                <a:solidFill>
+                  <a:schemeClr val="bg1">
+                    <a:alpha val="32000"/>
+                  </a:schemeClr>
+                </a:solidFill>
+                <a:latin typeface="Aharoni" panose="02010803020104030203" pitchFamily="2" charset="-79"/>
+                <a:cs typeface="Aharoni" panose="02010803020104030203" pitchFamily="2" charset="-79"/>
+              </a:rPr>
+              <a:t>5</a:t>
+            </a:r>
+          </a:p>
+        </p:txBody>
+      </p:sp>
+      <p:sp>
+        <p:nvSpPr>
+          <p:cNvPr id="3" name="CaixaDeTexto 2">
+            <a:extLst>
+              <a:ext uri="{FF2B5EF4-FFF2-40B4-BE49-F238E27FC236}">
+                <a16:creationId xmlns:a16="http://schemas.microsoft.com/office/drawing/2014/main" id="{4B78EA91-4D2E-96B1-1B38-F3B667CBED01}"/>
+              </a:ext>
+            </a:extLst>
+          </p:cNvPr>
+          <p:cNvSpPr txBox="1"/>
+          <p:nvPr/>
+        </p:nvSpPr>
+        <p:spPr>
+          <a:xfrm>
+            <a:off x="4511652" y="355862"/>
+            <a:ext cx="1223319" cy="1862048"/>
+          </a:xfrm>
+          <a:prstGeom prst="rect">
+            <a:avLst/>
+          </a:prstGeom>
+          <a:noFill/>
+        </p:spPr>
+        <p:txBody>
+          <a:bodyPr wrap="square" rtlCol="0">
+            <a:spAutoFit/>
+          </a:bodyPr>
+          <a:lstStyle/>
+          <a:p>
+            <a:r>
+              <a:rPr lang="pt-BR" sz="11500" dirty="0">
+                <a:solidFill>
+                  <a:schemeClr val="bg1">
+                    <a:alpha val="32000"/>
+                  </a:schemeClr>
+                </a:solidFill>
+                <a:latin typeface="Aharoni" panose="02010803020104030203" pitchFamily="2" charset="-79"/>
+                <a:cs typeface="Aharoni" panose="02010803020104030203" pitchFamily="2" charset="-79"/>
+              </a:rPr>
+              <a:t>5</a:t>
+            </a:r>
+          </a:p>
+        </p:txBody>
+      </p:sp>
+      <p:sp>
+        <p:nvSpPr>
+          <p:cNvPr id="7" name="CaixaDeTexto 6">
+            <a:extLst>
+              <a:ext uri="{FF2B5EF4-FFF2-40B4-BE49-F238E27FC236}">
+                <a16:creationId xmlns:a16="http://schemas.microsoft.com/office/drawing/2014/main" id="{AA7A7EA8-77AF-4D5B-727B-3B90E91E02A0}"/>
+              </a:ext>
+            </a:extLst>
+          </p:cNvPr>
+          <p:cNvSpPr txBox="1"/>
+          <p:nvPr/>
+        </p:nvSpPr>
+        <p:spPr>
+          <a:xfrm>
+            <a:off x="5444587" y="178890"/>
+            <a:ext cx="1223319" cy="2215991"/>
+          </a:xfrm>
+          <a:prstGeom prst="rect">
+            <a:avLst/>
+          </a:prstGeom>
+          <a:noFill/>
+        </p:spPr>
+        <p:txBody>
+          <a:bodyPr wrap="square" rtlCol="0">
+            <a:spAutoFit/>
+          </a:bodyPr>
+          <a:lstStyle/>
+          <a:p>
+            <a:r>
+              <a:rPr lang="pt-BR" sz="13800" dirty="0">
+                <a:solidFill>
+                  <a:schemeClr val="bg1">
+                    <a:alpha val="32000"/>
+                  </a:schemeClr>
+                </a:solidFill>
+                <a:latin typeface="Aharoni" panose="02010803020104030203" pitchFamily="2" charset="-79"/>
+                <a:cs typeface="Aharoni" panose="02010803020104030203" pitchFamily="2" charset="-79"/>
+              </a:rPr>
+              <a:t>5</a:t>
+            </a:r>
+          </a:p>
+        </p:txBody>
+      </p:sp>
+      <p:sp>
+        <p:nvSpPr>
+          <p:cNvPr id="8" name="CaixaDeTexto 7">
+            <a:extLst>
+              <a:ext uri="{FF2B5EF4-FFF2-40B4-BE49-F238E27FC236}">
+                <a16:creationId xmlns:a16="http://schemas.microsoft.com/office/drawing/2014/main" id="{4CC96F6E-9FF9-C2EC-63E7-A3610BBD0AFB}"/>
+              </a:ext>
+            </a:extLst>
+          </p:cNvPr>
+          <p:cNvSpPr txBox="1"/>
+          <p:nvPr/>
+        </p:nvSpPr>
+        <p:spPr>
+          <a:xfrm>
+            <a:off x="6613736" y="-201199"/>
+            <a:ext cx="1223319" cy="2215991"/>
+          </a:xfrm>
+          <a:prstGeom prst="rect">
+            <a:avLst/>
+          </a:prstGeom>
+          <a:noFill/>
+        </p:spPr>
+        <p:txBody>
+          <a:bodyPr wrap="square" rtlCol="0">
+            <a:spAutoFit/>
+          </a:bodyPr>
+          <a:lstStyle/>
+          <a:p>
+            <a:r>
+              <a:rPr lang="pt-BR" sz="13800" dirty="0">
+                <a:solidFill>
+                  <a:schemeClr val="bg1">
+                    <a:alpha val="32000"/>
+                  </a:schemeClr>
+                </a:solidFill>
+                <a:latin typeface="Aharoni" panose="02010803020104030203" pitchFamily="2" charset="-79"/>
+                <a:cs typeface="Aharoni" panose="02010803020104030203" pitchFamily="2" charset="-79"/>
+              </a:rPr>
+              <a:t>5</a:t>
+            </a:r>
+          </a:p>
+        </p:txBody>
+      </p:sp>
+      <p:sp>
+        <p:nvSpPr>
+          <p:cNvPr id="9" name="CaixaDeTexto 8">
+            <a:extLst>
+              <a:ext uri="{FF2B5EF4-FFF2-40B4-BE49-F238E27FC236}">
+                <a16:creationId xmlns:a16="http://schemas.microsoft.com/office/drawing/2014/main" id="{17B731F3-ABE1-3985-B8B0-258A5C036ED0}"/>
+              </a:ext>
+            </a:extLst>
+          </p:cNvPr>
+          <p:cNvSpPr txBox="1"/>
+          <p:nvPr/>
+        </p:nvSpPr>
+        <p:spPr>
+          <a:xfrm>
+            <a:off x="5868524" y="1076281"/>
+            <a:ext cx="1223319" cy="1862048"/>
+          </a:xfrm>
+          <a:prstGeom prst="rect">
+            <a:avLst/>
+          </a:prstGeom>
+          <a:noFill/>
+        </p:spPr>
+        <p:txBody>
+          <a:bodyPr wrap="square" rtlCol="0">
+            <a:spAutoFit/>
+          </a:bodyPr>
+          <a:lstStyle/>
+          <a:p>
+            <a:r>
+              <a:rPr lang="pt-BR" sz="11500" dirty="0">
+                <a:solidFill>
+                  <a:schemeClr val="bg1">
+                    <a:alpha val="32000"/>
+                  </a:schemeClr>
+                </a:solidFill>
+                <a:latin typeface="Aharoni" panose="02010803020104030203" pitchFamily="2" charset="-79"/>
+                <a:cs typeface="Aharoni" panose="02010803020104030203" pitchFamily="2" charset="-79"/>
+              </a:rPr>
+              <a:t>5</a:t>
+            </a:r>
+          </a:p>
+        </p:txBody>
+      </p:sp>
+      <p:sp>
+        <p:nvSpPr>
+          <p:cNvPr id="10" name="CaixaDeTexto 9">
+            <a:extLst>
+              <a:ext uri="{FF2B5EF4-FFF2-40B4-BE49-F238E27FC236}">
+                <a16:creationId xmlns:a16="http://schemas.microsoft.com/office/drawing/2014/main" id="{84EBB85C-8D00-0B01-64BE-5134B2BA36C5}"/>
+              </a:ext>
+            </a:extLst>
+          </p:cNvPr>
+          <p:cNvSpPr txBox="1"/>
+          <p:nvPr/>
+        </p:nvSpPr>
+        <p:spPr>
+          <a:xfrm>
+            <a:off x="6644627" y="1202435"/>
+            <a:ext cx="1223319" cy="2215991"/>
+          </a:xfrm>
+          <a:prstGeom prst="rect">
+            <a:avLst/>
+          </a:prstGeom>
+          <a:noFill/>
+        </p:spPr>
+        <p:txBody>
+          <a:bodyPr wrap="square" rtlCol="0">
+            <a:spAutoFit/>
+          </a:bodyPr>
+          <a:lstStyle/>
+          <a:p>
+            <a:r>
+              <a:rPr lang="pt-BR" sz="13800" dirty="0">
+                <a:solidFill>
+                  <a:schemeClr val="bg1">
+                    <a:alpha val="32000"/>
+                  </a:schemeClr>
+                </a:solidFill>
+                <a:latin typeface="Aharoni" panose="02010803020104030203" pitchFamily="2" charset="-79"/>
+                <a:cs typeface="Aharoni" panose="02010803020104030203" pitchFamily="2" charset="-79"/>
+              </a:rPr>
+              <a:t>5</a:t>
+            </a:r>
+          </a:p>
+        </p:txBody>
+      </p:sp>
+      <p:sp>
+        <p:nvSpPr>
+          <p:cNvPr id="11" name="CaixaDeTexto 10">
+            <a:extLst>
+              <a:ext uri="{FF2B5EF4-FFF2-40B4-BE49-F238E27FC236}">
+                <a16:creationId xmlns:a16="http://schemas.microsoft.com/office/drawing/2014/main" id="{0FBF23A0-2DCC-ED7B-7D6E-D7D6E7B85CF7}"/>
+              </a:ext>
+            </a:extLst>
+          </p:cNvPr>
+          <p:cNvSpPr txBox="1"/>
+          <p:nvPr/>
+        </p:nvSpPr>
+        <p:spPr>
+          <a:xfrm>
+            <a:off x="7970608" y="1237695"/>
+            <a:ext cx="1223319" cy="1569660"/>
+          </a:xfrm>
+          <a:prstGeom prst="rect">
+            <a:avLst/>
+          </a:prstGeom>
+          <a:noFill/>
+        </p:spPr>
+        <p:txBody>
+          <a:bodyPr wrap="square" rtlCol="0">
+            <a:spAutoFit/>
+          </a:bodyPr>
+          <a:lstStyle/>
+          <a:p>
+            <a:r>
+              <a:rPr lang="pt-BR" sz="9600" dirty="0">
+                <a:solidFill>
+                  <a:schemeClr val="bg1">
+                    <a:alpha val="32000"/>
+                  </a:schemeClr>
+                </a:solidFill>
+                <a:latin typeface="Aharoni" panose="02010803020104030203" pitchFamily="2" charset="-79"/>
+                <a:cs typeface="Aharoni" panose="02010803020104030203" pitchFamily="2" charset="-79"/>
+              </a:rPr>
+              <a:t>5</a:t>
+            </a:r>
+          </a:p>
+        </p:txBody>
+      </p:sp>
+      <p:sp>
+        <p:nvSpPr>
+          <p:cNvPr id="12" name="CaixaDeTexto 11">
+            <a:extLst>
+              <a:ext uri="{FF2B5EF4-FFF2-40B4-BE49-F238E27FC236}">
+                <a16:creationId xmlns:a16="http://schemas.microsoft.com/office/drawing/2014/main" id="{C1D25B6C-FD12-8304-49D6-72902C6AB5EA}"/>
+              </a:ext>
+            </a:extLst>
+          </p:cNvPr>
+          <p:cNvSpPr txBox="1"/>
+          <p:nvPr/>
+        </p:nvSpPr>
+        <p:spPr>
+          <a:xfrm>
+            <a:off x="6897603" y="1076280"/>
+            <a:ext cx="1223319" cy="1107996"/>
+          </a:xfrm>
+          <a:prstGeom prst="rect">
+            <a:avLst/>
+          </a:prstGeom>
+          <a:noFill/>
+        </p:spPr>
+        <p:txBody>
+          <a:bodyPr wrap="square" rtlCol="0">
+            <a:spAutoFit/>
+          </a:bodyPr>
+          <a:lstStyle/>
+          <a:p>
+            <a:r>
+              <a:rPr lang="pt-BR" sz="6600" dirty="0">
+                <a:solidFill>
+                  <a:schemeClr val="bg1">
+                    <a:alpha val="32000"/>
+                  </a:schemeClr>
+                </a:solidFill>
+                <a:latin typeface="Aharoni" panose="02010803020104030203" pitchFamily="2" charset="-79"/>
+                <a:cs typeface="Aharoni" panose="02010803020104030203" pitchFamily="2" charset="-79"/>
+              </a:rPr>
+              <a:t>5</a:t>
+            </a:r>
+          </a:p>
+        </p:txBody>
+      </p:sp>
+      <p:sp>
+        <p:nvSpPr>
+          <p:cNvPr id="13" name="CaixaDeTexto 12">
+            <a:extLst>
+              <a:ext uri="{FF2B5EF4-FFF2-40B4-BE49-F238E27FC236}">
+                <a16:creationId xmlns:a16="http://schemas.microsoft.com/office/drawing/2014/main" id="{FF7FAD46-0705-F459-FE2E-000653DF8007}"/>
+              </a:ext>
+            </a:extLst>
+          </p:cNvPr>
+          <p:cNvSpPr txBox="1"/>
+          <p:nvPr/>
+        </p:nvSpPr>
+        <p:spPr>
+          <a:xfrm>
+            <a:off x="7709108" y="141383"/>
+            <a:ext cx="1223319" cy="2215991"/>
+          </a:xfrm>
+          <a:prstGeom prst="rect">
+            <a:avLst/>
+          </a:prstGeom>
+          <a:noFill/>
+        </p:spPr>
+        <p:txBody>
+          <a:bodyPr wrap="square" rtlCol="0">
+            <a:spAutoFit/>
+          </a:bodyPr>
+          <a:lstStyle/>
+          <a:p>
+            <a:r>
+              <a:rPr lang="pt-BR" sz="13800" dirty="0">
+                <a:solidFill>
+                  <a:srgbClr val="2E116A">
+                    <a:alpha val="38000"/>
+                  </a:srgbClr>
+                </a:solidFill>
+                <a:latin typeface="Aharoni" panose="02010803020104030203" pitchFamily="2" charset="-79"/>
+                <a:cs typeface="Aharoni" panose="02010803020104030203" pitchFamily="2" charset="-79"/>
+              </a:rPr>
+              <a:t>5</a:t>
+            </a:r>
+          </a:p>
+        </p:txBody>
+      </p:sp>
+      <p:sp>
+        <p:nvSpPr>
+          <p:cNvPr id="14" name="CaixaDeTexto 13">
+            <a:extLst>
+              <a:ext uri="{FF2B5EF4-FFF2-40B4-BE49-F238E27FC236}">
+                <a16:creationId xmlns:a16="http://schemas.microsoft.com/office/drawing/2014/main" id="{41FBC30A-B16A-EEB2-71BC-4BB93C67E1EC}"/>
+              </a:ext>
+            </a:extLst>
+          </p:cNvPr>
+          <p:cNvSpPr txBox="1"/>
+          <p:nvPr/>
+        </p:nvSpPr>
+        <p:spPr>
+          <a:xfrm>
+            <a:off x="7328185" y="1178690"/>
+            <a:ext cx="1223319" cy="1862048"/>
+          </a:xfrm>
+          <a:prstGeom prst="rect">
+            <a:avLst/>
+          </a:prstGeom>
+          <a:noFill/>
+        </p:spPr>
+        <p:txBody>
+          <a:bodyPr wrap="square" rtlCol="0">
+            <a:spAutoFit/>
+          </a:bodyPr>
+          <a:lstStyle/>
+          <a:p>
+            <a:r>
+              <a:rPr lang="pt-BR" sz="11500" dirty="0">
+                <a:solidFill>
+                  <a:srgbClr val="2E116A">
+                    <a:alpha val="38000"/>
+                  </a:srgbClr>
+                </a:solidFill>
+                <a:latin typeface="Aharoni" panose="02010803020104030203" pitchFamily="2" charset="-79"/>
+                <a:cs typeface="Aharoni" panose="02010803020104030203" pitchFamily="2" charset="-79"/>
+              </a:rPr>
+              <a:t>5</a:t>
+            </a:r>
+          </a:p>
+        </p:txBody>
+      </p:sp>
+      <p:sp>
+        <p:nvSpPr>
+          <p:cNvPr id="15" name="CaixaDeTexto 14">
+            <a:extLst>
+              <a:ext uri="{FF2B5EF4-FFF2-40B4-BE49-F238E27FC236}">
+                <a16:creationId xmlns:a16="http://schemas.microsoft.com/office/drawing/2014/main" id="{B1526A96-9442-7ABC-E02D-3FE4A3D11B05}"/>
+              </a:ext>
+            </a:extLst>
+          </p:cNvPr>
+          <p:cNvSpPr txBox="1"/>
+          <p:nvPr/>
+        </p:nvSpPr>
+        <p:spPr>
+          <a:xfrm>
+            <a:off x="4672161" y="975983"/>
+            <a:ext cx="1223319" cy="2215991"/>
+          </a:xfrm>
+          <a:prstGeom prst="rect">
+            <a:avLst/>
+          </a:prstGeom>
+          <a:noFill/>
+        </p:spPr>
+        <p:txBody>
+          <a:bodyPr wrap="square" rtlCol="0">
+            <a:spAutoFit/>
+          </a:bodyPr>
+          <a:lstStyle/>
+          <a:p>
+            <a:r>
+              <a:rPr lang="pt-BR" sz="13800" dirty="0">
+                <a:solidFill>
+                  <a:srgbClr val="2E116A">
+                    <a:alpha val="38000"/>
+                  </a:srgbClr>
+                </a:solidFill>
+                <a:latin typeface="Aharoni" panose="02010803020104030203" pitchFamily="2" charset="-79"/>
+                <a:cs typeface="Aharoni" panose="02010803020104030203" pitchFamily="2" charset="-79"/>
+              </a:rPr>
+              <a:t>5</a:t>
+            </a:r>
+          </a:p>
+        </p:txBody>
+      </p:sp>
+      <p:sp>
+        <p:nvSpPr>
+          <p:cNvPr id="16" name="CaixaDeTexto 15">
+            <a:extLst>
+              <a:ext uri="{FF2B5EF4-FFF2-40B4-BE49-F238E27FC236}">
+                <a16:creationId xmlns:a16="http://schemas.microsoft.com/office/drawing/2014/main" id="{63611B01-54DF-94BD-682B-9787944F151E}"/>
+              </a:ext>
+            </a:extLst>
+          </p:cNvPr>
+          <p:cNvSpPr txBox="1"/>
+          <p:nvPr/>
+        </p:nvSpPr>
+        <p:spPr>
+          <a:xfrm>
+            <a:off x="5096226" y="455415"/>
+            <a:ext cx="1223319" cy="1446550"/>
+          </a:xfrm>
+          <a:prstGeom prst="rect">
+            <a:avLst/>
+          </a:prstGeom>
+          <a:noFill/>
+        </p:spPr>
+        <p:txBody>
+          <a:bodyPr wrap="square" rtlCol="0">
+            <a:spAutoFit/>
+          </a:bodyPr>
+          <a:lstStyle/>
+          <a:p>
+            <a:r>
+              <a:rPr lang="pt-BR" sz="8800" dirty="0">
+                <a:solidFill>
+                  <a:srgbClr val="2E116A">
+                    <a:alpha val="38000"/>
+                  </a:srgbClr>
+                </a:solidFill>
+                <a:latin typeface="Aharoni" panose="02010803020104030203" pitchFamily="2" charset="-79"/>
+                <a:cs typeface="Aharoni" panose="02010803020104030203" pitchFamily="2" charset="-79"/>
+              </a:rPr>
+              <a:t>5</a:t>
+            </a:r>
+          </a:p>
+        </p:txBody>
+      </p:sp>
+      <p:sp>
+        <p:nvSpPr>
+          <p:cNvPr id="17" name="CaixaDeTexto 16">
+            <a:extLst>
+              <a:ext uri="{FF2B5EF4-FFF2-40B4-BE49-F238E27FC236}">
+                <a16:creationId xmlns:a16="http://schemas.microsoft.com/office/drawing/2014/main" id="{8A462D07-C37E-3D59-D93B-3EEE6302A92A}"/>
+              </a:ext>
+            </a:extLst>
+          </p:cNvPr>
+          <p:cNvSpPr txBox="1"/>
+          <p:nvPr/>
+        </p:nvSpPr>
+        <p:spPr>
+          <a:xfrm>
+            <a:off x="6131822" y="381988"/>
+            <a:ext cx="1223319" cy="1569660"/>
+          </a:xfrm>
+          <a:prstGeom prst="rect">
+            <a:avLst/>
+          </a:prstGeom>
+          <a:noFill/>
+        </p:spPr>
+        <p:txBody>
+          <a:bodyPr wrap="square" rtlCol="0">
+            <a:spAutoFit/>
+          </a:bodyPr>
+          <a:lstStyle/>
+          <a:p>
+            <a:r>
+              <a:rPr lang="pt-BR" sz="9600" dirty="0">
+                <a:solidFill>
+                  <a:srgbClr val="2E116A">
+                    <a:alpha val="38000"/>
+                  </a:srgbClr>
+                </a:solidFill>
+                <a:latin typeface="Aharoni" panose="02010803020104030203" pitchFamily="2" charset="-79"/>
+                <a:cs typeface="Aharoni" panose="02010803020104030203" pitchFamily="2" charset="-79"/>
+              </a:rPr>
+              <a:t>5</a:t>
+            </a:r>
+          </a:p>
+        </p:txBody>
+      </p:sp>
+      <p:sp>
+        <p:nvSpPr>
+          <p:cNvPr id="18" name="CaixaDeTexto 17">
+            <a:extLst>
+              <a:ext uri="{FF2B5EF4-FFF2-40B4-BE49-F238E27FC236}">
+                <a16:creationId xmlns:a16="http://schemas.microsoft.com/office/drawing/2014/main" id="{D0BDF9DD-DEC5-52F1-6ED7-47039F66546C}"/>
+              </a:ext>
+            </a:extLst>
+          </p:cNvPr>
+          <p:cNvSpPr txBox="1"/>
+          <p:nvPr/>
+        </p:nvSpPr>
+        <p:spPr>
+          <a:xfrm>
+            <a:off x="6453033" y="1122108"/>
+            <a:ext cx="1223319" cy="1200329"/>
+          </a:xfrm>
+          <a:prstGeom prst="rect">
+            <a:avLst/>
+          </a:prstGeom>
+          <a:noFill/>
+        </p:spPr>
+        <p:txBody>
+          <a:bodyPr wrap="square" rtlCol="0">
+            <a:spAutoFit/>
+          </a:bodyPr>
+          <a:lstStyle/>
+          <a:p>
+            <a:r>
+              <a:rPr lang="pt-BR" sz="7200" dirty="0">
+                <a:solidFill>
+                  <a:srgbClr val="2E116A">
+                    <a:alpha val="38000"/>
+                  </a:srgbClr>
+                </a:solidFill>
+                <a:latin typeface="Aharoni" panose="02010803020104030203" pitchFamily="2" charset="-79"/>
+                <a:cs typeface="Aharoni" panose="02010803020104030203" pitchFamily="2" charset="-79"/>
+              </a:rPr>
+              <a:t>5</a:t>
+            </a:r>
+          </a:p>
+        </p:txBody>
+      </p:sp>
+      <p:sp>
+        <p:nvSpPr>
+          <p:cNvPr id="19" name="CaixaDeTexto 18">
+            <a:extLst>
+              <a:ext uri="{FF2B5EF4-FFF2-40B4-BE49-F238E27FC236}">
+                <a16:creationId xmlns:a16="http://schemas.microsoft.com/office/drawing/2014/main" id="{3A56F10F-1EA4-2D42-9266-3068622E0F8F}"/>
+              </a:ext>
+            </a:extLst>
+          </p:cNvPr>
+          <p:cNvSpPr txBox="1"/>
+          <p:nvPr/>
+        </p:nvSpPr>
+        <p:spPr>
+          <a:xfrm>
+            <a:off x="5473401" y="1480833"/>
+            <a:ext cx="1223319" cy="1200329"/>
+          </a:xfrm>
+          <a:prstGeom prst="rect">
+            <a:avLst/>
+          </a:prstGeom>
+          <a:noFill/>
+        </p:spPr>
+        <p:txBody>
+          <a:bodyPr wrap="square" rtlCol="0">
+            <a:spAutoFit/>
+          </a:bodyPr>
+          <a:lstStyle/>
+          <a:p>
+            <a:r>
+              <a:rPr lang="pt-BR" sz="7200" dirty="0">
+                <a:solidFill>
+                  <a:srgbClr val="2E116A">
+                    <a:alpha val="38000"/>
+                  </a:srgbClr>
+                </a:solidFill>
+                <a:latin typeface="Aharoni" panose="02010803020104030203" pitchFamily="2" charset="-79"/>
+                <a:cs typeface="Aharoni" panose="02010803020104030203" pitchFamily="2" charset="-79"/>
+              </a:rPr>
+              <a:t>5</a:t>
+            </a:r>
+          </a:p>
+        </p:txBody>
+      </p:sp>
+      <p:sp>
+        <p:nvSpPr>
+          <p:cNvPr id="20" name="CaixaDeTexto 19">
+            <a:extLst>
+              <a:ext uri="{FF2B5EF4-FFF2-40B4-BE49-F238E27FC236}">
+                <a16:creationId xmlns:a16="http://schemas.microsoft.com/office/drawing/2014/main" id="{623BBE57-086B-211B-D5A1-6DE5975A015C}"/>
+              </a:ext>
+            </a:extLst>
+          </p:cNvPr>
+          <p:cNvSpPr txBox="1"/>
+          <p:nvPr/>
+        </p:nvSpPr>
+        <p:spPr>
+          <a:xfrm>
+            <a:off x="7328057" y="227542"/>
+            <a:ext cx="1223319" cy="1446550"/>
+          </a:xfrm>
+          <a:prstGeom prst="rect">
+            <a:avLst/>
+          </a:prstGeom>
+          <a:noFill/>
+        </p:spPr>
+        <p:txBody>
+          <a:bodyPr wrap="square" rtlCol="0">
+            <a:spAutoFit/>
+          </a:bodyPr>
+          <a:lstStyle/>
+          <a:p>
+            <a:r>
+              <a:rPr lang="pt-BR" sz="8800" dirty="0">
+                <a:solidFill>
+                  <a:srgbClr val="2E116A">
+                    <a:alpha val="38000"/>
+                  </a:srgbClr>
+                </a:solidFill>
+                <a:latin typeface="Aharoni" panose="02010803020104030203" pitchFamily="2" charset="-79"/>
+                <a:cs typeface="Aharoni" panose="02010803020104030203" pitchFamily="2" charset="-79"/>
+              </a:rPr>
+              <a:t>5</a:t>
+            </a:r>
+          </a:p>
+        </p:txBody>
+      </p:sp>
+      <p:sp>
+        <p:nvSpPr>
+          <p:cNvPr id="21" name="CaixaDeTexto 20">
+            <a:extLst>
+              <a:ext uri="{FF2B5EF4-FFF2-40B4-BE49-F238E27FC236}">
+                <a16:creationId xmlns:a16="http://schemas.microsoft.com/office/drawing/2014/main" id="{90DA87CD-2D96-477A-AA90-F22B60D5F997}"/>
+              </a:ext>
+            </a:extLst>
+          </p:cNvPr>
+          <p:cNvSpPr txBox="1"/>
+          <p:nvPr/>
+        </p:nvSpPr>
+        <p:spPr>
+          <a:xfrm>
+            <a:off x="4213403" y="1320791"/>
+            <a:ext cx="1223319" cy="1323439"/>
+          </a:xfrm>
+          <a:prstGeom prst="rect">
+            <a:avLst/>
+          </a:prstGeom>
+          <a:noFill/>
+        </p:spPr>
+        <p:txBody>
+          <a:bodyPr wrap="square" rtlCol="0">
+            <a:spAutoFit/>
+          </a:bodyPr>
+          <a:lstStyle/>
+          <a:p>
+            <a:r>
+              <a:rPr lang="pt-BR" sz="8000" dirty="0">
+                <a:solidFill>
+                  <a:schemeClr val="bg1">
+                    <a:alpha val="32000"/>
+                  </a:schemeClr>
+                </a:solidFill>
+                <a:latin typeface="Aharoni" panose="02010803020104030203" pitchFamily="2" charset="-79"/>
+                <a:cs typeface="Aharoni" panose="02010803020104030203" pitchFamily="2" charset="-79"/>
+              </a:rPr>
+              <a:t>5</a:t>
+            </a:r>
+          </a:p>
+        </p:txBody>
+      </p:sp>
+      <p:sp>
+        <p:nvSpPr>
+          <p:cNvPr id="23" name="CaixaDeTexto 22">
+            <a:extLst>
+              <a:ext uri="{FF2B5EF4-FFF2-40B4-BE49-F238E27FC236}">
+                <a16:creationId xmlns:a16="http://schemas.microsoft.com/office/drawing/2014/main" id="{F3714CE9-7D02-F27D-AAFC-C4BE5111F312}"/>
+              </a:ext>
+            </a:extLst>
+          </p:cNvPr>
+          <p:cNvSpPr txBox="1"/>
+          <p:nvPr/>
+        </p:nvSpPr>
+        <p:spPr>
+          <a:xfrm>
+            <a:off x="7297294" y="1052676"/>
+            <a:ext cx="1223319" cy="1015663"/>
+          </a:xfrm>
+          <a:prstGeom prst="rect">
+            <a:avLst/>
+          </a:prstGeom>
+          <a:noFill/>
+        </p:spPr>
+        <p:txBody>
+          <a:bodyPr wrap="square" rtlCol="0">
+            <a:spAutoFit/>
+          </a:bodyPr>
+          <a:lstStyle/>
+          <a:p>
+            <a:r>
+              <a:rPr lang="pt-BR" sz="6000" dirty="0">
+                <a:solidFill>
+                  <a:schemeClr val="bg1">
+                    <a:alpha val="32000"/>
+                  </a:schemeClr>
+                </a:solidFill>
+                <a:latin typeface="Aharoni" panose="02010803020104030203" pitchFamily="2" charset="-79"/>
+                <a:cs typeface="Aharoni" panose="02010803020104030203" pitchFamily="2" charset="-79"/>
+              </a:rPr>
+              <a:t>5</a:t>
+            </a:r>
+          </a:p>
+        </p:txBody>
+      </p:sp>
     </p:spTree>
     <p:extLst>
       <p:ext uri="{BB962C8B-B14F-4D97-AF65-F5344CB8AC3E}">
@@ -9404,7 +14812,7 @@
 </p:sld>
 </file>
 
-<file path=ppt/slides/slide3.xml><?xml version="1.0" encoding="utf-8"?>
+<file path=ppt/slides/slide5.xml><?xml version="1.0" encoding="utf-8"?>
 <p:sld xmlns:a="http://schemas.openxmlformats.org/drawingml/2006/main" xmlns:r="http://schemas.openxmlformats.org/officeDocument/2006/relationships" xmlns:p="http://schemas.openxmlformats.org/presentationml/2006/main">
   <p:cSld>
     <p:spTree>
@@ -16981,7 +22389,7 @@
 </p:sld>
 </file>
 
-<file path=ppt/slides/slide4.xml><?xml version="1.0" encoding="utf-8"?>
+<file path=ppt/slides/slide6.xml><?xml version="1.0" encoding="utf-8"?>
 <p:sld xmlns:a="http://schemas.openxmlformats.org/drawingml/2006/main" xmlns:r="http://schemas.openxmlformats.org/officeDocument/2006/relationships" xmlns:p="http://schemas.openxmlformats.org/presentationml/2006/main">
   <p:cSld>
     <p:spTree>
